--- a/docs/pptx/whole/jx-linsubhr-sens-throm3.pptx
+++ b/docs/pptx/whole/jx-linsubhr-sens-throm3.pptx
@@ -5315,7 +5315,7 @@
           <p:spPr>
             <a:xfrm>
               <a:off x="817517" y="1896563"/>
-              <a:ext cx="6169365" cy="82021"/>
+              <a:ext cx="6833128" cy="82021"/>
             </a:xfrm>
             <a:prstGeom prst="rect">
               <a:avLst/>
@@ -5347,7 +5347,7 @@
                   <a:latin typeface="Helvetica"/>
                   <a:cs typeface="Helvetica"/>
                 </a:rPr>
-                <a:t>subHR per 0.1 ratio decline: 1.29 (1.04-1.59), p = 0.020  |  per IQR decline (Δ = 0.27): 2.00 (1.12-3.58)  |  IQR: [0.71, 0.98]</a:t>
+                <a:t>subHR per 0.1 ratio decline: 1.29 (1.04-1.59), p_Bonf = 0.118 (n = 6)  |  per IQR decline (Δ = 0.27): 2.00 (1.12-3.58)  |  IQR: [0.71, 0.98]</a:t>
               </a:r>
             </a:p>
           </p:txBody>

--- a/docs/pptx/whole/jx-linsubhr-sens-throm3.pptx
+++ b/docs/pptx/whole/jx-linsubhr-sens-throm3.pptx
@@ -5038,8 +5038,8 @@
           </p:nvSpPr>
           <p:spPr>
             <a:xfrm>
-              <a:off x="1980137" y="5785772"/>
-              <a:ext cx="155356" cy="80101"/>
+              <a:off x="1977028" y="5785772"/>
+              <a:ext cx="161574" cy="80101"/>
             </a:xfrm>
             <a:prstGeom prst="rect">
               <a:avLst/>
@@ -5071,7 +5071,7 @@
                   <a:latin typeface="Helvetica"/>
                   <a:cs typeface="Helvetica"/>
                 </a:rPr>
-                <a:t>0.6</a:t>
+                <a:t>-40</a:t>
               </a:r>
             </a:p>
           </p:txBody>
@@ -5084,8 +5084,8 @@
           </p:nvSpPr>
           <p:spPr>
             <a:xfrm>
-              <a:off x="3731922" y="5785772"/>
-              <a:ext cx="155356" cy="80101"/>
+              <a:off x="3728813" y="5785772"/>
+              <a:ext cx="161574" cy="80101"/>
             </a:xfrm>
             <a:prstGeom prst="rect">
               <a:avLst/>
@@ -5117,7 +5117,7 @@
                   <a:latin typeface="Helvetica"/>
                   <a:cs typeface="Helvetica"/>
                 </a:rPr>
-                <a:t>0.8</a:t>
+                <a:t>-20</a:t>
               </a:r>
             </a:p>
           </p:txBody>
@@ -5130,8 +5130,8 @@
           </p:nvSpPr>
           <p:spPr>
             <a:xfrm>
-              <a:off x="5483707" y="5785772"/>
-              <a:ext cx="155356" cy="80101"/>
+              <a:off x="5530296" y="5785772"/>
+              <a:ext cx="62179" cy="80101"/>
             </a:xfrm>
             <a:prstGeom prst="rect">
               <a:avLst/>
@@ -5163,7 +5163,7 @@
                   <a:latin typeface="Helvetica"/>
                   <a:cs typeface="Helvetica"/>
                 </a:rPr>
-                <a:t>1.0</a:t>
+                <a:t>0</a:t>
               </a:r>
             </a:p>
           </p:txBody>
@@ -5176,8 +5176,8 @@
           </p:nvSpPr>
           <p:spPr>
             <a:xfrm>
-              <a:off x="7235493" y="5785772"/>
-              <a:ext cx="155356" cy="80101"/>
+              <a:off x="7250992" y="5785772"/>
+              <a:ext cx="124358" cy="80101"/>
             </a:xfrm>
             <a:prstGeom prst="rect">
               <a:avLst/>
@@ -5209,7 +5209,7 @@
                   <a:latin typeface="Helvetica"/>
                   <a:cs typeface="Helvetica"/>
                 </a:rPr>
-                <a:t>1.2</a:t>
+                <a:t>20</a:t>
               </a:r>
             </a:p>
           </p:txBody>
@@ -5222,8 +5222,8 @@
           </p:nvSpPr>
           <p:spPr>
             <a:xfrm>
-              <a:off x="2691419" y="5925448"/>
-              <a:ext cx="4051889" cy="100218"/>
+              <a:off x="1561815" y="5925448"/>
+              <a:ext cx="6311097" cy="100218"/>
             </a:xfrm>
             <a:prstGeom prst="rect">
               <a:avLst/>
@@ -5255,7 +5255,7 @@
                   <a:latin typeface="Helvetica"/>
                   <a:cs typeface="Helvetica"/>
                 </a:rPr>
-                <a:t>Sensitivity eGFR Ratio (CKD-EPI 2012 CysC / CKD-EPI 2021 Cr)</a:t>
+                <a:t>Sensitivity eGFR Difference (%): 100 × (CKD-EPI 2012 CysC − CKD-EPI 2021 Cr) / CKD-EPI 2021 Cr</a:t>
               </a:r>
             </a:p>
           </p:txBody>
@@ -5315,7 +5315,7 @@
           <p:spPr>
             <a:xfrm>
               <a:off x="817517" y="1896563"/>
-              <a:ext cx="6833128" cy="82021"/>
+              <a:ext cx="6959864" cy="82021"/>
             </a:xfrm>
             <a:prstGeom prst="rect">
               <a:avLst/>
@@ -5347,7 +5347,7 @@
                   <a:latin typeface="Helvetica"/>
                   <a:cs typeface="Helvetica"/>
                 </a:rPr>
-                <a:t>subHR per 0.1 ratio decline: 1.29 (1.04-1.59), p_Bonf = 0.118 (n = 6)  |  per IQR decline (Δ = 0.27): 2.00 (1.12-3.58)  |  IQR: [0.71, 0.98]</a:t>
+                <a:t>subHR per 10 % decline: 1.29 (1.04-1.59), p_Bonf = 0.118 (n = 6)  |  per IQR decline (Δ = 27.5 %): 2.00 (1.12-3.58)  |  IQR: [-29.1, -1.6] %</a:t>
               </a:r>
             </a:p>
           </p:txBody>

--- a/docs/pptx/whole/jx-linsubhr-sens-throm3.pptx
+++ b/docs/pptx/whole/jx-linsubhr-sens-throm3.pptx
@@ -2265,34 +2265,26 @@
         </p:sp>
         <p:sp>
           <p:nvSpPr>
-            <p:cNvPr id="4" name="pl4"/>
+            <p:cNvPr id="4" name="rc4"/>
             <p:cNvSpPr/>
             <p:nvPr/>
           </p:nvSpPr>
           <p:spPr>
             <a:xfrm>
-              <a:off x="817517" y="5142518"/>
-              <a:ext cx="7799693" cy="0"/>
+              <a:off x="457200" y="1600200"/>
+              <a:ext cx="8229600" cy="4525962"/>
             </a:xfrm>
-            <a:custGeom>
+            <a:prstGeom prst="rect">
               <a:avLst/>
-              <a:pathLst>
-                <a:path w="7799693" h="0">
-                  <a:moveTo>
-                    <a:pt x="0" y="0"/>
-                  </a:moveTo>
-                  <a:lnTo>
-                    <a:pt x="7799693" y="0"/>
-                  </a:lnTo>
-                  <a:lnTo>
-                    <a:pt x="7799693" y="0"/>
-                  </a:lnTo>
-                </a:path>
-              </a:pathLst>
-            </a:custGeom>
-            <a:ln w="6775" cap="flat">
+            </a:prstGeom>
+            <a:solidFill>
+              <a:srgbClr val="FFFFFF">
+                <a:alpha val="100000"/>
+              </a:srgbClr>
+            </a:solidFill>
+            <a:ln w="13550" cap="rnd">
               <a:solidFill>
-                <a:srgbClr val="EBEBEB">
+                <a:srgbClr val="FFFFFF">
                   <a:alpha val="100000"/>
                 </a:srgbClr>
               </a:solidFill>
@@ -2314,21 +2306,21 @@
           </p:nvSpPr>
           <p:spPr>
             <a:xfrm>
-              <a:off x="817517" y="4313054"/>
-              <a:ext cx="7799693" cy="0"/>
+              <a:off x="887106" y="3250627"/>
+              <a:ext cx="7660515" cy="0"/>
             </a:xfrm>
             <a:custGeom>
               <a:avLst/>
               <a:pathLst>
-                <a:path w="7799693" h="0">
+                <a:path w="7660515" h="0">
                   <a:moveTo>
                     <a:pt x="0" y="0"/>
                   </a:moveTo>
                   <a:lnTo>
-                    <a:pt x="7799693" y="0"/>
-                  </a:lnTo>
-                  <a:lnTo>
-                    <a:pt x="7799693" y="0"/>
+                    <a:pt x="7660515" y="0"/>
+                  </a:lnTo>
+                  <a:lnTo>
+                    <a:pt x="7660515" y="0"/>
                   </a:lnTo>
                 </a:path>
               </a:pathLst>
@@ -2357,21 +2349,21 @@
           </p:nvSpPr>
           <p:spPr>
             <a:xfrm>
-              <a:off x="817517" y="3483591"/>
-              <a:ext cx="7799693" cy="0"/>
+              <a:off x="887106" y="2951293"/>
+              <a:ext cx="7660515" cy="0"/>
             </a:xfrm>
             <a:custGeom>
               <a:avLst/>
               <a:pathLst>
-                <a:path w="7799693" h="0">
+                <a:path w="7660515" h="0">
                   <a:moveTo>
                     <a:pt x="0" y="0"/>
                   </a:moveTo>
                   <a:lnTo>
-                    <a:pt x="7799693" y="0"/>
-                  </a:lnTo>
-                  <a:lnTo>
-                    <a:pt x="7799693" y="0"/>
+                    <a:pt x="7660515" y="0"/>
+                  </a:lnTo>
+                  <a:lnTo>
+                    <a:pt x="7660515" y="0"/>
                   </a:lnTo>
                 </a:path>
               </a:pathLst>
@@ -2400,21 +2392,21 @@
           </p:nvSpPr>
           <p:spPr>
             <a:xfrm>
-              <a:off x="817517" y="2654127"/>
-              <a:ext cx="7799693" cy="0"/>
+              <a:off x="887106" y="2651959"/>
+              <a:ext cx="7660515" cy="0"/>
             </a:xfrm>
             <a:custGeom>
               <a:avLst/>
               <a:pathLst>
-                <a:path w="7799693" h="0">
+                <a:path w="7660515" h="0">
                   <a:moveTo>
                     <a:pt x="0" y="0"/>
                   </a:moveTo>
                   <a:lnTo>
-                    <a:pt x="7799693" y="0"/>
-                  </a:lnTo>
-                  <a:lnTo>
-                    <a:pt x="7799693" y="0"/>
+                    <a:pt x="7660515" y="0"/>
+                  </a:lnTo>
+                  <a:lnTo>
+                    <a:pt x="7660515" y="0"/>
                   </a:lnTo>
                 </a:path>
               </a:pathLst>
@@ -2443,21 +2435,21 @@
           </p:nvSpPr>
           <p:spPr>
             <a:xfrm>
-              <a:off x="1181923" y="2073503"/>
-              <a:ext cx="0" cy="3649639"/>
+              <a:off x="887106" y="2352625"/>
+              <a:ext cx="7660515" cy="0"/>
             </a:xfrm>
             <a:custGeom>
               <a:avLst/>
               <a:pathLst>
-                <a:path w="0" h="3649639">
+                <a:path w="7660515" h="0">
                   <a:moveTo>
-                    <a:pt x="0" y="3649639"/>
+                    <a:pt x="0" y="0"/>
                   </a:moveTo>
                   <a:lnTo>
-                    <a:pt x="0" y="0"/>
-                  </a:lnTo>
-                  <a:lnTo>
-                    <a:pt x="0" y="0"/>
+                    <a:pt x="7660515" y="0"/>
+                  </a:lnTo>
+                  <a:lnTo>
+                    <a:pt x="7660515" y="0"/>
                   </a:lnTo>
                 </a:path>
               </a:pathLst>
@@ -2486,15 +2478,15 @@
           </p:nvSpPr>
           <p:spPr>
             <a:xfrm>
-              <a:off x="2933708" y="2073503"/>
-              <a:ext cx="0" cy="3649639"/>
+              <a:off x="1245010" y="2143092"/>
+              <a:ext cx="0" cy="1317069"/>
             </a:xfrm>
             <a:custGeom>
               <a:avLst/>
               <a:pathLst>
-                <a:path w="0" h="3649639">
+                <a:path w="0" h="1317069">
                   <a:moveTo>
-                    <a:pt x="0" y="3649639"/>
+                    <a:pt x="0" y="1317069"/>
                   </a:moveTo>
                   <a:lnTo>
                     <a:pt x="0" y="0"/>
@@ -2529,15 +2521,15 @@
           </p:nvSpPr>
           <p:spPr>
             <a:xfrm>
-              <a:off x="4685493" y="2073503"/>
-              <a:ext cx="0" cy="3649639"/>
+              <a:off x="2965536" y="2143092"/>
+              <a:ext cx="0" cy="1317069"/>
             </a:xfrm>
             <a:custGeom>
               <a:avLst/>
               <a:pathLst>
-                <a:path w="0" h="3649639">
+                <a:path w="0" h="1317069">
                   <a:moveTo>
-                    <a:pt x="0" y="3649639"/>
+                    <a:pt x="0" y="1317069"/>
                   </a:moveTo>
                   <a:lnTo>
                     <a:pt x="0" y="0"/>
@@ -2572,15 +2564,15 @@
           </p:nvSpPr>
           <p:spPr>
             <a:xfrm>
-              <a:off x="6437278" y="2073503"/>
-              <a:ext cx="0" cy="3649639"/>
+              <a:off x="4686062" y="2143092"/>
+              <a:ext cx="0" cy="1317069"/>
             </a:xfrm>
             <a:custGeom>
               <a:avLst/>
               <a:pathLst>
-                <a:path w="0" h="3649639">
+                <a:path w="0" h="1317069">
                   <a:moveTo>
-                    <a:pt x="0" y="3649639"/>
+                    <a:pt x="0" y="1317069"/>
                   </a:moveTo>
                   <a:lnTo>
                     <a:pt x="0" y="0"/>
@@ -2615,15 +2607,15 @@
           </p:nvSpPr>
           <p:spPr>
             <a:xfrm>
-              <a:off x="8189063" y="2073503"/>
-              <a:ext cx="0" cy="3649639"/>
+              <a:off x="6406588" y="2143092"/>
+              <a:ext cx="0" cy="1317069"/>
             </a:xfrm>
             <a:custGeom>
               <a:avLst/>
               <a:pathLst>
-                <a:path w="0" h="3649639">
+                <a:path w="0" h="1317069">
                   <a:moveTo>
-                    <a:pt x="0" y="3649639"/>
+                    <a:pt x="0" y="1317069"/>
                   </a:moveTo>
                   <a:lnTo>
                     <a:pt x="0" y="0"/>
@@ -2658,26 +2650,26 @@
           </p:nvSpPr>
           <p:spPr>
             <a:xfrm>
-              <a:off x="817517" y="5557249"/>
-              <a:ext cx="7799693" cy="0"/>
+              <a:off x="8127114" y="2143092"/>
+              <a:ext cx="0" cy="1317069"/>
             </a:xfrm>
             <a:custGeom>
               <a:avLst/>
               <a:pathLst>
-                <a:path w="7799693" h="0">
+                <a:path w="0" h="1317069">
                   <a:moveTo>
+                    <a:pt x="0" y="1317069"/>
+                  </a:moveTo>
+                  <a:lnTo>
                     <a:pt x="0" y="0"/>
-                  </a:moveTo>
-                  <a:lnTo>
-                    <a:pt x="7799693" y="0"/>
-                  </a:lnTo>
-                  <a:lnTo>
-                    <a:pt x="7799693" y="0"/>
+                  </a:lnTo>
+                  <a:lnTo>
+                    <a:pt x="0" y="0"/>
                   </a:lnTo>
                 </a:path>
               </a:pathLst>
             </a:custGeom>
-            <a:ln w="13550" cap="flat">
+            <a:ln w="6775" cap="flat">
               <a:solidFill>
                 <a:srgbClr val="EBEBEB">
                   <a:alpha val="100000"/>
@@ -2701,21 +2693,21 @@
           </p:nvSpPr>
           <p:spPr>
             <a:xfrm>
-              <a:off x="817517" y="4727786"/>
-              <a:ext cx="7799693" cy="0"/>
+              <a:off x="887106" y="3400294"/>
+              <a:ext cx="7660515" cy="0"/>
             </a:xfrm>
             <a:custGeom>
               <a:avLst/>
               <a:pathLst>
-                <a:path w="7799693" h="0">
+                <a:path w="7660515" h="0">
                   <a:moveTo>
                     <a:pt x="0" y="0"/>
                   </a:moveTo>
                   <a:lnTo>
-                    <a:pt x="7799693" y="0"/>
-                  </a:lnTo>
-                  <a:lnTo>
-                    <a:pt x="7799693" y="0"/>
+                    <a:pt x="7660515" y="0"/>
+                  </a:lnTo>
+                  <a:lnTo>
+                    <a:pt x="7660515" y="0"/>
                   </a:lnTo>
                 </a:path>
               </a:pathLst>
@@ -2744,21 +2736,21 @@
           </p:nvSpPr>
           <p:spPr>
             <a:xfrm>
-              <a:off x="817517" y="3898322"/>
-              <a:ext cx="7799693" cy="0"/>
+              <a:off x="887106" y="3100960"/>
+              <a:ext cx="7660515" cy="0"/>
             </a:xfrm>
             <a:custGeom>
               <a:avLst/>
               <a:pathLst>
-                <a:path w="7799693" h="0">
+                <a:path w="7660515" h="0">
                   <a:moveTo>
                     <a:pt x="0" y="0"/>
                   </a:moveTo>
                   <a:lnTo>
-                    <a:pt x="7799693" y="0"/>
-                  </a:lnTo>
-                  <a:lnTo>
-                    <a:pt x="7799693" y="0"/>
+                    <a:pt x="7660515" y="0"/>
+                  </a:lnTo>
+                  <a:lnTo>
+                    <a:pt x="7660515" y="0"/>
                   </a:lnTo>
                 </a:path>
               </a:pathLst>
@@ -2787,21 +2779,21 @@
           </p:nvSpPr>
           <p:spPr>
             <a:xfrm>
-              <a:off x="817517" y="3068859"/>
-              <a:ext cx="7799693" cy="0"/>
+              <a:off x="887106" y="2801626"/>
+              <a:ext cx="7660515" cy="0"/>
             </a:xfrm>
             <a:custGeom>
               <a:avLst/>
               <a:pathLst>
-                <a:path w="7799693" h="0">
+                <a:path w="7660515" h="0">
                   <a:moveTo>
                     <a:pt x="0" y="0"/>
                   </a:moveTo>
                   <a:lnTo>
-                    <a:pt x="7799693" y="0"/>
-                  </a:lnTo>
-                  <a:lnTo>
-                    <a:pt x="7799693" y="0"/>
+                    <a:pt x="7660515" y="0"/>
+                  </a:lnTo>
+                  <a:lnTo>
+                    <a:pt x="7660515" y="0"/>
                   </a:lnTo>
                 </a:path>
               </a:pathLst>
@@ -2830,21 +2822,21 @@
           </p:nvSpPr>
           <p:spPr>
             <a:xfrm>
-              <a:off x="817517" y="2239395"/>
-              <a:ext cx="7799693" cy="0"/>
+              <a:off x="887106" y="2502292"/>
+              <a:ext cx="7660515" cy="0"/>
             </a:xfrm>
             <a:custGeom>
               <a:avLst/>
               <a:pathLst>
-                <a:path w="7799693" h="0">
+                <a:path w="7660515" h="0">
                   <a:moveTo>
                     <a:pt x="0" y="0"/>
                   </a:moveTo>
                   <a:lnTo>
-                    <a:pt x="7799693" y="0"/>
-                  </a:lnTo>
-                  <a:lnTo>
-                    <a:pt x="7799693" y="0"/>
+                    <a:pt x="7660515" y="0"/>
+                  </a:lnTo>
+                  <a:lnTo>
+                    <a:pt x="7660515" y="0"/>
                   </a:lnTo>
                 </a:path>
               </a:pathLst>
@@ -2873,21 +2865,21 @@
           </p:nvSpPr>
           <p:spPr>
             <a:xfrm>
-              <a:off x="2057816" y="2073503"/>
-              <a:ext cx="0" cy="3649639"/>
+              <a:off x="887106" y="2202958"/>
+              <a:ext cx="7660515" cy="0"/>
             </a:xfrm>
             <a:custGeom>
               <a:avLst/>
               <a:pathLst>
-                <a:path w="0" h="3649639">
+                <a:path w="7660515" h="0">
                   <a:moveTo>
-                    <a:pt x="0" y="3649639"/>
+                    <a:pt x="0" y="0"/>
                   </a:moveTo>
                   <a:lnTo>
-                    <a:pt x="0" y="0"/>
-                  </a:lnTo>
-                  <a:lnTo>
-                    <a:pt x="0" y="0"/>
+                    <a:pt x="7660515" y="0"/>
+                  </a:lnTo>
+                  <a:lnTo>
+                    <a:pt x="7660515" y="0"/>
                   </a:lnTo>
                 </a:path>
               </a:pathLst>
@@ -2916,15 +2908,15 @@
           </p:nvSpPr>
           <p:spPr>
             <a:xfrm>
-              <a:off x="3809601" y="2073503"/>
-              <a:ext cx="0" cy="3649639"/>
+              <a:off x="2105273" y="2143092"/>
+              <a:ext cx="0" cy="1317069"/>
             </a:xfrm>
             <a:custGeom>
               <a:avLst/>
               <a:pathLst>
-                <a:path w="0" h="3649639">
+                <a:path w="0" h="1317069">
                   <a:moveTo>
-                    <a:pt x="0" y="3649639"/>
+                    <a:pt x="0" y="1317069"/>
                   </a:moveTo>
                   <a:lnTo>
                     <a:pt x="0" y="0"/>
@@ -2959,15 +2951,15 @@
           </p:nvSpPr>
           <p:spPr>
             <a:xfrm>
-              <a:off x="5561386" y="2073503"/>
-              <a:ext cx="0" cy="3649639"/>
+              <a:off x="3825799" y="2143092"/>
+              <a:ext cx="0" cy="1317069"/>
             </a:xfrm>
             <a:custGeom>
               <a:avLst/>
               <a:pathLst>
-                <a:path w="0" h="3649639">
+                <a:path w="0" h="1317069">
                   <a:moveTo>
-                    <a:pt x="0" y="3649639"/>
+                    <a:pt x="0" y="1317069"/>
                   </a:moveTo>
                   <a:lnTo>
                     <a:pt x="0" y="0"/>
@@ -3002,15 +2994,15 @@
           </p:nvSpPr>
           <p:spPr>
             <a:xfrm>
-              <a:off x="7313171" y="2073503"/>
-              <a:ext cx="0" cy="3649639"/>
+              <a:off x="5546325" y="2143092"/>
+              <a:ext cx="0" cy="1317069"/>
             </a:xfrm>
             <a:custGeom>
               <a:avLst/>
               <a:pathLst>
-                <a:path w="0" h="3649639">
+                <a:path w="0" h="1317069">
                   <a:moveTo>
-                    <a:pt x="0" y="3649639"/>
+                    <a:pt x="0" y="1317069"/>
                   </a:moveTo>
                   <a:lnTo>
                     <a:pt x="0" y="0"/>
@@ -3039,606 +3031,649 @@
         </p:sp>
         <p:sp>
           <p:nvSpPr>
-            <p:cNvPr id="22" name="pg22"/>
+            <p:cNvPr id="22" name="pl22"/>
             <p:cNvSpPr/>
             <p:nvPr/>
           </p:nvSpPr>
           <p:spPr>
             <a:xfrm>
-              <a:off x="1172049" y="2073503"/>
-              <a:ext cx="7090630" cy="3387432"/>
+              <a:off x="7266851" y="2143092"/>
+              <a:ext cx="0" cy="1317069"/>
             </a:xfrm>
             <a:custGeom>
               <a:avLst/>
               <a:pathLst>
-                <a:path w="7090630" h="3387432">
+                <a:path w="0" h="1317069">
                   <a:moveTo>
-                    <a:pt x="330451" y="0"/>
+                    <a:pt x="0" y="1317069"/>
                   </a:moveTo>
                   <a:lnTo>
-                    <a:pt x="358112" y="51363"/>
-                  </a:lnTo>
-                  <a:lnTo>
-                    <a:pt x="429735" y="179396"/>
-                  </a:lnTo>
-                  <a:lnTo>
-                    <a:pt x="501357" y="302652"/>
-                  </a:lnTo>
-                  <a:lnTo>
-                    <a:pt x="572980" y="421311"/>
-                  </a:lnTo>
-                  <a:lnTo>
-                    <a:pt x="644602" y="535544"/>
-                  </a:lnTo>
-                  <a:lnTo>
-                    <a:pt x="716225" y="645516"/>
-                  </a:lnTo>
-                  <a:lnTo>
-                    <a:pt x="787847" y="751386"/>
-                  </a:lnTo>
-                  <a:lnTo>
-                    <a:pt x="859470" y="853306"/>
-                  </a:lnTo>
-                  <a:lnTo>
-                    <a:pt x="931092" y="951425"/>
-                  </a:lnTo>
-                  <a:lnTo>
-                    <a:pt x="1002715" y="1045884"/>
-                  </a:lnTo>
-                  <a:lnTo>
-                    <a:pt x="1074337" y="1136820"/>
-                  </a:lnTo>
-                  <a:lnTo>
-                    <a:pt x="1145960" y="1224363"/>
-                  </a:lnTo>
-                  <a:lnTo>
-                    <a:pt x="1217582" y="1308641"/>
-                  </a:lnTo>
-                  <a:lnTo>
-                    <a:pt x="1289205" y="1389775"/>
-                  </a:lnTo>
-                  <a:lnTo>
-                    <a:pt x="1360827" y="1467883"/>
-                  </a:lnTo>
-                  <a:lnTo>
-                    <a:pt x="1432450" y="1543078"/>
-                  </a:lnTo>
-                  <a:lnTo>
-                    <a:pt x="1504073" y="1615467"/>
-                  </a:lnTo>
-                  <a:lnTo>
-                    <a:pt x="1575695" y="1685156"/>
-                  </a:lnTo>
-                  <a:lnTo>
-                    <a:pt x="1647318" y="1752246"/>
-                  </a:lnTo>
-                  <a:lnTo>
-                    <a:pt x="1718940" y="1816833"/>
-                  </a:lnTo>
-                  <a:lnTo>
-                    <a:pt x="1790563" y="1879011"/>
-                  </a:lnTo>
-                  <a:lnTo>
-                    <a:pt x="1862185" y="1938870"/>
-                  </a:lnTo>
-                  <a:lnTo>
-                    <a:pt x="1933808" y="1996496"/>
-                  </a:lnTo>
-                  <a:lnTo>
-                    <a:pt x="2005430" y="2051972"/>
-                  </a:lnTo>
-                  <a:lnTo>
-                    <a:pt x="2077053" y="2105379"/>
-                  </a:lnTo>
-                  <a:lnTo>
-                    <a:pt x="2148675" y="2156794"/>
-                  </a:lnTo>
-                  <a:lnTo>
-                    <a:pt x="2220298" y="2206291"/>
-                  </a:lnTo>
-                  <a:lnTo>
-                    <a:pt x="2291920" y="2253942"/>
-                  </a:lnTo>
-                  <a:lnTo>
-                    <a:pt x="2363543" y="2299815"/>
-                  </a:lnTo>
-                  <a:lnTo>
-                    <a:pt x="2435165" y="2343978"/>
-                  </a:lnTo>
-                  <a:lnTo>
-                    <a:pt x="2506788" y="2386493"/>
-                  </a:lnTo>
-                  <a:lnTo>
-                    <a:pt x="2578410" y="2427422"/>
-                  </a:lnTo>
-                  <a:lnTo>
-                    <a:pt x="2650033" y="2466824"/>
-                  </a:lnTo>
-                  <a:lnTo>
-                    <a:pt x="2721655" y="2504756"/>
-                  </a:lnTo>
-                  <a:lnTo>
-                    <a:pt x="2793278" y="2541274"/>
-                  </a:lnTo>
-                  <a:lnTo>
-                    <a:pt x="2864901" y="2576429"/>
-                  </a:lnTo>
-                  <a:lnTo>
-                    <a:pt x="2936523" y="2610274"/>
-                  </a:lnTo>
-                  <a:lnTo>
-                    <a:pt x="3008146" y="2642855"/>
-                  </a:lnTo>
-                  <a:lnTo>
-                    <a:pt x="3079768" y="2656036"/>
-                  </a:lnTo>
-                  <a:lnTo>
-                    <a:pt x="3151391" y="2658768"/>
-                  </a:lnTo>
-                  <a:lnTo>
-                    <a:pt x="3223013" y="2661491"/>
-                  </a:lnTo>
-                  <a:lnTo>
-                    <a:pt x="3294636" y="2664206"/>
-                  </a:lnTo>
-                  <a:lnTo>
-                    <a:pt x="3366258" y="2666911"/>
-                  </a:lnTo>
-                  <a:lnTo>
-                    <a:pt x="3437881" y="2669607"/>
-                  </a:lnTo>
-                  <a:lnTo>
-                    <a:pt x="3509503" y="2672294"/>
-                  </a:lnTo>
-                  <a:lnTo>
-                    <a:pt x="3581126" y="2674973"/>
-                  </a:lnTo>
-                  <a:lnTo>
-                    <a:pt x="3652748" y="2677642"/>
-                  </a:lnTo>
-                  <a:lnTo>
-                    <a:pt x="3724371" y="2680303"/>
-                  </a:lnTo>
-                  <a:lnTo>
-                    <a:pt x="3795993" y="2682955"/>
-                  </a:lnTo>
-                  <a:lnTo>
-                    <a:pt x="3867616" y="2685598"/>
-                  </a:lnTo>
-                  <a:lnTo>
-                    <a:pt x="3939238" y="2688233"/>
-                  </a:lnTo>
-                  <a:lnTo>
-                    <a:pt x="4010861" y="2690858"/>
-                  </a:lnTo>
-                  <a:lnTo>
-                    <a:pt x="4082483" y="2693476"/>
-                  </a:lnTo>
-                  <a:lnTo>
-                    <a:pt x="4154106" y="2696084"/>
-                  </a:lnTo>
-                  <a:lnTo>
-                    <a:pt x="4225729" y="2698684"/>
-                  </a:lnTo>
-                  <a:lnTo>
-                    <a:pt x="4297351" y="2701275"/>
-                  </a:lnTo>
-                  <a:lnTo>
-                    <a:pt x="4368974" y="2703858"/>
-                  </a:lnTo>
-                  <a:lnTo>
-                    <a:pt x="4440596" y="2706432"/>
-                  </a:lnTo>
-                  <a:lnTo>
-                    <a:pt x="4512219" y="2708998"/>
-                  </a:lnTo>
-                  <a:lnTo>
-                    <a:pt x="4583841" y="2711555"/>
-                  </a:lnTo>
-                  <a:lnTo>
-                    <a:pt x="4655464" y="2714104"/>
-                  </a:lnTo>
-                  <a:lnTo>
-                    <a:pt x="4727086" y="2716644"/>
-                  </a:lnTo>
-                  <a:lnTo>
-                    <a:pt x="4798709" y="2719176"/>
-                  </a:lnTo>
-                  <a:lnTo>
-                    <a:pt x="4870331" y="2721700"/>
-                  </a:lnTo>
-                  <a:lnTo>
-                    <a:pt x="4941954" y="2724215"/>
-                  </a:lnTo>
-                  <a:lnTo>
-                    <a:pt x="5013576" y="2726722"/>
-                  </a:lnTo>
-                  <a:lnTo>
-                    <a:pt x="5085199" y="2729221"/>
-                  </a:lnTo>
-                  <a:lnTo>
-                    <a:pt x="5156821" y="2731712"/>
-                  </a:lnTo>
-                  <a:lnTo>
-                    <a:pt x="5228444" y="2734194"/>
-                  </a:lnTo>
-                  <a:lnTo>
-                    <a:pt x="5300066" y="2736668"/>
-                  </a:lnTo>
-                  <a:lnTo>
-                    <a:pt x="5371689" y="2739134"/>
-                  </a:lnTo>
-                  <a:lnTo>
-                    <a:pt x="5443311" y="2741592"/>
-                  </a:lnTo>
-                  <a:lnTo>
-                    <a:pt x="5514934" y="2744042"/>
-                  </a:lnTo>
-                  <a:lnTo>
-                    <a:pt x="5586557" y="2746483"/>
-                  </a:lnTo>
-                  <a:lnTo>
-                    <a:pt x="5658179" y="2748917"/>
-                  </a:lnTo>
-                  <a:lnTo>
-                    <a:pt x="5729802" y="2751342"/>
-                  </a:lnTo>
-                  <a:lnTo>
-                    <a:pt x="5801424" y="2753760"/>
-                  </a:lnTo>
-                  <a:lnTo>
-                    <a:pt x="5873047" y="2756169"/>
-                  </a:lnTo>
-                  <a:lnTo>
-                    <a:pt x="5944669" y="2758571"/>
-                  </a:lnTo>
-                  <a:lnTo>
-                    <a:pt x="6016292" y="2760964"/>
-                  </a:lnTo>
-                  <a:lnTo>
-                    <a:pt x="6087914" y="2763350"/>
-                  </a:lnTo>
-                  <a:lnTo>
-                    <a:pt x="6159537" y="2765728"/>
-                  </a:lnTo>
-                  <a:lnTo>
-                    <a:pt x="6231159" y="2768098"/>
-                  </a:lnTo>
-                  <a:lnTo>
-                    <a:pt x="6302782" y="2770460"/>
-                  </a:lnTo>
-                  <a:lnTo>
-                    <a:pt x="6374404" y="2772815"/>
-                  </a:lnTo>
-                  <a:lnTo>
-                    <a:pt x="6446027" y="2775161"/>
-                  </a:lnTo>
-                  <a:lnTo>
-                    <a:pt x="6517649" y="2777500"/>
-                  </a:lnTo>
-                  <a:lnTo>
-                    <a:pt x="6589272" y="2779831"/>
-                  </a:lnTo>
-                  <a:lnTo>
-                    <a:pt x="6660894" y="2782155"/>
-                  </a:lnTo>
-                  <a:lnTo>
-                    <a:pt x="6732517" y="2784471"/>
-                  </a:lnTo>
-                  <a:lnTo>
-                    <a:pt x="6804139" y="2786779"/>
-                  </a:lnTo>
-                  <a:lnTo>
-                    <a:pt x="6875762" y="2789079"/>
-                  </a:lnTo>
-                  <a:lnTo>
-                    <a:pt x="6947385" y="2791372"/>
-                  </a:lnTo>
-                  <a:lnTo>
-                    <a:pt x="7019007" y="2793657"/>
-                  </a:lnTo>
-                  <a:lnTo>
-                    <a:pt x="7090630" y="2795935"/>
-                  </a:lnTo>
-                  <a:lnTo>
-                    <a:pt x="7090630" y="3387432"/>
-                  </a:lnTo>
-                  <a:lnTo>
-                    <a:pt x="7019007" y="3383700"/>
-                  </a:lnTo>
-                  <a:lnTo>
-                    <a:pt x="6947385" y="3379824"/>
-                  </a:lnTo>
-                  <a:lnTo>
-                    <a:pt x="6875762" y="3375797"/>
-                  </a:lnTo>
-                  <a:lnTo>
-                    <a:pt x="6804139" y="3371614"/>
-                  </a:lnTo>
-                  <a:lnTo>
-                    <a:pt x="6732517" y="3367270"/>
-                  </a:lnTo>
-                  <a:lnTo>
-                    <a:pt x="6660894" y="3362757"/>
-                  </a:lnTo>
-                  <a:lnTo>
-                    <a:pt x="6589272" y="3358069"/>
-                  </a:lnTo>
-                  <a:lnTo>
-                    <a:pt x="6517649" y="3353199"/>
-                  </a:lnTo>
-                  <a:lnTo>
-                    <a:pt x="6446027" y="3348141"/>
-                  </a:lnTo>
-                  <a:lnTo>
-                    <a:pt x="6374404" y="3342886"/>
-                  </a:lnTo>
-                  <a:lnTo>
-                    <a:pt x="6302782" y="3337429"/>
-                  </a:lnTo>
-                  <a:lnTo>
-                    <a:pt x="6231159" y="3331759"/>
-                  </a:lnTo>
-                  <a:lnTo>
-                    <a:pt x="6159537" y="3325870"/>
-                  </a:lnTo>
-                  <a:lnTo>
-                    <a:pt x="6087914" y="3319753"/>
-                  </a:lnTo>
-                  <a:lnTo>
-                    <a:pt x="6016292" y="3313399"/>
-                  </a:lnTo>
-                  <a:lnTo>
-                    <a:pt x="5944669" y="3306799"/>
-                  </a:lnTo>
-                  <a:lnTo>
-                    <a:pt x="5873047" y="3299942"/>
-                  </a:lnTo>
-                  <a:lnTo>
-                    <a:pt x="5801424" y="3292821"/>
-                  </a:lnTo>
-                  <a:lnTo>
-                    <a:pt x="5729802" y="3285423"/>
-                  </a:lnTo>
-                  <a:lnTo>
-                    <a:pt x="5658179" y="3277739"/>
-                  </a:lnTo>
-                  <a:lnTo>
-                    <a:pt x="5586557" y="3269756"/>
-                  </a:lnTo>
-                  <a:lnTo>
-                    <a:pt x="5514934" y="3261465"/>
-                  </a:lnTo>
-                  <a:lnTo>
-                    <a:pt x="5443311" y="3252852"/>
-                  </a:lnTo>
-                  <a:lnTo>
-                    <a:pt x="5371689" y="3243906"/>
-                  </a:lnTo>
-                  <a:lnTo>
-                    <a:pt x="5300066" y="3234613"/>
-                  </a:lnTo>
-                  <a:lnTo>
-                    <a:pt x="5228444" y="3224960"/>
-                  </a:lnTo>
-                  <a:lnTo>
-                    <a:pt x="5156821" y="3214933"/>
-                  </a:lnTo>
-                  <a:lnTo>
-                    <a:pt x="5085199" y="3204517"/>
-                  </a:lnTo>
-                  <a:lnTo>
-                    <a:pt x="5013576" y="3193698"/>
-                  </a:lnTo>
-                  <a:lnTo>
-                    <a:pt x="4941954" y="3182460"/>
-                  </a:lnTo>
-                  <a:lnTo>
-                    <a:pt x="4870331" y="3170786"/>
-                  </a:lnTo>
-                  <a:lnTo>
-                    <a:pt x="4798709" y="3158660"/>
-                  </a:lnTo>
-                  <a:lnTo>
-                    <a:pt x="4727086" y="3146064"/>
-                  </a:lnTo>
-                  <a:lnTo>
-                    <a:pt x="4655464" y="3132980"/>
-                  </a:lnTo>
-                  <a:lnTo>
-                    <a:pt x="4583841" y="3119389"/>
-                  </a:lnTo>
-                  <a:lnTo>
-                    <a:pt x="4512219" y="3105271"/>
-                  </a:lnTo>
-                  <a:lnTo>
-                    <a:pt x="4440596" y="3090606"/>
-                  </a:lnTo>
-                  <a:lnTo>
-                    <a:pt x="4368974" y="3075373"/>
-                  </a:lnTo>
-                  <a:lnTo>
-                    <a:pt x="4297351" y="3059550"/>
-                  </a:lnTo>
-                  <a:lnTo>
-                    <a:pt x="4225729" y="3043114"/>
-                  </a:lnTo>
-                  <a:lnTo>
-                    <a:pt x="4154106" y="3026041"/>
-                  </a:lnTo>
-                  <a:lnTo>
-                    <a:pt x="4082483" y="3008307"/>
-                  </a:lnTo>
-                  <a:lnTo>
-                    <a:pt x="4010861" y="2989885"/>
-                  </a:lnTo>
-                  <a:lnTo>
-                    <a:pt x="3939238" y="2970750"/>
-                  </a:lnTo>
-                  <a:lnTo>
-                    <a:pt x="3867616" y="2950873"/>
-                  </a:lnTo>
-                  <a:lnTo>
-                    <a:pt x="3795993" y="2930226"/>
-                  </a:lnTo>
-                  <a:lnTo>
-                    <a:pt x="3724371" y="2908779"/>
-                  </a:lnTo>
-                  <a:lnTo>
-                    <a:pt x="3652748" y="2886500"/>
-                  </a:lnTo>
-                  <a:lnTo>
-                    <a:pt x="3581126" y="2863359"/>
-                  </a:lnTo>
-                  <a:lnTo>
-                    <a:pt x="3509503" y="2839321"/>
-                  </a:lnTo>
-                  <a:lnTo>
-                    <a:pt x="3437881" y="2814352"/>
-                  </a:lnTo>
-                  <a:lnTo>
-                    <a:pt x="3366258" y="2788415"/>
-                  </a:lnTo>
-                  <a:lnTo>
-                    <a:pt x="3294636" y="2761474"/>
-                  </a:lnTo>
-                  <a:lnTo>
-                    <a:pt x="3223013" y="2733488"/>
-                  </a:lnTo>
-                  <a:lnTo>
-                    <a:pt x="3151391" y="2704418"/>
-                  </a:lnTo>
-                  <a:lnTo>
-                    <a:pt x="3079768" y="2674222"/>
-                  </a:lnTo>
-                  <a:lnTo>
-                    <a:pt x="3008146" y="2653295"/>
-                  </a:lnTo>
-                  <a:lnTo>
-                    <a:pt x="2936523" y="2650545"/>
-                  </a:lnTo>
-                  <a:lnTo>
-                    <a:pt x="2864901" y="2647786"/>
-                  </a:lnTo>
-                  <a:lnTo>
-                    <a:pt x="2793278" y="2645017"/>
-                  </a:lnTo>
-                  <a:lnTo>
-                    <a:pt x="2721655" y="2642240"/>
-                  </a:lnTo>
-                  <a:lnTo>
-                    <a:pt x="2650033" y="2639453"/>
-                  </a:lnTo>
-                  <a:lnTo>
-                    <a:pt x="2578410" y="2636657"/>
-                  </a:lnTo>
-                  <a:lnTo>
-                    <a:pt x="2506788" y="2633851"/>
-                  </a:lnTo>
-                  <a:lnTo>
-                    <a:pt x="2435165" y="2631037"/>
-                  </a:lnTo>
-                  <a:lnTo>
-                    <a:pt x="2363543" y="2628213"/>
-                  </a:lnTo>
-                  <a:lnTo>
-                    <a:pt x="2291920" y="2625380"/>
-                  </a:lnTo>
-                  <a:lnTo>
-                    <a:pt x="2220298" y="2622537"/>
-                  </a:lnTo>
-                  <a:lnTo>
-                    <a:pt x="2148675" y="2619685"/>
-                  </a:lnTo>
-                  <a:lnTo>
-                    <a:pt x="2077053" y="2616823"/>
-                  </a:lnTo>
-                  <a:lnTo>
-                    <a:pt x="2005430" y="2613952"/>
-                  </a:lnTo>
-                  <a:lnTo>
-                    <a:pt x="1933808" y="2611072"/>
-                  </a:lnTo>
-                  <a:lnTo>
-                    <a:pt x="1862185" y="2608182"/>
-                  </a:lnTo>
-                  <a:lnTo>
-                    <a:pt x="1790563" y="2605282"/>
-                  </a:lnTo>
-                  <a:lnTo>
-                    <a:pt x="1718940" y="2602373"/>
-                  </a:lnTo>
-                  <a:lnTo>
-                    <a:pt x="1647318" y="2599454"/>
-                  </a:lnTo>
-                  <a:lnTo>
-                    <a:pt x="1575695" y="2596526"/>
-                  </a:lnTo>
-                  <a:lnTo>
-                    <a:pt x="1504073" y="2593588"/>
-                  </a:lnTo>
-                  <a:lnTo>
-                    <a:pt x="1432450" y="2590640"/>
-                  </a:lnTo>
-                  <a:lnTo>
-                    <a:pt x="1360827" y="2587682"/>
-                  </a:lnTo>
-                  <a:lnTo>
-                    <a:pt x="1289205" y="2584714"/>
-                  </a:lnTo>
-                  <a:lnTo>
-                    <a:pt x="1217582" y="2581737"/>
-                  </a:lnTo>
-                  <a:lnTo>
-                    <a:pt x="1145960" y="2578750"/>
-                  </a:lnTo>
-                  <a:lnTo>
-                    <a:pt x="1074337" y="2575753"/>
-                  </a:lnTo>
-                  <a:lnTo>
-                    <a:pt x="1002715" y="2572746"/>
-                  </a:lnTo>
-                  <a:lnTo>
-                    <a:pt x="931092" y="2569729"/>
-                  </a:lnTo>
-                  <a:lnTo>
-                    <a:pt x="859470" y="2566702"/>
-                  </a:lnTo>
-                  <a:lnTo>
-                    <a:pt x="787847" y="2563665"/>
-                  </a:lnTo>
-                  <a:lnTo>
-                    <a:pt x="716225" y="2560618"/>
-                  </a:lnTo>
-                  <a:lnTo>
-                    <a:pt x="644602" y="2557561"/>
-                  </a:lnTo>
-                  <a:lnTo>
-                    <a:pt x="572980" y="2554493"/>
-                  </a:lnTo>
-                  <a:lnTo>
-                    <a:pt x="501357" y="2551416"/>
-                  </a:lnTo>
-                  <a:lnTo>
-                    <a:pt x="429735" y="2548328"/>
-                  </a:lnTo>
-                  <a:lnTo>
-                    <a:pt x="358112" y="2545231"/>
-                  </a:lnTo>
-                  <a:lnTo>
-                    <a:pt x="286490" y="2542123"/>
-                  </a:lnTo>
-                  <a:lnTo>
-                    <a:pt x="214867" y="2539004"/>
-                  </a:lnTo>
-                  <a:lnTo>
-                    <a:pt x="143245" y="2535876"/>
-                  </a:lnTo>
-                  <a:lnTo>
-                    <a:pt x="71622" y="2532736"/>
-                  </a:lnTo>
-                  <a:lnTo>
-                    <a:pt x="0" y="2529587"/>
+                    <a:pt x="0" y="0"/>
+                  </a:lnTo>
+                  <a:lnTo>
+                    <a:pt x="0" y="0"/>
+                  </a:lnTo>
+                </a:path>
+              </a:pathLst>
+            </a:custGeom>
+            <a:ln w="13550" cap="flat">
+              <a:solidFill>
+                <a:srgbClr val="EBEBEB">
+                  <a:alpha val="100000"/>
+                </a:srgbClr>
+              </a:solidFill>
+              <a:prstDash val="solid"/>
+              <a:round/>
+            </a:ln>
+          </p:spPr>
+          <p:txBody>
+            <a:bodyPr/>
+            <a:lstStyle/>
+            <a:p/>
+          </p:txBody>
+        </p:sp>
+        <p:sp>
+          <p:nvSpPr>
+            <p:cNvPr id="23" name="pg23"/>
+            <p:cNvSpPr/>
+            <p:nvPr/>
+          </p:nvSpPr>
+          <p:spPr>
+            <a:xfrm>
+              <a:off x="1235312" y="2143092"/>
+              <a:ext cx="6964104" cy="1222444"/>
+            </a:xfrm>
+            <a:custGeom>
+              <a:avLst/>
+              <a:pathLst>
+                <a:path w="6964104" h="1222444">
+                  <a:moveTo>
+                    <a:pt x="324554" y="0"/>
+                  </a:moveTo>
+                  <a:lnTo>
+                    <a:pt x="351722" y="18535"/>
+                  </a:lnTo>
+                  <a:lnTo>
+                    <a:pt x="422066" y="64739"/>
+                  </a:lnTo>
+                  <a:lnTo>
+                    <a:pt x="492411" y="109220"/>
+                  </a:lnTo>
+                  <a:lnTo>
+                    <a:pt x="562755" y="152041"/>
+                  </a:lnTo>
+                  <a:lnTo>
+                    <a:pt x="633100" y="193265"/>
+                  </a:lnTo>
+                  <a:lnTo>
+                    <a:pt x="703444" y="232951"/>
+                  </a:lnTo>
+                  <a:lnTo>
+                    <a:pt x="773789" y="271157"/>
+                  </a:lnTo>
+                  <a:lnTo>
+                    <a:pt x="844133" y="307938"/>
+                  </a:lnTo>
+                  <a:lnTo>
+                    <a:pt x="914478" y="343347"/>
+                  </a:lnTo>
+                  <a:lnTo>
+                    <a:pt x="984822" y="377435"/>
+                  </a:lnTo>
+                  <a:lnTo>
+                    <a:pt x="1055167" y="410251"/>
+                  </a:lnTo>
+                  <a:lnTo>
+                    <a:pt x="1125511" y="441843"/>
+                  </a:lnTo>
+                  <a:lnTo>
+                    <a:pt x="1195856" y="472257"/>
+                  </a:lnTo>
+                  <a:lnTo>
+                    <a:pt x="1266200" y="501537"/>
+                  </a:lnTo>
+                  <a:lnTo>
+                    <a:pt x="1336545" y="529724"/>
+                  </a:lnTo>
+                  <a:lnTo>
+                    <a:pt x="1406889" y="556860"/>
+                  </a:lnTo>
+                  <a:lnTo>
+                    <a:pt x="1477234" y="582984"/>
+                  </a:lnTo>
+                  <a:lnTo>
+                    <a:pt x="1547578" y="608133"/>
+                  </a:lnTo>
+                  <a:lnTo>
+                    <a:pt x="1617923" y="632344"/>
+                  </a:lnTo>
+                  <a:lnTo>
+                    <a:pt x="1688267" y="655652"/>
+                  </a:lnTo>
+                  <a:lnTo>
+                    <a:pt x="1758612" y="678091"/>
+                  </a:lnTo>
+                  <a:lnTo>
+                    <a:pt x="1828956" y="699692"/>
+                  </a:lnTo>
+                  <a:lnTo>
+                    <a:pt x="1899301" y="720488"/>
+                  </a:lnTo>
+                  <a:lnTo>
+                    <a:pt x="1969645" y="740508"/>
+                  </a:lnTo>
+                  <a:lnTo>
+                    <a:pt x="2039990" y="759782"/>
+                  </a:lnTo>
+                  <a:lnTo>
+                    <a:pt x="2110334" y="778336"/>
+                  </a:lnTo>
+                  <a:lnTo>
+                    <a:pt x="2180679" y="796198"/>
+                  </a:lnTo>
+                  <a:lnTo>
+                    <a:pt x="2251023" y="813394"/>
+                  </a:lnTo>
+                  <a:lnTo>
+                    <a:pt x="2321368" y="829949"/>
+                  </a:lnTo>
+                  <a:lnTo>
+                    <a:pt x="2391712" y="845886"/>
+                  </a:lnTo>
+                  <a:lnTo>
+                    <a:pt x="2462057" y="861229"/>
+                  </a:lnTo>
+                  <a:lnTo>
+                    <a:pt x="2532401" y="875999"/>
+                  </a:lnTo>
+                  <a:lnTo>
+                    <a:pt x="2602746" y="890218"/>
+                  </a:lnTo>
+                  <a:lnTo>
+                    <a:pt x="2673090" y="903907"/>
+                  </a:lnTo>
+                  <a:lnTo>
+                    <a:pt x="2743435" y="917086"/>
+                  </a:lnTo>
+                  <a:lnTo>
+                    <a:pt x="2813779" y="929772"/>
+                  </a:lnTo>
+                  <a:lnTo>
+                    <a:pt x="2884124" y="941986"/>
+                  </a:lnTo>
+                  <a:lnTo>
+                    <a:pt x="2954468" y="953744"/>
+                  </a:lnTo>
+                  <a:lnTo>
+                    <a:pt x="3024813" y="958501"/>
+                  </a:lnTo>
+                  <a:lnTo>
+                    <a:pt x="3095157" y="959487"/>
+                  </a:lnTo>
+                  <a:lnTo>
+                    <a:pt x="3165502" y="960469"/>
+                  </a:lnTo>
+                  <a:lnTo>
+                    <a:pt x="3235846" y="961449"/>
+                  </a:lnTo>
+                  <a:lnTo>
+                    <a:pt x="3306191" y="962425"/>
+                  </a:lnTo>
+                  <a:lnTo>
+                    <a:pt x="3376535" y="963398"/>
+                  </a:lnTo>
+                  <a:lnTo>
+                    <a:pt x="3446880" y="964368"/>
+                  </a:lnTo>
+                  <a:lnTo>
+                    <a:pt x="3517224" y="965334"/>
+                  </a:lnTo>
+                  <a:lnTo>
+                    <a:pt x="3587569" y="966298"/>
+                  </a:lnTo>
+                  <a:lnTo>
+                    <a:pt x="3657913" y="967258"/>
+                  </a:lnTo>
+                  <a:lnTo>
+                    <a:pt x="3728257" y="968215"/>
+                  </a:lnTo>
+                  <a:lnTo>
+                    <a:pt x="3798602" y="969169"/>
+                  </a:lnTo>
+                  <a:lnTo>
+                    <a:pt x="3868946" y="970120"/>
+                  </a:lnTo>
+                  <a:lnTo>
+                    <a:pt x="3939291" y="971067"/>
+                  </a:lnTo>
+                  <a:lnTo>
+                    <a:pt x="4009635" y="972012"/>
+                  </a:lnTo>
+                  <a:lnTo>
+                    <a:pt x="4079980" y="972953"/>
+                  </a:lnTo>
+                  <a:lnTo>
+                    <a:pt x="4150324" y="973891"/>
+                  </a:lnTo>
+                  <a:lnTo>
+                    <a:pt x="4220669" y="974826"/>
+                  </a:lnTo>
+                  <a:lnTo>
+                    <a:pt x="4291013" y="975758"/>
+                  </a:lnTo>
+                  <a:lnTo>
+                    <a:pt x="4361358" y="976687"/>
+                  </a:lnTo>
+                  <a:lnTo>
+                    <a:pt x="4431702" y="977613"/>
+                  </a:lnTo>
+                  <a:lnTo>
+                    <a:pt x="4502047" y="978536"/>
+                  </a:lnTo>
+                  <a:lnTo>
+                    <a:pt x="4572391" y="979456"/>
+                  </a:lnTo>
+                  <a:lnTo>
+                    <a:pt x="4642736" y="980373"/>
+                  </a:lnTo>
+                  <a:lnTo>
+                    <a:pt x="4713080" y="981286"/>
+                  </a:lnTo>
+                  <a:lnTo>
+                    <a:pt x="4783425" y="982197"/>
+                  </a:lnTo>
+                  <a:lnTo>
+                    <a:pt x="4853769" y="983105"/>
+                  </a:lnTo>
+                  <a:lnTo>
+                    <a:pt x="4924114" y="984010"/>
+                  </a:lnTo>
+                  <a:lnTo>
+                    <a:pt x="4994458" y="984911"/>
+                  </a:lnTo>
+                  <a:lnTo>
+                    <a:pt x="5064803" y="985810"/>
+                  </a:lnTo>
+                  <a:lnTo>
+                    <a:pt x="5135147" y="986706"/>
+                  </a:lnTo>
+                  <a:lnTo>
+                    <a:pt x="5205492" y="987599"/>
+                  </a:lnTo>
+                  <a:lnTo>
+                    <a:pt x="5275836" y="988489"/>
+                  </a:lnTo>
+                  <a:lnTo>
+                    <a:pt x="5346181" y="989376"/>
+                  </a:lnTo>
+                  <a:lnTo>
+                    <a:pt x="5416525" y="990260"/>
+                  </a:lnTo>
+                  <a:lnTo>
+                    <a:pt x="5486870" y="991141"/>
+                  </a:lnTo>
+                  <a:lnTo>
+                    <a:pt x="5557214" y="992019"/>
+                  </a:lnTo>
+                  <a:lnTo>
+                    <a:pt x="5627559" y="992894"/>
+                  </a:lnTo>
+                  <a:lnTo>
+                    <a:pt x="5697903" y="993767"/>
+                  </a:lnTo>
+                  <a:lnTo>
+                    <a:pt x="5768248" y="994636"/>
+                  </a:lnTo>
+                  <a:lnTo>
+                    <a:pt x="5838592" y="995503"/>
+                  </a:lnTo>
+                  <a:lnTo>
+                    <a:pt x="5908937" y="996367"/>
+                  </a:lnTo>
+                  <a:lnTo>
+                    <a:pt x="5979281" y="997228"/>
+                  </a:lnTo>
+                  <a:lnTo>
+                    <a:pt x="6049626" y="998086"/>
+                  </a:lnTo>
+                  <a:lnTo>
+                    <a:pt x="6119970" y="998941"/>
+                  </a:lnTo>
+                  <a:lnTo>
+                    <a:pt x="6190315" y="999794"/>
+                  </a:lnTo>
+                  <a:lnTo>
+                    <a:pt x="6260659" y="1000643"/>
+                  </a:lnTo>
+                  <a:lnTo>
+                    <a:pt x="6331004" y="1001490"/>
+                  </a:lnTo>
+                  <a:lnTo>
+                    <a:pt x="6401348" y="1002334"/>
+                  </a:lnTo>
+                  <a:lnTo>
+                    <a:pt x="6471693" y="1003175"/>
+                  </a:lnTo>
+                  <a:lnTo>
+                    <a:pt x="6542037" y="1004014"/>
+                  </a:lnTo>
+                  <a:lnTo>
+                    <a:pt x="6612382" y="1004850"/>
+                  </a:lnTo>
+                  <a:lnTo>
+                    <a:pt x="6682726" y="1005683"/>
+                  </a:lnTo>
+                  <a:lnTo>
+                    <a:pt x="6753071" y="1006513"/>
+                  </a:lnTo>
+                  <a:lnTo>
+                    <a:pt x="6823415" y="1007340"/>
+                  </a:lnTo>
+                  <a:lnTo>
+                    <a:pt x="6893760" y="1008165"/>
+                  </a:lnTo>
+                  <a:lnTo>
+                    <a:pt x="6964104" y="1008987"/>
+                  </a:lnTo>
+                  <a:lnTo>
+                    <a:pt x="6964104" y="1222444"/>
+                  </a:lnTo>
+                  <a:lnTo>
+                    <a:pt x="6893760" y="1221097"/>
+                  </a:lnTo>
+                  <a:lnTo>
+                    <a:pt x="6823415" y="1219699"/>
+                  </a:lnTo>
+                  <a:lnTo>
+                    <a:pt x="6753071" y="1218245"/>
+                  </a:lnTo>
+                  <a:lnTo>
+                    <a:pt x="6682726" y="1216736"/>
+                  </a:lnTo>
+                  <a:lnTo>
+                    <a:pt x="6612382" y="1215168"/>
+                  </a:lnTo>
+                  <a:lnTo>
+                    <a:pt x="6542037" y="1213539"/>
+                  </a:lnTo>
+                  <a:lnTo>
+                    <a:pt x="6471693" y="1211848"/>
+                  </a:lnTo>
+                  <a:lnTo>
+                    <a:pt x="6401348" y="1210090"/>
+                  </a:lnTo>
+                  <a:lnTo>
+                    <a:pt x="6331004" y="1208265"/>
+                  </a:lnTo>
+                  <a:lnTo>
+                    <a:pt x="6260659" y="1206369"/>
+                  </a:lnTo>
+                  <a:lnTo>
+                    <a:pt x="6190315" y="1204399"/>
+                  </a:lnTo>
+                  <a:lnTo>
+                    <a:pt x="6119970" y="1202353"/>
+                  </a:lnTo>
+                  <a:lnTo>
+                    <a:pt x="6049626" y="1200228"/>
+                  </a:lnTo>
+                  <a:lnTo>
+                    <a:pt x="5979281" y="1198020"/>
+                  </a:lnTo>
+                  <a:lnTo>
+                    <a:pt x="5908937" y="1195727"/>
+                  </a:lnTo>
+                  <a:lnTo>
+                    <a:pt x="5838592" y="1193345"/>
+                  </a:lnTo>
+                  <a:lnTo>
+                    <a:pt x="5768248" y="1190871"/>
+                  </a:lnTo>
+                  <a:lnTo>
+                    <a:pt x="5697903" y="1188301"/>
+                  </a:lnTo>
+                  <a:lnTo>
+                    <a:pt x="5627559" y="1185632"/>
+                  </a:lnTo>
+                  <a:lnTo>
+                    <a:pt x="5557214" y="1182858"/>
+                  </a:lnTo>
+                  <a:lnTo>
+                    <a:pt x="5486870" y="1179978"/>
+                  </a:lnTo>
+                  <a:lnTo>
+                    <a:pt x="5416525" y="1176986"/>
+                  </a:lnTo>
+                  <a:lnTo>
+                    <a:pt x="5346181" y="1173878"/>
+                  </a:lnTo>
+                  <a:lnTo>
+                    <a:pt x="5275836" y="1170649"/>
+                  </a:lnTo>
+                  <a:lnTo>
+                    <a:pt x="5205492" y="1167295"/>
+                  </a:lnTo>
+                  <a:lnTo>
+                    <a:pt x="5135147" y="1163812"/>
+                  </a:lnTo>
+                  <a:lnTo>
+                    <a:pt x="5064803" y="1160193"/>
+                  </a:lnTo>
+                  <a:lnTo>
+                    <a:pt x="4994458" y="1156435"/>
+                  </a:lnTo>
+                  <a:lnTo>
+                    <a:pt x="4924114" y="1152530"/>
+                  </a:lnTo>
+                  <a:lnTo>
+                    <a:pt x="4853769" y="1148475"/>
+                  </a:lnTo>
+                  <a:lnTo>
+                    <a:pt x="4783425" y="1144262"/>
+                  </a:lnTo>
+                  <a:lnTo>
+                    <a:pt x="4713080" y="1139886"/>
+                  </a:lnTo>
+                  <a:lnTo>
+                    <a:pt x="4642736" y="1135340"/>
+                  </a:lnTo>
+                  <a:lnTo>
+                    <a:pt x="4572391" y="1130618"/>
+                  </a:lnTo>
+                  <a:lnTo>
+                    <a:pt x="4502047" y="1125714"/>
+                  </a:lnTo>
+                  <a:lnTo>
+                    <a:pt x="4431702" y="1120619"/>
+                  </a:lnTo>
+                  <a:lnTo>
+                    <a:pt x="4361358" y="1115327"/>
+                  </a:lnTo>
+                  <a:lnTo>
+                    <a:pt x="4291013" y="1109830"/>
+                  </a:lnTo>
+                  <a:lnTo>
+                    <a:pt x="4220669" y="1104119"/>
+                  </a:lnTo>
+                  <a:lnTo>
+                    <a:pt x="4150324" y="1098188"/>
+                  </a:lnTo>
+                  <a:lnTo>
+                    <a:pt x="4079980" y="1092027"/>
+                  </a:lnTo>
+                  <a:lnTo>
+                    <a:pt x="4009635" y="1085627"/>
+                  </a:lnTo>
+                  <a:lnTo>
+                    <a:pt x="3939291" y="1078979"/>
+                  </a:lnTo>
+                  <a:lnTo>
+                    <a:pt x="3868946" y="1072073"/>
+                  </a:lnTo>
+                  <a:lnTo>
+                    <a:pt x="3798602" y="1064900"/>
+                  </a:lnTo>
+                  <a:lnTo>
+                    <a:pt x="3728257" y="1057449"/>
+                  </a:lnTo>
+                  <a:lnTo>
+                    <a:pt x="3657913" y="1049709"/>
+                  </a:lnTo>
+                  <a:lnTo>
+                    <a:pt x="3587569" y="1041670"/>
+                  </a:lnTo>
+                  <a:lnTo>
+                    <a:pt x="3517224" y="1033319"/>
+                  </a:lnTo>
+                  <a:lnTo>
+                    <a:pt x="3446880" y="1024644"/>
+                  </a:lnTo>
+                  <a:lnTo>
+                    <a:pt x="3376535" y="1015633"/>
+                  </a:lnTo>
+                  <a:lnTo>
+                    <a:pt x="3306191" y="1006273"/>
+                  </a:lnTo>
+                  <a:lnTo>
+                    <a:pt x="3235846" y="996551"/>
+                  </a:lnTo>
+                  <a:lnTo>
+                    <a:pt x="3165502" y="986451"/>
+                  </a:lnTo>
+                  <a:lnTo>
+                    <a:pt x="3095157" y="975960"/>
+                  </a:lnTo>
+                  <a:lnTo>
+                    <a:pt x="3024813" y="965063"/>
+                  </a:lnTo>
+                  <a:lnTo>
+                    <a:pt x="2954468" y="957511"/>
+                  </a:lnTo>
+                  <a:lnTo>
+                    <a:pt x="2884124" y="956519"/>
+                  </a:lnTo>
+                  <a:lnTo>
+                    <a:pt x="2813779" y="955523"/>
+                  </a:lnTo>
+                  <a:lnTo>
+                    <a:pt x="2743435" y="954524"/>
+                  </a:lnTo>
+                  <a:lnTo>
+                    <a:pt x="2673090" y="953522"/>
+                  </a:lnTo>
+                  <a:lnTo>
+                    <a:pt x="2602746" y="952516"/>
+                  </a:lnTo>
+                  <a:lnTo>
+                    <a:pt x="2532401" y="951507"/>
+                  </a:lnTo>
+                  <a:lnTo>
+                    <a:pt x="2462057" y="950495"/>
+                  </a:lnTo>
+                  <a:lnTo>
+                    <a:pt x="2391712" y="949479"/>
+                  </a:lnTo>
+                  <a:lnTo>
+                    <a:pt x="2321368" y="948460"/>
+                  </a:lnTo>
+                  <a:lnTo>
+                    <a:pt x="2251023" y="947437"/>
+                  </a:lnTo>
+                  <a:lnTo>
+                    <a:pt x="2180679" y="946412"/>
+                  </a:lnTo>
+                  <a:lnTo>
+                    <a:pt x="2110334" y="945382"/>
+                  </a:lnTo>
+                  <a:lnTo>
+                    <a:pt x="2039990" y="944350"/>
+                  </a:lnTo>
+                  <a:lnTo>
+                    <a:pt x="1969645" y="943314"/>
+                  </a:lnTo>
+                  <a:lnTo>
+                    <a:pt x="1899301" y="942274"/>
+                  </a:lnTo>
+                  <a:lnTo>
+                    <a:pt x="1828956" y="941231"/>
+                  </a:lnTo>
+                  <a:lnTo>
+                    <a:pt x="1758612" y="940185"/>
+                  </a:lnTo>
+                  <a:lnTo>
+                    <a:pt x="1688267" y="939135"/>
+                  </a:lnTo>
+                  <a:lnTo>
+                    <a:pt x="1617923" y="938082"/>
+                  </a:lnTo>
+                  <a:lnTo>
+                    <a:pt x="1547578" y="937025"/>
+                  </a:lnTo>
+                  <a:lnTo>
+                    <a:pt x="1477234" y="935964"/>
+                  </a:lnTo>
+                  <a:lnTo>
+                    <a:pt x="1406889" y="934901"/>
+                  </a:lnTo>
+                  <a:lnTo>
+                    <a:pt x="1336545" y="933833"/>
+                  </a:lnTo>
+                  <a:lnTo>
+                    <a:pt x="1266200" y="932762"/>
+                  </a:lnTo>
+                  <a:lnTo>
+                    <a:pt x="1195856" y="931688"/>
+                  </a:lnTo>
+                  <a:lnTo>
+                    <a:pt x="1125511" y="930610"/>
+                  </a:lnTo>
+                  <a:lnTo>
+                    <a:pt x="1055167" y="929528"/>
+                  </a:lnTo>
+                  <a:lnTo>
+                    <a:pt x="984822" y="928443"/>
+                  </a:lnTo>
+                  <a:lnTo>
+                    <a:pt x="914478" y="927354"/>
+                  </a:lnTo>
+                  <a:lnTo>
+                    <a:pt x="844133" y="926262"/>
+                  </a:lnTo>
+                  <a:lnTo>
+                    <a:pt x="773789" y="925166"/>
+                  </a:lnTo>
+                  <a:lnTo>
+                    <a:pt x="703444" y="924066"/>
+                  </a:lnTo>
+                  <a:lnTo>
+                    <a:pt x="633100" y="922963"/>
+                  </a:lnTo>
+                  <a:lnTo>
+                    <a:pt x="562755" y="921856"/>
+                  </a:lnTo>
+                  <a:lnTo>
+                    <a:pt x="492411" y="920746"/>
+                  </a:lnTo>
+                  <a:lnTo>
+                    <a:pt x="422066" y="919631"/>
+                  </a:lnTo>
+                  <a:lnTo>
+                    <a:pt x="351722" y="918514"/>
+                  </a:lnTo>
+                  <a:lnTo>
+                    <a:pt x="281377" y="917392"/>
+                  </a:lnTo>
+                  <a:lnTo>
+                    <a:pt x="211033" y="916267"/>
+                  </a:lnTo>
+                  <a:lnTo>
+                    <a:pt x="140688" y="915137"/>
+                  </a:lnTo>
+                  <a:lnTo>
+                    <a:pt x="70344" y="914005"/>
+                  </a:lnTo>
+                  <a:lnTo>
+                    <a:pt x="0" y="912868"/>
                   </a:lnTo>
                   <a:close/>
                 </a:path>
@@ -3658,631 +3693,306 @@
         </p:sp>
         <p:sp>
           <p:nvSpPr>
-            <p:cNvPr id="23" name="pl23"/>
-            <p:cNvSpPr/>
-            <p:nvPr/>
-          </p:nvSpPr>
-          <p:spPr>
-            <a:xfrm>
-              <a:off x="1502500" y="2073503"/>
-              <a:ext cx="6760179" cy="2795935"/>
-            </a:xfrm>
-            <a:custGeom>
-              <a:avLst/>
-              <a:pathLst>
-                <a:path w="6760179" h="2795935">
-                  <a:moveTo>
-                    <a:pt x="0" y="0"/>
-                  </a:moveTo>
-                  <a:lnTo>
-                    <a:pt x="27661" y="51363"/>
-                  </a:lnTo>
-                  <a:lnTo>
-                    <a:pt x="99284" y="179396"/>
-                  </a:lnTo>
-                  <a:lnTo>
-                    <a:pt x="170906" y="302652"/>
-                  </a:lnTo>
-                  <a:lnTo>
-                    <a:pt x="242529" y="421311"/>
-                  </a:lnTo>
-                  <a:lnTo>
-                    <a:pt x="314151" y="535544"/>
-                  </a:lnTo>
-                  <a:lnTo>
-                    <a:pt x="385774" y="645516"/>
-                  </a:lnTo>
-                  <a:lnTo>
-                    <a:pt x="457396" y="751386"/>
-                  </a:lnTo>
-                  <a:lnTo>
-                    <a:pt x="529019" y="853306"/>
-                  </a:lnTo>
-                  <a:lnTo>
-                    <a:pt x="600641" y="951425"/>
-                  </a:lnTo>
-                  <a:lnTo>
-                    <a:pt x="672264" y="1045884"/>
-                  </a:lnTo>
-                  <a:lnTo>
-                    <a:pt x="743886" y="1136820"/>
-                  </a:lnTo>
-                  <a:lnTo>
-                    <a:pt x="815509" y="1224363"/>
-                  </a:lnTo>
-                  <a:lnTo>
-                    <a:pt x="887131" y="1308641"/>
-                  </a:lnTo>
-                  <a:lnTo>
-                    <a:pt x="958754" y="1389775"/>
-                  </a:lnTo>
-                  <a:lnTo>
-                    <a:pt x="1030376" y="1467883"/>
-                  </a:lnTo>
-                  <a:lnTo>
-                    <a:pt x="1101999" y="1543078"/>
-                  </a:lnTo>
-                  <a:lnTo>
-                    <a:pt x="1173622" y="1615467"/>
-                  </a:lnTo>
-                  <a:lnTo>
-                    <a:pt x="1245244" y="1685156"/>
-                  </a:lnTo>
-                  <a:lnTo>
-                    <a:pt x="1316867" y="1752246"/>
-                  </a:lnTo>
-                  <a:lnTo>
-                    <a:pt x="1388489" y="1816833"/>
-                  </a:lnTo>
-                  <a:lnTo>
-                    <a:pt x="1460112" y="1879011"/>
-                  </a:lnTo>
-                  <a:lnTo>
-                    <a:pt x="1531734" y="1938870"/>
-                  </a:lnTo>
-                  <a:lnTo>
-                    <a:pt x="1603357" y="1996496"/>
-                  </a:lnTo>
-                  <a:lnTo>
-                    <a:pt x="1674979" y="2051972"/>
-                  </a:lnTo>
-                  <a:lnTo>
-                    <a:pt x="1746602" y="2105379"/>
-                  </a:lnTo>
-                  <a:lnTo>
-                    <a:pt x="1818224" y="2156794"/>
-                  </a:lnTo>
-                  <a:lnTo>
-                    <a:pt x="1889847" y="2206291"/>
-                  </a:lnTo>
-                  <a:lnTo>
-                    <a:pt x="1961469" y="2253942"/>
-                  </a:lnTo>
-                  <a:lnTo>
-                    <a:pt x="2033092" y="2299815"/>
-                  </a:lnTo>
-                  <a:lnTo>
-                    <a:pt x="2104714" y="2343978"/>
-                  </a:lnTo>
-                  <a:lnTo>
-                    <a:pt x="2176337" y="2386493"/>
-                  </a:lnTo>
-                  <a:lnTo>
-                    <a:pt x="2247959" y="2427422"/>
-                  </a:lnTo>
-                  <a:lnTo>
-                    <a:pt x="2319582" y="2466824"/>
-                  </a:lnTo>
-                  <a:lnTo>
-                    <a:pt x="2391204" y="2504756"/>
-                  </a:lnTo>
-                  <a:lnTo>
-                    <a:pt x="2462827" y="2541274"/>
-                  </a:lnTo>
-                  <a:lnTo>
-                    <a:pt x="2534450" y="2576429"/>
-                  </a:lnTo>
-                  <a:lnTo>
-                    <a:pt x="2606072" y="2610274"/>
-                  </a:lnTo>
-                  <a:lnTo>
-                    <a:pt x="2677695" y="2642855"/>
-                  </a:lnTo>
-                  <a:lnTo>
-                    <a:pt x="2749317" y="2656036"/>
-                  </a:lnTo>
-                  <a:lnTo>
-                    <a:pt x="2820940" y="2658768"/>
-                  </a:lnTo>
-                  <a:lnTo>
-                    <a:pt x="2892562" y="2661491"/>
-                  </a:lnTo>
-                  <a:lnTo>
-                    <a:pt x="2964185" y="2664206"/>
-                  </a:lnTo>
-                  <a:lnTo>
-                    <a:pt x="3035807" y="2666911"/>
-                  </a:lnTo>
-                  <a:lnTo>
-                    <a:pt x="3107430" y="2669607"/>
-                  </a:lnTo>
-                  <a:lnTo>
-                    <a:pt x="3179052" y="2672294"/>
-                  </a:lnTo>
-                  <a:lnTo>
-                    <a:pt x="3250675" y="2674973"/>
-                  </a:lnTo>
-                  <a:lnTo>
-                    <a:pt x="3322297" y="2677642"/>
-                  </a:lnTo>
-                  <a:lnTo>
-                    <a:pt x="3393920" y="2680303"/>
-                  </a:lnTo>
-                  <a:lnTo>
-                    <a:pt x="3465542" y="2682955"/>
-                  </a:lnTo>
-                  <a:lnTo>
-                    <a:pt x="3537165" y="2685598"/>
-                  </a:lnTo>
-                  <a:lnTo>
-                    <a:pt x="3608787" y="2688233"/>
-                  </a:lnTo>
-                  <a:lnTo>
-                    <a:pt x="3680410" y="2690858"/>
-                  </a:lnTo>
-                  <a:lnTo>
-                    <a:pt x="3752032" y="2693476"/>
-                  </a:lnTo>
-                  <a:lnTo>
-                    <a:pt x="3823655" y="2696084"/>
-                  </a:lnTo>
-                  <a:lnTo>
-                    <a:pt x="3895277" y="2698684"/>
-                  </a:lnTo>
-                  <a:lnTo>
-                    <a:pt x="3966900" y="2701275"/>
-                  </a:lnTo>
-                  <a:lnTo>
-                    <a:pt x="4038523" y="2703858"/>
-                  </a:lnTo>
-                  <a:lnTo>
-                    <a:pt x="4110145" y="2706432"/>
-                  </a:lnTo>
-                  <a:lnTo>
-                    <a:pt x="4181768" y="2708998"/>
-                  </a:lnTo>
-                  <a:lnTo>
-                    <a:pt x="4253390" y="2711555"/>
-                  </a:lnTo>
-                  <a:lnTo>
-                    <a:pt x="4325013" y="2714104"/>
-                  </a:lnTo>
-                  <a:lnTo>
-                    <a:pt x="4396635" y="2716644"/>
-                  </a:lnTo>
-                  <a:lnTo>
-                    <a:pt x="4468258" y="2719176"/>
-                  </a:lnTo>
-                  <a:lnTo>
-                    <a:pt x="4539880" y="2721700"/>
-                  </a:lnTo>
-                  <a:lnTo>
-                    <a:pt x="4611503" y="2724215"/>
-                  </a:lnTo>
-                  <a:lnTo>
-                    <a:pt x="4683125" y="2726722"/>
-                  </a:lnTo>
-                  <a:lnTo>
-                    <a:pt x="4754748" y="2729221"/>
-                  </a:lnTo>
-                  <a:lnTo>
-                    <a:pt x="4826370" y="2731712"/>
-                  </a:lnTo>
-                  <a:lnTo>
-                    <a:pt x="4897993" y="2734194"/>
-                  </a:lnTo>
-                  <a:lnTo>
-                    <a:pt x="4969615" y="2736668"/>
-                  </a:lnTo>
-                  <a:lnTo>
-                    <a:pt x="5041238" y="2739134"/>
-                  </a:lnTo>
-                  <a:lnTo>
-                    <a:pt x="5112860" y="2741592"/>
-                  </a:lnTo>
-                  <a:lnTo>
-                    <a:pt x="5184483" y="2744042"/>
-                  </a:lnTo>
-                  <a:lnTo>
-                    <a:pt x="5256105" y="2746483"/>
-                  </a:lnTo>
-                  <a:lnTo>
-                    <a:pt x="5327728" y="2748917"/>
-                  </a:lnTo>
-                  <a:lnTo>
-                    <a:pt x="5399351" y="2751342"/>
-                  </a:lnTo>
-                  <a:lnTo>
-                    <a:pt x="5470973" y="2753760"/>
-                  </a:lnTo>
-                  <a:lnTo>
-                    <a:pt x="5542596" y="2756169"/>
-                  </a:lnTo>
-                  <a:lnTo>
-                    <a:pt x="5614218" y="2758571"/>
-                  </a:lnTo>
-                  <a:lnTo>
-                    <a:pt x="5685841" y="2760964"/>
-                  </a:lnTo>
-                  <a:lnTo>
-                    <a:pt x="5757463" y="2763350"/>
-                  </a:lnTo>
-                  <a:lnTo>
-                    <a:pt x="5829086" y="2765728"/>
-                  </a:lnTo>
-                  <a:lnTo>
-                    <a:pt x="5900708" y="2768098"/>
-                  </a:lnTo>
-                  <a:lnTo>
-                    <a:pt x="5972331" y="2770460"/>
-                  </a:lnTo>
-                  <a:lnTo>
-                    <a:pt x="6043953" y="2772815"/>
-                  </a:lnTo>
-                  <a:lnTo>
-                    <a:pt x="6115576" y="2775161"/>
-                  </a:lnTo>
-                  <a:lnTo>
-                    <a:pt x="6187198" y="2777500"/>
-                  </a:lnTo>
-                  <a:lnTo>
-                    <a:pt x="6258821" y="2779831"/>
-                  </a:lnTo>
-                  <a:lnTo>
-                    <a:pt x="6330443" y="2782155"/>
-                  </a:lnTo>
-                  <a:lnTo>
-                    <a:pt x="6402066" y="2784471"/>
-                  </a:lnTo>
-                  <a:lnTo>
-                    <a:pt x="6473688" y="2786779"/>
-                  </a:lnTo>
-                  <a:lnTo>
-                    <a:pt x="6545311" y="2789079"/>
-                  </a:lnTo>
-                  <a:lnTo>
-                    <a:pt x="6616933" y="2791372"/>
-                  </a:lnTo>
-                  <a:lnTo>
-                    <a:pt x="6688556" y="2793657"/>
-                  </a:lnTo>
-                  <a:lnTo>
-                    <a:pt x="6760179" y="2795935"/>
-                  </a:lnTo>
-                </a:path>
-              </a:pathLst>
-            </a:custGeom>
-          </p:spPr>
-          <p:txBody>
-            <a:bodyPr/>
-            <a:lstStyle/>
-            <a:p/>
-          </p:txBody>
-        </p:sp>
-        <p:sp>
-          <p:nvSpPr>
             <p:cNvPr id="24" name="pl24"/>
             <p:cNvSpPr/>
             <p:nvPr/>
           </p:nvSpPr>
           <p:spPr>
             <a:xfrm>
-              <a:off x="1172049" y="4603090"/>
-              <a:ext cx="7090630" cy="857844"/>
+              <a:off x="1559866" y="2143092"/>
+              <a:ext cx="6639550" cy="1008987"/>
             </a:xfrm>
             <a:custGeom>
               <a:avLst/>
               <a:pathLst>
-                <a:path w="7090630" h="857844">
+                <a:path w="6639550" h="1008987">
                   <a:moveTo>
-                    <a:pt x="7090630" y="857844"/>
+                    <a:pt x="0" y="0"/>
                   </a:moveTo>
                   <a:lnTo>
-                    <a:pt x="7019007" y="854113"/>
-                  </a:lnTo>
-                  <a:lnTo>
-                    <a:pt x="6947385" y="850236"/>
-                  </a:lnTo>
-                  <a:lnTo>
-                    <a:pt x="6875762" y="846210"/>
-                  </a:lnTo>
-                  <a:lnTo>
-                    <a:pt x="6804139" y="842027"/>
-                  </a:lnTo>
-                  <a:lnTo>
-                    <a:pt x="6732517" y="837682"/>
-                  </a:lnTo>
-                  <a:lnTo>
-                    <a:pt x="6660894" y="833169"/>
-                  </a:lnTo>
-                  <a:lnTo>
-                    <a:pt x="6589272" y="828481"/>
-                  </a:lnTo>
-                  <a:lnTo>
-                    <a:pt x="6517649" y="823611"/>
-                  </a:lnTo>
-                  <a:lnTo>
-                    <a:pt x="6446027" y="818553"/>
-                  </a:lnTo>
-                  <a:lnTo>
-                    <a:pt x="6374404" y="813299"/>
-                  </a:lnTo>
-                  <a:lnTo>
-                    <a:pt x="6302782" y="807841"/>
-                  </a:lnTo>
-                  <a:lnTo>
-                    <a:pt x="6231159" y="802172"/>
-                  </a:lnTo>
-                  <a:lnTo>
-                    <a:pt x="6159537" y="796283"/>
-                  </a:lnTo>
-                  <a:lnTo>
-                    <a:pt x="6087914" y="790166"/>
-                  </a:lnTo>
-                  <a:lnTo>
-                    <a:pt x="6016292" y="783811"/>
-                  </a:lnTo>
-                  <a:lnTo>
-                    <a:pt x="5944669" y="777211"/>
-                  </a:lnTo>
-                  <a:lnTo>
-                    <a:pt x="5873047" y="770355"/>
-                  </a:lnTo>
-                  <a:lnTo>
-                    <a:pt x="5801424" y="763233"/>
-                  </a:lnTo>
-                  <a:lnTo>
-                    <a:pt x="5729802" y="755835"/>
-                  </a:lnTo>
-                  <a:lnTo>
-                    <a:pt x="5658179" y="748151"/>
-                  </a:lnTo>
-                  <a:lnTo>
-                    <a:pt x="5586557" y="740169"/>
-                  </a:lnTo>
-                  <a:lnTo>
-                    <a:pt x="5514934" y="731878"/>
-                  </a:lnTo>
-                  <a:lnTo>
-                    <a:pt x="5443311" y="723265"/>
-                  </a:lnTo>
-                  <a:lnTo>
-                    <a:pt x="5371689" y="714319"/>
-                  </a:lnTo>
-                  <a:lnTo>
-                    <a:pt x="5300066" y="705026"/>
-                  </a:lnTo>
-                  <a:lnTo>
-                    <a:pt x="5228444" y="695372"/>
-                  </a:lnTo>
-                  <a:lnTo>
-                    <a:pt x="5156821" y="685345"/>
-                  </a:lnTo>
-                  <a:lnTo>
-                    <a:pt x="5085199" y="674930"/>
-                  </a:lnTo>
-                  <a:lnTo>
-                    <a:pt x="5013576" y="664111"/>
-                  </a:lnTo>
-                  <a:lnTo>
-                    <a:pt x="4941954" y="652872"/>
-                  </a:lnTo>
-                  <a:lnTo>
-                    <a:pt x="4870331" y="641198"/>
-                  </a:lnTo>
-                  <a:lnTo>
-                    <a:pt x="4798709" y="629072"/>
-                  </a:lnTo>
-                  <a:lnTo>
-                    <a:pt x="4727086" y="616476"/>
-                  </a:lnTo>
-                  <a:lnTo>
-                    <a:pt x="4655464" y="603392"/>
-                  </a:lnTo>
-                  <a:lnTo>
-                    <a:pt x="4583841" y="589801"/>
-                  </a:lnTo>
-                  <a:lnTo>
-                    <a:pt x="4512219" y="575683"/>
-                  </a:lnTo>
-                  <a:lnTo>
-                    <a:pt x="4440596" y="561019"/>
-                  </a:lnTo>
-                  <a:lnTo>
-                    <a:pt x="4368974" y="545786"/>
-                  </a:lnTo>
-                  <a:lnTo>
-                    <a:pt x="4297351" y="529963"/>
-                  </a:lnTo>
-                  <a:lnTo>
-                    <a:pt x="4225729" y="513527"/>
-                  </a:lnTo>
-                  <a:lnTo>
-                    <a:pt x="4154106" y="496454"/>
-                  </a:lnTo>
-                  <a:lnTo>
-                    <a:pt x="4082483" y="478719"/>
-                  </a:lnTo>
-                  <a:lnTo>
-                    <a:pt x="4010861" y="460298"/>
-                  </a:lnTo>
-                  <a:lnTo>
-                    <a:pt x="3939238" y="441162"/>
-                  </a:lnTo>
-                  <a:lnTo>
-                    <a:pt x="3867616" y="421285"/>
-                  </a:lnTo>
-                  <a:lnTo>
-                    <a:pt x="3795993" y="400638"/>
-                  </a:lnTo>
-                  <a:lnTo>
-                    <a:pt x="3724371" y="379191"/>
-                  </a:lnTo>
-                  <a:lnTo>
-                    <a:pt x="3652748" y="356913"/>
-                  </a:lnTo>
-                  <a:lnTo>
-                    <a:pt x="3581126" y="333772"/>
-                  </a:lnTo>
-                  <a:lnTo>
-                    <a:pt x="3509503" y="309734"/>
-                  </a:lnTo>
-                  <a:lnTo>
-                    <a:pt x="3437881" y="284765"/>
-                  </a:lnTo>
-                  <a:lnTo>
-                    <a:pt x="3366258" y="258828"/>
-                  </a:lnTo>
-                  <a:lnTo>
-                    <a:pt x="3294636" y="231886"/>
-                  </a:lnTo>
-                  <a:lnTo>
-                    <a:pt x="3223013" y="203900"/>
-                  </a:lnTo>
-                  <a:lnTo>
-                    <a:pt x="3151391" y="174830"/>
-                  </a:lnTo>
-                  <a:lnTo>
-                    <a:pt x="3079768" y="144634"/>
-                  </a:lnTo>
-                  <a:lnTo>
-                    <a:pt x="3008146" y="123708"/>
-                  </a:lnTo>
-                  <a:lnTo>
-                    <a:pt x="2936523" y="120957"/>
-                  </a:lnTo>
-                  <a:lnTo>
-                    <a:pt x="2864901" y="118198"/>
-                  </a:lnTo>
-                  <a:lnTo>
-                    <a:pt x="2793278" y="115430"/>
-                  </a:lnTo>
-                  <a:lnTo>
-                    <a:pt x="2721655" y="112652"/>
-                  </a:lnTo>
-                  <a:lnTo>
-                    <a:pt x="2650033" y="109865"/>
-                  </a:lnTo>
-                  <a:lnTo>
-                    <a:pt x="2578410" y="107069"/>
-                  </a:lnTo>
-                  <a:lnTo>
-                    <a:pt x="2506788" y="104264"/>
-                  </a:lnTo>
-                  <a:lnTo>
-                    <a:pt x="2435165" y="101449"/>
-                  </a:lnTo>
-                  <a:lnTo>
-                    <a:pt x="2363543" y="98625"/>
-                  </a:lnTo>
-                  <a:lnTo>
-                    <a:pt x="2291920" y="95792"/>
-                  </a:lnTo>
-                  <a:lnTo>
-                    <a:pt x="2220298" y="92949"/>
-                  </a:lnTo>
-                  <a:lnTo>
-                    <a:pt x="2148675" y="90097"/>
-                  </a:lnTo>
-                  <a:lnTo>
-                    <a:pt x="2077053" y="87236"/>
-                  </a:lnTo>
-                  <a:lnTo>
-                    <a:pt x="2005430" y="84365"/>
-                  </a:lnTo>
-                  <a:lnTo>
-                    <a:pt x="1933808" y="81484"/>
-                  </a:lnTo>
-                  <a:lnTo>
-                    <a:pt x="1862185" y="78594"/>
-                  </a:lnTo>
-                  <a:lnTo>
-                    <a:pt x="1790563" y="75695"/>
-                  </a:lnTo>
-                  <a:lnTo>
-                    <a:pt x="1718940" y="72786"/>
-                  </a:lnTo>
-                  <a:lnTo>
-                    <a:pt x="1647318" y="69867"/>
-                  </a:lnTo>
-                  <a:lnTo>
-                    <a:pt x="1575695" y="66938"/>
-                  </a:lnTo>
-                  <a:lnTo>
-                    <a:pt x="1504073" y="64000"/>
-                  </a:lnTo>
-                  <a:lnTo>
-                    <a:pt x="1432450" y="61052"/>
-                  </a:lnTo>
-                  <a:lnTo>
-                    <a:pt x="1360827" y="58094"/>
-                  </a:lnTo>
-                  <a:lnTo>
-                    <a:pt x="1289205" y="55127"/>
-                  </a:lnTo>
-                  <a:lnTo>
-                    <a:pt x="1217582" y="52150"/>
-                  </a:lnTo>
-                  <a:lnTo>
-                    <a:pt x="1145960" y="49162"/>
-                  </a:lnTo>
-                  <a:lnTo>
-                    <a:pt x="1074337" y="46165"/>
-                  </a:lnTo>
-                  <a:lnTo>
-                    <a:pt x="1002715" y="43158"/>
-                  </a:lnTo>
-                  <a:lnTo>
-                    <a:pt x="931092" y="40141"/>
-                  </a:lnTo>
-                  <a:lnTo>
-                    <a:pt x="859470" y="37114"/>
-                  </a:lnTo>
-                  <a:lnTo>
-                    <a:pt x="787847" y="34077"/>
-                  </a:lnTo>
-                  <a:lnTo>
-                    <a:pt x="716225" y="31030"/>
-                  </a:lnTo>
-                  <a:lnTo>
-                    <a:pt x="644602" y="27973"/>
-                  </a:lnTo>
-                  <a:lnTo>
-                    <a:pt x="572980" y="24906"/>
-                  </a:lnTo>
-                  <a:lnTo>
-                    <a:pt x="501357" y="21829"/>
-                  </a:lnTo>
-                  <a:lnTo>
-                    <a:pt x="429735" y="18741"/>
-                  </a:lnTo>
-                  <a:lnTo>
-                    <a:pt x="358112" y="15643"/>
-                  </a:lnTo>
-                  <a:lnTo>
-                    <a:pt x="286490" y="12535"/>
-                  </a:lnTo>
-                  <a:lnTo>
-                    <a:pt x="214867" y="9417"/>
-                  </a:lnTo>
-                  <a:lnTo>
-                    <a:pt x="143245" y="6288"/>
-                  </a:lnTo>
-                  <a:lnTo>
-                    <a:pt x="71622" y="3149"/>
-                  </a:lnTo>
-                  <a:lnTo>
-                    <a:pt x="0" y="0"/>
+                    <a:pt x="27167" y="18535"/>
+                  </a:lnTo>
+                  <a:lnTo>
+                    <a:pt x="97512" y="64739"/>
+                  </a:lnTo>
+                  <a:lnTo>
+                    <a:pt x="167856" y="109220"/>
+                  </a:lnTo>
+                  <a:lnTo>
+                    <a:pt x="238201" y="152041"/>
+                  </a:lnTo>
+                  <a:lnTo>
+                    <a:pt x="308545" y="193265"/>
+                  </a:lnTo>
+                  <a:lnTo>
+                    <a:pt x="378890" y="232951"/>
+                  </a:lnTo>
+                  <a:lnTo>
+                    <a:pt x="449234" y="271157"/>
+                  </a:lnTo>
+                  <a:lnTo>
+                    <a:pt x="519579" y="307938"/>
+                  </a:lnTo>
+                  <a:lnTo>
+                    <a:pt x="589923" y="343347"/>
+                  </a:lnTo>
+                  <a:lnTo>
+                    <a:pt x="660268" y="377435"/>
+                  </a:lnTo>
+                  <a:lnTo>
+                    <a:pt x="730612" y="410251"/>
+                  </a:lnTo>
+                  <a:lnTo>
+                    <a:pt x="800957" y="441843"/>
+                  </a:lnTo>
+                  <a:lnTo>
+                    <a:pt x="871301" y="472257"/>
+                  </a:lnTo>
+                  <a:lnTo>
+                    <a:pt x="941646" y="501537"/>
+                  </a:lnTo>
+                  <a:lnTo>
+                    <a:pt x="1011990" y="529724"/>
+                  </a:lnTo>
+                  <a:lnTo>
+                    <a:pt x="1082335" y="556860"/>
+                  </a:lnTo>
+                  <a:lnTo>
+                    <a:pt x="1152679" y="582984"/>
+                  </a:lnTo>
+                  <a:lnTo>
+                    <a:pt x="1223024" y="608133"/>
+                  </a:lnTo>
+                  <a:lnTo>
+                    <a:pt x="1293368" y="632344"/>
+                  </a:lnTo>
+                  <a:lnTo>
+                    <a:pt x="1363713" y="655652"/>
+                  </a:lnTo>
+                  <a:lnTo>
+                    <a:pt x="1434057" y="678091"/>
+                  </a:lnTo>
+                  <a:lnTo>
+                    <a:pt x="1504402" y="699692"/>
+                  </a:lnTo>
+                  <a:lnTo>
+                    <a:pt x="1574746" y="720488"/>
+                  </a:lnTo>
+                  <a:lnTo>
+                    <a:pt x="1645091" y="740508"/>
+                  </a:lnTo>
+                  <a:lnTo>
+                    <a:pt x="1715435" y="759782"/>
+                  </a:lnTo>
+                  <a:lnTo>
+                    <a:pt x="1785780" y="778336"/>
+                  </a:lnTo>
+                  <a:lnTo>
+                    <a:pt x="1856124" y="796198"/>
+                  </a:lnTo>
+                  <a:lnTo>
+                    <a:pt x="1926469" y="813394"/>
+                  </a:lnTo>
+                  <a:lnTo>
+                    <a:pt x="1996813" y="829949"/>
+                  </a:lnTo>
+                  <a:lnTo>
+                    <a:pt x="2067158" y="845886"/>
+                  </a:lnTo>
+                  <a:lnTo>
+                    <a:pt x="2137502" y="861229"/>
+                  </a:lnTo>
+                  <a:lnTo>
+                    <a:pt x="2207847" y="875999"/>
+                  </a:lnTo>
+                  <a:lnTo>
+                    <a:pt x="2278191" y="890218"/>
+                  </a:lnTo>
+                  <a:lnTo>
+                    <a:pt x="2348536" y="903907"/>
+                  </a:lnTo>
+                  <a:lnTo>
+                    <a:pt x="2418880" y="917086"/>
+                  </a:lnTo>
+                  <a:lnTo>
+                    <a:pt x="2489225" y="929772"/>
+                  </a:lnTo>
+                  <a:lnTo>
+                    <a:pt x="2559569" y="941986"/>
+                  </a:lnTo>
+                  <a:lnTo>
+                    <a:pt x="2629914" y="953744"/>
+                  </a:lnTo>
+                  <a:lnTo>
+                    <a:pt x="2700258" y="958501"/>
+                  </a:lnTo>
+                  <a:lnTo>
+                    <a:pt x="2770603" y="959487"/>
+                  </a:lnTo>
+                  <a:lnTo>
+                    <a:pt x="2840947" y="960469"/>
+                  </a:lnTo>
+                  <a:lnTo>
+                    <a:pt x="2911292" y="961449"/>
+                  </a:lnTo>
+                  <a:lnTo>
+                    <a:pt x="2981636" y="962425"/>
+                  </a:lnTo>
+                  <a:lnTo>
+                    <a:pt x="3051981" y="963398"/>
+                  </a:lnTo>
+                  <a:lnTo>
+                    <a:pt x="3122325" y="964368"/>
+                  </a:lnTo>
+                  <a:lnTo>
+                    <a:pt x="3192670" y="965334"/>
+                  </a:lnTo>
+                  <a:lnTo>
+                    <a:pt x="3263014" y="966298"/>
+                  </a:lnTo>
+                  <a:lnTo>
+                    <a:pt x="3333359" y="967258"/>
+                  </a:lnTo>
+                  <a:lnTo>
+                    <a:pt x="3403703" y="968215"/>
+                  </a:lnTo>
+                  <a:lnTo>
+                    <a:pt x="3474048" y="969169"/>
+                  </a:lnTo>
+                  <a:lnTo>
+                    <a:pt x="3544392" y="970120"/>
+                  </a:lnTo>
+                  <a:lnTo>
+                    <a:pt x="3614737" y="971067"/>
+                  </a:lnTo>
+                  <a:lnTo>
+                    <a:pt x="3685081" y="972012"/>
+                  </a:lnTo>
+                  <a:lnTo>
+                    <a:pt x="3755425" y="972953"/>
+                  </a:lnTo>
+                  <a:lnTo>
+                    <a:pt x="3825770" y="973891"/>
+                  </a:lnTo>
+                  <a:lnTo>
+                    <a:pt x="3896114" y="974826"/>
+                  </a:lnTo>
+                  <a:lnTo>
+                    <a:pt x="3966459" y="975758"/>
+                  </a:lnTo>
+                  <a:lnTo>
+                    <a:pt x="4036803" y="976687"/>
+                  </a:lnTo>
+                  <a:lnTo>
+                    <a:pt x="4107148" y="977613"/>
+                  </a:lnTo>
+                  <a:lnTo>
+                    <a:pt x="4177492" y="978536"/>
+                  </a:lnTo>
+                  <a:lnTo>
+                    <a:pt x="4247837" y="979456"/>
+                  </a:lnTo>
+                  <a:lnTo>
+                    <a:pt x="4318181" y="980373"/>
+                  </a:lnTo>
+                  <a:lnTo>
+                    <a:pt x="4388526" y="981286"/>
+                  </a:lnTo>
+                  <a:lnTo>
+                    <a:pt x="4458870" y="982197"/>
+                  </a:lnTo>
+                  <a:lnTo>
+                    <a:pt x="4529215" y="983105"/>
+                  </a:lnTo>
+                  <a:lnTo>
+                    <a:pt x="4599559" y="984010"/>
+                  </a:lnTo>
+                  <a:lnTo>
+                    <a:pt x="4669904" y="984911"/>
+                  </a:lnTo>
+                  <a:lnTo>
+                    <a:pt x="4740248" y="985810"/>
+                  </a:lnTo>
+                  <a:lnTo>
+                    <a:pt x="4810593" y="986706"/>
+                  </a:lnTo>
+                  <a:lnTo>
+                    <a:pt x="4880937" y="987599"/>
+                  </a:lnTo>
+                  <a:lnTo>
+                    <a:pt x="4951282" y="988489"/>
+                  </a:lnTo>
+                  <a:lnTo>
+                    <a:pt x="5021626" y="989376"/>
+                  </a:lnTo>
+                  <a:lnTo>
+                    <a:pt x="5091971" y="990260"/>
+                  </a:lnTo>
+                  <a:lnTo>
+                    <a:pt x="5162315" y="991141"/>
+                  </a:lnTo>
+                  <a:lnTo>
+                    <a:pt x="5232660" y="992019"/>
+                  </a:lnTo>
+                  <a:lnTo>
+                    <a:pt x="5303004" y="992894"/>
+                  </a:lnTo>
+                  <a:lnTo>
+                    <a:pt x="5373349" y="993767"/>
+                  </a:lnTo>
+                  <a:lnTo>
+                    <a:pt x="5443693" y="994636"/>
+                  </a:lnTo>
+                  <a:lnTo>
+                    <a:pt x="5514038" y="995503"/>
+                  </a:lnTo>
+                  <a:lnTo>
+                    <a:pt x="5584382" y="996367"/>
+                  </a:lnTo>
+                  <a:lnTo>
+                    <a:pt x="5654727" y="997228"/>
+                  </a:lnTo>
+                  <a:lnTo>
+                    <a:pt x="5725071" y="998086"/>
+                  </a:lnTo>
+                  <a:lnTo>
+                    <a:pt x="5795416" y="998941"/>
+                  </a:lnTo>
+                  <a:lnTo>
+                    <a:pt x="5865760" y="999794"/>
+                  </a:lnTo>
+                  <a:lnTo>
+                    <a:pt x="5936105" y="1000643"/>
+                  </a:lnTo>
+                  <a:lnTo>
+                    <a:pt x="6006449" y="1001490"/>
+                  </a:lnTo>
+                  <a:lnTo>
+                    <a:pt x="6076794" y="1002334"/>
+                  </a:lnTo>
+                  <a:lnTo>
+                    <a:pt x="6147138" y="1003175"/>
+                  </a:lnTo>
+                  <a:lnTo>
+                    <a:pt x="6217483" y="1004014"/>
+                  </a:lnTo>
+                  <a:lnTo>
+                    <a:pt x="6287827" y="1004850"/>
+                  </a:lnTo>
+                  <a:lnTo>
+                    <a:pt x="6358172" y="1005683"/>
+                  </a:lnTo>
+                  <a:lnTo>
+                    <a:pt x="6428516" y="1006513"/>
+                  </a:lnTo>
+                  <a:lnTo>
+                    <a:pt x="6498861" y="1007340"/>
+                  </a:lnTo>
+                  <a:lnTo>
+                    <a:pt x="6569205" y="1008165"/>
+                  </a:lnTo>
+                  <a:lnTo>
+                    <a:pt x="6639550" y="1008987"/>
                   </a:lnTo>
                 </a:path>
               </a:pathLst>
@@ -4302,312 +4012,637 @@
           </p:nvSpPr>
           <p:spPr>
             <a:xfrm>
-              <a:off x="1172049" y="3567115"/>
-              <a:ext cx="7090630" cy="1732751"/>
+              <a:off x="1235312" y="3055960"/>
+              <a:ext cx="6964104" cy="309576"/>
             </a:xfrm>
             <a:custGeom>
               <a:avLst/>
               <a:pathLst>
-                <a:path w="7090630" h="1732751">
+                <a:path w="6964104" h="309576">
+                  <a:moveTo>
+                    <a:pt x="6964104" y="309576"/>
+                  </a:moveTo>
+                  <a:lnTo>
+                    <a:pt x="6893760" y="308229"/>
+                  </a:lnTo>
+                  <a:lnTo>
+                    <a:pt x="6823415" y="306830"/>
+                  </a:lnTo>
+                  <a:lnTo>
+                    <a:pt x="6753071" y="305377"/>
+                  </a:lnTo>
+                  <a:lnTo>
+                    <a:pt x="6682726" y="303867"/>
+                  </a:lnTo>
+                  <a:lnTo>
+                    <a:pt x="6612382" y="302299"/>
+                  </a:lnTo>
+                  <a:lnTo>
+                    <a:pt x="6542037" y="300671"/>
+                  </a:lnTo>
+                  <a:lnTo>
+                    <a:pt x="6471693" y="298979"/>
+                  </a:lnTo>
+                  <a:lnTo>
+                    <a:pt x="6401348" y="297222"/>
+                  </a:lnTo>
+                  <a:lnTo>
+                    <a:pt x="6331004" y="295396"/>
+                  </a:lnTo>
+                  <a:lnTo>
+                    <a:pt x="6260659" y="293500"/>
+                  </a:lnTo>
+                  <a:lnTo>
+                    <a:pt x="6190315" y="291531"/>
+                  </a:lnTo>
+                  <a:lnTo>
+                    <a:pt x="6119970" y="289485"/>
+                  </a:lnTo>
+                  <a:lnTo>
+                    <a:pt x="6049626" y="287359"/>
+                  </a:lnTo>
+                  <a:lnTo>
+                    <a:pt x="5979281" y="285152"/>
+                  </a:lnTo>
+                  <a:lnTo>
+                    <a:pt x="5908937" y="282859"/>
+                  </a:lnTo>
+                  <a:lnTo>
+                    <a:pt x="5838592" y="280477"/>
+                  </a:lnTo>
+                  <a:lnTo>
+                    <a:pt x="5768248" y="278003"/>
+                  </a:lnTo>
+                  <a:lnTo>
+                    <a:pt x="5697903" y="275433"/>
+                  </a:lnTo>
+                  <a:lnTo>
+                    <a:pt x="5627559" y="272763"/>
+                  </a:lnTo>
+                  <a:lnTo>
+                    <a:pt x="5557214" y="269990"/>
+                  </a:lnTo>
+                  <a:lnTo>
+                    <a:pt x="5486870" y="267109"/>
+                  </a:lnTo>
+                  <a:lnTo>
+                    <a:pt x="5416525" y="264117"/>
+                  </a:lnTo>
+                  <a:lnTo>
+                    <a:pt x="5346181" y="261009"/>
+                  </a:lnTo>
+                  <a:lnTo>
+                    <a:pt x="5275836" y="257780"/>
+                  </a:lnTo>
+                  <a:lnTo>
+                    <a:pt x="5205492" y="254427"/>
+                  </a:lnTo>
+                  <a:lnTo>
+                    <a:pt x="5135147" y="250943"/>
+                  </a:lnTo>
+                  <a:lnTo>
+                    <a:pt x="5064803" y="247325"/>
+                  </a:lnTo>
+                  <a:lnTo>
+                    <a:pt x="4994458" y="243566"/>
+                  </a:lnTo>
+                  <a:lnTo>
+                    <a:pt x="4924114" y="239662"/>
+                  </a:lnTo>
+                  <a:lnTo>
+                    <a:pt x="4853769" y="235606"/>
+                  </a:lnTo>
+                  <a:lnTo>
+                    <a:pt x="4783425" y="231393"/>
+                  </a:lnTo>
+                  <a:lnTo>
+                    <a:pt x="4713080" y="227017"/>
+                  </a:lnTo>
+                  <a:lnTo>
+                    <a:pt x="4642736" y="222471"/>
+                  </a:lnTo>
+                  <a:lnTo>
+                    <a:pt x="4572391" y="217750"/>
+                  </a:lnTo>
+                  <a:lnTo>
+                    <a:pt x="4502047" y="212845"/>
+                  </a:lnTo>
+                  <a:lnTo>
+                    <a:pt x="4431702" y="207750"/>
+                  </a:lnTo>
+                  <a:lnTo>
+                    <a:pt x="4361358" y="202458"/>
+                  </a:lnTo>
+                  <a:lnTo>
+                    <a:pt x="4291013" y="196961"/>
+                  </a:lnTo>
+                  <a:lnTo>
+                    <a:pt x="4220669" y="191251"/>
+                  </a:lnTo>
+                  <a:lnTo>
+                    <a:pt x="4150324" y="185319"/>
+                  </a:lnTo>
+                  <a:lnTo>
+                    <a:pt x="4079980" y="179158"/>
+                  </a:lnTo>
+                  <a:lnTo>
+                    <a:pt x="4009635" y="172758"/>
+                  </a:lnTo>
+                  <a:lnTo>
+                    <a:pt x="3939291" y="166110"/>
+                  </a:lnTo>
+                  <a:lnTo>
+                    <a:pt x="3868946" y="159205"/>
+                  </a:lnTo>
+                  <a:lnTo>
+                    <a:pt x="3798602" y="152032"/>
+                  </a:lnTo>
+                  <a:lnTo>
+                    <a:pt x="3728257" y="144581"/>
+                  </a:lnTo>
+                  <a:lnTo>
+                    <a:pt x="3657913" y="136841"/>
+                  </a:lnTo>
+                  <a:lnTo>
+                    <a:pt x="3587569" y="128801"/>
+                  </a:lnTo>
+                  <a:lnTo>
+                    <a:pt x="3517224" y="120450"/>
+                  </a:lnTo>
+                  <a:lnTo>
+                    <a:pt x="3446880" y="111775"/>
+                  </a:lnTo>
+                  <a:lnTo>
+                    <a:pt x="3376535" y="102765"/>
+                  </a:lnTo>
+                  <a:lnTo>
+                    <a:pt x="3306191" y="93405"/>
+                  </a:lnTo>
+                  <a:lnTo>
+                    <a:pt x="3235846" y="83682"/>
+                  </a:lnTo>
+                  <a:lnTo>
+                    <a:pt x="3165502" y="73583"/>
+                  </a:lnTo>
+                  <a:lnTo>
+                    <a:pt x="3095157" y="63092"/>
+                  </a:lnTo>
+                  <a:lnTo>
+                    <a:pt x="3024813" y="52195"/>
+                  </a:lnTo>
+                  <a:lnTo>
+                    <a:pt x="2954468" y="44643"/>
+                  </a:lnTo>
+                  <a:lnTo>
+                    <a:pt x="2884124" y="43650"/>
+                  </a:lnTo>
+                  <a:lnTo>
+                    <a:pt x="2813779" y="42655"/>
+                  </a:lnTo>
+                  <a:lnTo>
+                    <a:pt x="2743435" y="41656"/>
+                  </a:lnTo>
+                  <a:lnTo>
+                    <a:pt x="2673090" y="40653"/>
+                  </a:lnTo>
+                  <a:lnTo>
+                    <a:pt x="2602746" y="39647"/>
+                  </a:lnTo>
+                  <a:lnTo>
+                    <a:pt x="2532401" y="38638"/>
+                  </a:lnTo>
+                  <a:lnTo>
+                    <a:pt x="2462057" y="37626"/>
+                  </a:lnTo>
+                  <a:lnTo>
+                    <a:pt x="2391712" y="36610"/>
+                  </a:lnTo>
+                  <a:lnTo>
+                    <a:pt x="2321368" y="35591"/>
+                  </a:lnTo>
+                  <a:lnTo>
+                    <a:pt x="2251023" y="34569"/>
+                  </a:lnTo>
+                  <a:lnTo>
+                    <a:pt x="2180679" y="33543"/>
+                  </a:lnTo>
+                  <a:lnTo>
+                    <a:pt x="2110334" y="32514"/>
+                  </a:lnTo>
+                  <a:lnTo>
+                    <a:pt x="2039990" y="31481"/>
+                  </a:lnTo>
+                  <a:lnTo>
+                    <a:pt x="1969645" y="30445"/>
+                  </a:lnTo>
+                  <a:lnTo>
+                    <a:pt x="1899301" y="29405"/>
+                  </a:lnTo>
+                  <a:lnTo>
+                    <a:pt x="1828956" y="28363"/>
+                  </a:lnTo>
+                  <a:lnTo>
+                    <a:pt x="1758612" y="27316"/>
+                  </a:lnTo>
+                  <a:lnTo>
+                    <a:pt x="1688267" y="26266"/>
+                  </a:lnTo>
+                  <a:lnTo>
+                    <a:pt x="1617923" y="25213"/>
+                  </a:lnTo>
+                  <a:lnTo>
+                    <a:pt x="1547578" y="24156"/>
+                  </a:lnTo>
+                  <a:lnTo>
+                    <a:pt x="1477234" y="23096"/>
+                  </a:lnTo>
+                  <a:lnTo>
+                    <a:pt x="1406889" y="22032"/>
+                  </a:lnTo>
+                  <a:lnTo>
+                    <a:pt x="1336545" y="20965"/>
+                  </a:lnTo>
+                  <a:lnTo>
+                    <a:pt x="1266200" y="19894"/>
+                  </a:lnTo>
+                  <a:lnTo>
+                    <a:pt x="1195856" y="18819"/>
+                  </a:lnTo>
+                  <a:lnTo>
+                    <a:pt x="1125511" y="17741"/>
+                  </a:lnTo>
+                  <a:lnTo>
+                    <a:pt x="1055167" y="16660"/>
+                  </a:lnTo>
+                  <a:lnTo>
+                    <a:pt x="984822" y="15574"/>
+                  </a:lnTo>
+                  <a:lnTo>
+                    <a:pt x="914478" y="14486"/>
+                  </a:lnTo>
+                  <a:lnTo>
+                    <a:pt x="844133" y="13393"/>
+                  </a:lnTo>
+                  <a:lnTo>
+                    <a:pt x="773789" y="12297"/>
+                  </a:lnTo>
+                  <a:lnTo>
+                    <a:pt x="703444" y="11198"/>
+                  </a:lnTo>
+                  <a:lnTo>
+                    <a:pt x="633100" y="10095"/>
+                  </a:lnTo>
+                  <a:lnTo>
+                    <a:pt x="562755" y="8988"/>
+                  </a:lnTo>
+                  <a:lnTo>
+                    <a:pt x="492411" y="7877"/>
+                  </a:lnTo>
+                  <a:lnTo>
+                    <a:pt x="422066" y="6763"/>
+                  </a:lnTo>
+                  <a:lnTo>
+                    <a:pt x="351722" y="5645"/>
+                  </a:lnTo>
+                  <a:lnTo>
+                    <a:pt x="281377" y="4523"/>
+                  </a:lnTo>
+                  <a:lnTo>
+                    <a:pt x="211033" y="3398"/>
+                  </a:lnTo>
+                  <a:lnTo>
+                    <a:pt x="140688" y="2269"/>
+                  </a:lnTo>
+                  <a:lnTo>
+                    <a:pt x="70344" y="1136"/>
+                  </a:lnTo>
+                  <a:lnTo>
+                    <a:pt x="0" y="0"/>
+                  </a:lnTo>
+                </a:path>
+              </a:pathLst>
+            </a:custGeom>
+          </p:spPr>
+          <p:txBody>
+            <a:bodyPr/>
+            <a:lstStyle/>
+            <a:p/>
+          </p:txBody>
+        </p:sp>
+        <p:sp>
+          <p:nvSpPr>
+            <p:cNvPr id="26" name="pl26"/>
+            <p:cNvSpPr/>
+            <p:nvPr/>
+          </p:nvSpPr>
+          <p:spPr>
+            <a:xfrm>
+              <a:off x="1235312" y="2682101"/>
+              <a:ext cx="6964104" cy="625309"/>
+            </a:xfrm>
+            <a:custGeom>
+              <a:avLst/>
+              <a:pathLst>
+                <a:path w="6964104" h="625309">
                   <a:moveTo>
                     <a:pt x="0" y="0"/>
                   </a:moveTo>
                   <a:lnTo>
-                    <a:pt x="71622" y="40695"/>
-                  </a:lnTo>
-                  <a:lnTo>
-                    <a:pt x="143245" y="80558"/>
-                  </a:lnTo>
-                  <a:lnTo>
-                    <a:pt x="214867" y="119606"/>
-                  </a:lnTo>
-                  <a:lnTo>
-                    <a:pt x="286490" y="157856"/>
-                  </a:lnTo>
-                  <a:lnTo>
-                    <a:pt x="358112" y="195323"/>
-                  </a:lnTo>
-                  <a:lnTo>
-                    <a:pt x="429735" y="232024"/>
-                  </a:lnTo>
-                  <a:lnTo>
-                    <a:pt x="501357" y="267975"/>
-                  </a:lnTo>
-                  <a:lnTo>
-                    <a:pt x="572980" y="303191"/>
-                  </a:lnTo>
-                  <a:lnTo>
-                    <a:pt x="644602" y="337686"/>
-                  </a:lnTo>
-                  <a:lnTo>
-                    <a:pt x="716225" y="371477"/>
-                  </a:lnTo>
-                  <a:lnTo>
-                    <a:pt x="787847" y="404576"/>
-                  </a:lnTo>
-                  <a:lnTo>
-                    <a:pt x="859470" y="436998"/>
-                  </a:lnTo>
-                  <a:lnTo>
-                    <a:pt x="931092" y="468757"/>
-                  </a:lnTo>
-                  <a:lnTo>
-                    <a:pt x="1002715" y="499867"/>
-                  </a:lnTo>
-                  <a:lnTo>
-                    <a:pt x="1074337" y="530341"/>
-                  </a:lnTo>
-                  <a:lnTo>
-                    <a:pt x="1145960" y="560192"/>
-                  </a:lnTo>
-                  <a:lnTo>
-                    <a:pt x="1217582" y="589432"/>
-                  </a:lnTo>
-                  <a:lnTo>
-                    <a:pt x="1289205" y="618074"/>
-                  </a:lnTo>
-                  <a:lnTo>
-                    <a:pt x="1360827" y="646131"/>
-                  </a:lnTo>
-                  <a:lnTo>
-                    <a:pt x="1432450" y="673614"/>
-                  </a:lnTo>
-                  <a:lnTo>
-                    <a:pt x="1504073" y="700535"/>
-                  </a:lnTo>
-                  <a:lnTo>
-                    <a:pt x="1575695" y="726905"/>
-                  </a:lnTo>
-                  <a:lnTo>
-                    <a:pt x="1647318" y="752737"/>
-                  </a:lnTo>
-                  <a:lnTo>
-                    <a:pt x="1718940" y="778040"/>
-                  </a:lnTo>
-                  <a:lnTo>
-                    <a:pt x="1790563" y="802825"/>
-                  </a:lnTo>
-                  <a:lnTo>
-                    <a:pt x="1862185" y="827104"/>
-                  </a:lnTo>
-                  <a:lnTo>
-                    <a:pt x="1933808" y="850886"/>
-                  </a:lnTo>
-                  <a:lnTo>
-                    <a:pt x="2005430" y="874182"/>
-                  </a:lnTo>
-                  <a:lnTo>
-                    <a:pt x="2077053" y="897002"/>
-                  </a:lnTo>
-                  <a:lnTo>
-                    <a:pt x="2148675" y="919355"/>
-                  </a:lnTo>
-                  <a:lnTo>
-                    <a:pt x="2220298" y="941251"/>
-                  </a:lnTo>
-                  <a:lnTo>
-                    <a:pt x="2291920" y="962699"/>
-                  </a:lnTo>
-                  <a:lnTo>
-                    <a:pt x="2363543" y="983708"/>
-                  </a:lnTo>
-                  <a:lnTo>
-                    <a:pt x="2435165" y="1004288"/>
-                  </a:lnTo>
-                  <a:lnTo>
-                    <a:pt x="2506788" y="1024447"/>
-                  </a:lnTo>
-                  <a:lnTo>
-                    <a:pt x="2578410" y="1044194"/>
-                  </a:lnTo>
-                  <a:lnTo>
-                    <a:pt x="2650033" y="1063537"/>
-                  </a:lnTo>
-                  <a:lnTo>
-                    <a:pt x="2721655" y="1082485"/>
-                  </a:lnTo>
-                  <a:lnTo>
-                    <a:pt x="2793278" y="1101045"/>
-                  </a:lnTo>
-                  <a:lnTo>
-                    <a:pt x="2864901" y="1119226"/>
-                  </a:lnTo>
-                  <a:lnTo>
-                    <a:pt x="2936523" y="1137034"/>
-                  </a:lnTo>
-                  <a:lnTo>
-                    <a:pt x="3008146" y="1154479"/>
-                  </a:lnTo>
-                  <a:lnTo>
-                    <a:pt x="3079768" y="1171567"/>
-                  </a:lnTo>
-                  <a:lnTo>
-                    <a:pt x="3151391" y="1188305"/>
-                  </a:lnTo>
-                  <a:lnTo>
-                    <a:pt x="3223013" y="1204702"/>
-                  </a:lnTo>
-                  <a:lnTo>
-                    <a:pt x="3294636" y="1220763"/>
-                  </a:lnTo>
-                  <a:lnTo>
-                    <a:pt x="3366258" y="1236495"/>
-                  </a:lnTo>
-                  <a:lnTo>
-                    <a:pt x="3437881" y="1251906"/>
-                  </a:lnTo>
-                  <a:lnTo>
-                    <a:pt x="3509503" y="1267002"/>
-                  </a:lnTo>
-                  <a:lnTo>
-                    <a:pt x="3581126" y="1281789"/>
-                  </a:lnTo>
-                  <a:lnTo>
-                    <a:pt x="3652748" y="1296273"/>
-                  </a:lnTo>
-                  <a:lnTo>
-                    <a:pt x="3724371" y="1310462"/>
-                  </a:lnTo>
-                  <a:lnTo>
-                    <a:pt x="3795993" y="1324360"/>
-                  </a:lnTo>
-                  <a:lnTo>
-                    <a:pt x="3867616" y="1337974"/>
-                  </a:lnTo>
-                  <a:lnTo>
-                    <a:pt x="3939238" y="1351310"/>
-                  </a:lnTo>
-                  <a:lnTo>
-                    <a:pt x="4010861" y="1364373"/>
-                  </a:lnTo>
-                  <a:lnTo>
-                    <a:pt x="4082483" y="1377169"/>
-                  </a:lnTo>
-                  <a:lnTo>
-                    <a:pt x="4154106" y="1389703"/>
-                  </a:lnTo>
-                  <a:lnTo>
-                    <a:pt x="4225729" y="1401981"/>
-                  </a:lnTo>
-                  <a:lnTo>
-                    <a:pt x="4297351" y="1414008"/>
-                  </a:lnTo>
-                  <a:lnTo>
-                    <a:pt x="4368974" y="1425789"/>
-                  </a:lnTo>
-                  <a:lnTo>
-                    <a:pt x="4440596" y="1437329"/>
-                  </a:lnTo>
-                  <a:lnTo>
-                    <a:pt x="4512219" y="1448633"/>
-                  </a:lnTo>
-                  <a:lnTo>
-                    <a:pt x="4583841" y="1459706"/>
-                  </a:lnTo>
-                  <a:lnTo>
-                    <a:pt x="4655464" y="1470552"/>
-                  </a:lnTo>
-                  <a:lnTo>
-                    <a:pt x="4727086" y="1481177"/>
-                  </a:lnTo>
-                  <a:lnTo>
-                    <a:pt x="4798709" y="1491584"/>
-                  </a:lnTo>
-                  <a:lnTo>
-                    <a:pt x="4870331" y="1501779"/>
-                  </a:lnTo>
-                  <a:lnTo>
-                    <a:pt x="4941954" y="1511765"/>
-                  </a:lnTo>
-                  <a:lnTo>
-                    <a:pt x="5013576" y="1521547"/>
-                  </a:lnTo>
-                  <a:lnTo>
-                    <a:pt x="5085199" y="1531129"/>
-                  </a:lnTo>
-                  <a:lnTo>
-                    <a:pt x="5156821" y="1540515"/>
-                  </a:lnTo>
-                  <a:lnTo>
-                    <a:pt x="5228444" y="1549709"/>
-                  </a:lnTo>
-                  <a:lnTo>
-                    <a:pt x="5300066" y="1558715"/>
-                  </a:lnTo>
-                  <a:lnTo>
-                    <a:pt x="5371689" y="1567537"/>
-                  </a:lnTo>
-                  <a:lnTo>
-                    <a:pt x="5443311" y="1576179"/>
-                  </a:lnTo>
-                  <a:lnTo>
-                    <a:pt x="5514934" y="1584643"/>
-                  </a:lnTo>
-                  <a:lnTo>
-                    <a:pt x="5586557" y="1592935"/>
-                  </a:lnTo>
-                  <a:lnTo>
-                    <a:pt x="5658179" y="1601057"/>
-                  </a:lnTo>
-                  <a:lnTo>
-                    <a:pt x="5729802" y="1609013"/>
-                  </a:lnTo>
-                  <a:lnTo>
-                    <a:pt x="5801424" y="1616807"/>
-                  </a:lnTo>
-                  <a:lnTo>
-                    <a:pt x="5873047" y="1624441"/>
-                  </a:lnTo>
-                  <a:lnTo>
-                    <a:pt x="5944669" y="1631918"/>
-                  </a:lnTo>
-                  <a:lnTo>
-                    <a:pt x="6016292" y="1639243"/>
-                  </a:lnTo>
-                  <a:lnTo>
-                    <a:pt x="6087914" y="1646419"/>
-                  </a:lnTo>
-                  <a:lnTo>
-                    <a:pt x="6159537" y="1653447"/>
-                  </a:lnTo>
-                  <a:lnTo>
-                    <a:pt x="6231159" y="1660332"/>
-                  </a:lnTo>
-                  <a:lnTo>
-                    <a:pt x="6302782" y="1667076"/>
-                  </a:lnTo>
-                  <a:lnTo>
-                    <a:pt x="6374404" y="1673682"/>
-                  </a:lnTo>
-                  <a:lnTo>
-                    <a:pt x="6446027" y="1680153"/>
-                  </a:lnTo>
-                  <a:lnTo>
-                    <a:pt x="6517649" y="1686492"/>
-                  </a:lnTo>
-                  <a:lnTo>
-                    <a:pt x="6589272" y="1692701"/>
-                  </a:lnTo>
-                  <a:lnTo>
-                    <a:pt x="6660894" y="1698783"/>
-                  </a:lnTo>
-                  <a:lnTo>
-                    <a:pt x="6732517" y="1704740"/>
-                  </a:lnTo>
-                  <a:lnTo>
-                    <a:pt x="6804139" y="1710576"/>
-                  </a:lnTo>
-                  <a:lnTo>
-                    <a:pt x="6875762" y="1716293"/>
-                  </a:lnTo>
-                  <a:lnTo>
-                    <a:pt x="6947385" y="1721893"/>
-                  </a:lnTo>
-                  <a:lnTo>
-                    <a:pt x="7019007" y="1727378"/>
-                  </a:lnTo>
-                  <a:lnTo>
-                    <a:pt x="7090630" y="1732751"/>
+                    <a:pt x="70344" y="14685"/>
+                  </a:lnTo>
+                  <a:lnTo>
+                    <a:pt x="140688" y="29071"/>
+                  </a:lnTo>
+                  <a:lnTo>
+                    <a:pt x="211033" y="43163"/>
+                  </a:lnTo>
+                  <a:lnTo>
+                    <a:pt x="281377" y="56966"/>
+                  </a:lnTo>
+                  <a:lnTo>
+                    <a:pt x="351722" y="70487"/>
+                  </a:lnTo>
+                  <a:lnTo>
+                    <a:pt x="422066" y="83732"/>
+                  </a:lnTo>
+                  <a:lnTo>
+                    <a:pt x="492411" y="96706"/>
+                  </a:lnTo>
+                  <a:lnTo>
+                    <a:pt x="562755" y="109414"/>
+                  </a:lnTo>
+                  <a:lnTo>
+                    <a:pt x="633100" y="121863"/>
+                  </a:lnTo>
+                  <a:lnTo>
+                    <a:pt x="703444" y="134057"/>
+                  </a:lnTo>
+                  <a:lnTo>
+                    <a:pt x="773789" y="146002"/>
+                  </a:lnTo>
+                  <a:lnTo>
+                    <a:pt x="844133" y="157702"/>
+                  </a:lnTo>
+                  <a:lnTo>
+                    <a:pt x="914478" y="169163"/>
+                  </a:lnTo>
+                  <a:lnTo>
+                    <a:pt x="984822" y="180390"/>
+                  </a:lnTo>
+                  <a:lnTo>
+                    <a:pt x="1055167" y="191387"/>
+                  </a:lnTo>
+                  <a:lnTo>
+                    <a:pt x="1125511" y="202160"/>
+                  </a:lnTo>
+                  <a:lnTo>
+                    <a:pt x="1195856" y="212712"/>
+                  </a:lnTo>
+                  <a:lnTo>
+                    <a:pt x="1266200" y="223048"/>
+                  </a:lnTo>
+                  <a:lnTo>
+                    <a:pt x="1336545" y="233173"/>
+                  </a:lnTo>
+                  <a:lnTo>
+                    <a:pt x="1406889" y="243091"/>
+                  </a:lnTo>
+                  <a:lnTo>
+                    <a:pt x="1477234" y="252806"/>
+                  </a:lnTo>
+                  <a:lnTo>
+                    <a:pt x="1547578" y="262323"/>
+                  </a:lnTo>
+                  <a:lnTo>
+                    <a:pt x="1617923" y="271645"/>
+                  </a:lnTo>
+                  <a:lnTo>
+                    <a:pt x="1688267" y="280776"/>
+                  </a:lnTo>
+                  <a:lnTo>
+                    <a:pt x="1758612" y="289720"/>
+                  </a:lnTo>
+                  <a:lnTo>
+                    <a:pt x="1828956" y="298482"/>
+                  </a:lnTo>
+                  <a:lnTo>
+                    <a:pt x="1899301" y="307064"/>
+                  </a:lnTo>
+                  <a:lnTo>
+                    <a:pt x="1969645" y="315471"/>
+                  </a:lnTo>
+                  <a:lnTo>
+                    <a:pt x="2039990" y="323706"/>
+                  </a:lnTo>
+                  <a:lnTo>
+                    <a:pt x="2110334" y="331773"/>
+                  </a:lnTo>
+                  <a:lnTo>
+                    <a:pt x="2180679" y="339675"/>
+                  </a:lnTo>
+                  <a:lnTo>
+                    <a:pt x="2251023" y="347415"/>
+                  </a:lnTo>
+                  <a:lnTo>
+                    <a:pt x="2321368" y="354997"/>
+                  </a:lnTo>
+                  <a:lnTo>
+                    <a:pt x="2391712" y="362424"/>
+                  </a:lnTo>
+                  <a:lnTo>
+                    <a:pt x="2462057" y="369699"/>
+                  </a:lnTo>
+                  <a:lnTo>
+                    <a:pt x="2532401" y="376825"/>
+                  </a:lnTo>
+                  <a:lnTo>
+                    <a:pt x="2602746" y="383805"/>
+                  </a:lnTo>
+                  <a:lnTo>
+                    <a:pt x="2673090" y="390643"/>
+                  </a:lnTo>
+                  <a:lnTo>
+                    <a:pt x="2743435" y="397341"/>
+                  </a:lnTo>
+                  <a:lnTo>
+                    <a:pt x="2813779" y="403902"/>
+                  </a:lnTo>
+                  <a:lnTo>
+                    <a:pt x="2884124" y="410329"/>
+                  </a:lnTo>
+                  <a:lnTo>
+                    <a:pt x="2954468" y="416624"/>
+                  </a:lnTo>
+                  <a:lnTo>
+                    <a:pt x="3024813" y="422791"/>
+                  </a:lnTo>
+                  <a:lnTo>
+                    <a:pt x="3095157" y="428831"/>
+                  </a:lnTo>
+                  <a:lnTo>
+                    <a:pt x="3165502" y="434748"/>
+                  </a:lnTo>
+                  <a:lnTo>
+                    <a:pt x="3235846" y="440544"/>
+                  </a:lnTo>
+                  <a:lnTo>
+                    <a:pt x="3306191" y="446222"/>
+                  </a:lnTo>
+                  <a:lnTo>
+                    <a:pt x="3376535" y="451783"/>
+                  </a:lnTo>
+                  <a:lnTo>
+                    <a:pt x="3446880" y="457231"/>
+                  </a:lnTo>
+                  <a:lnTo>
+                    <a:pt x="3517224" y="462567"/>
+                  </a:lnTo>
+                  <a:lnTo>
+                    <a:pt x="3587569" y="467794"/>
+                  </a:lnTo>
+                  <a:lnTo>
+                    <a:pt x="3657913" y="472914"/>
+                  </a:lnTo>
+                  <a:lnTo>
+                    <a:pt x="3728257" y="477930"/>
+                  </a:lnTo>
+                  <a:lnTo>
+                    <a:pt x="3798602" y="482843"/>
+                  </a:lnTo>
+                  <a:lnTo>
+                    <a:pt x="3868946" y="487656"/>
+                  </a:lnTo>
+                  <a:lnTo>
+                    <a:pt x="3939291" y="492370"/>
+                  </a:lnTo>
+                  <a:lnTo>
+                    <a:pt x="4009635" y="496988"/>
+                  </a:lnTo>
+                  <a:lnTo>
+                    <a:pt x="4079980" y="501511"/>
+                  </a:lnTo>
+                  <a:lnTo>
+                    <a:pt x="4150324" y="505942"/>
+                  </a:lnTo>
+                  <a:lnTo>
+                    <a:pt x="4220669" y="510282"/>
+                  </a:lnTo>
+                  <a:lnTo>
+                    <a:pt x="4291013" y="514533"/>
+                  </a:lnTo>
+                  <a:lnTo>
+                    <a:pt x="4361358" y="518698"/>
+                  </a:lnTo>
+                  <a:lnTo>
+                    <a:pt x="4431702" y="522777"/>
+                  </a:lnTo>
+                  <a:lnTo>
+                    <a:pt x="4502047" y="526773"/>
+                  </a:lnTo>
+                  <a:lnTo>
+                    <a:pt x="4572391" y="530687"/>
+                  </a:lnTo>
+                  <a:lnTo>
+                    <a:pt x="4642736" y="534522"/>
+                  </a:lnTo>
+                  <a:lnTo>
+                    <a:pt x="4713080" y="538277"/>
+                  </a:lnTo>
+                  <a:lnTo>
+                    <a:pt x="4783425" y="541956"/>
+                  </a:lnTo>
+                  <a:lnTo>
+                    <a:pt x="4853769" y="545560"/>
+                  </a:lnTo>
+                  <a:lnTo>
+                    <a:pt x="4924114" y="549090"/>
+                  </a:lnTo>
+                  <a:lnTo>
+                    <a:pt x="4994458" y="552548"/>
+                  </a:lnTo>
+                  <a:lnTo>
+                    <a:pt x="5064803" y="555935"/>
+                  </a:lnTo>
+                  <a:lnTo>
+                    <a:pt x="5135147" y="559253"/>
+                  </a:lnTo>
+                  <a:lnTo>
+                    <a:pt x="5205492" y="562503"/>
+                  </a:lnTo>
+                  <a:lnTo>
+                    <a:pt x="5275836" y="565687"/>
+                  </a:lnTo>
+                  <a:lnTo>
+                    <a:pt x="5346181" y="568805"/>
+                  </a:lnTo>
+                  <a:lnTo>
+                    <a:pt x="5416525" y="571860"/>
+                  </a:lnTo>
+                  <a:lnTo>
+                    <a:pt x="5486870" y="574852"/>
+                  </a:lnTo>
+                  <a:lnTo>
+                    <a:pt x="5557214" y="577784"/>
+                  </a:lnTo>
+                  <a:lnTo>
+                    <a:pt x="5627559" y="580655"/>
+                  </a:lnTo>
+                  <a:lnTo>
+                    <a:pt x="5697903" y="583467"/>
+                  </a:lnTo>
+                  <a:lnTo>
+                    <a:pt x="5768248" y="586222"/>
+                  </a:lnTo>
+                  <a:lnTo>
+                    <a:pt x="5838592" y="588921"/>
+                  </a:lnTo>
+                  <a:lnTo>
+                    <a:pt x="5908937" y="591564"/>
+                  </a:lnTo>
+                  <a:lnTo>
+                    <a:pt x="5979281" y="594153"/>
+                  </a:lnTo>
+                  <a:lnTo>
+                    <a:pt x="6049626" y="596690"/>
+                  </a:lnTo>
+                  <a:lnTo>
+                    <a:pt x="6119970" y="599174"/>
+                  </a:lnTo>
+                  <a:lnTo>
+                    <a:pt x="6190315" y="601608"/>
+                  </a:lnTo>
+                  <a:lnTo>
+                    <a:pt x="6260659" y="603992"/>
+                  </a:lnTo>
+                  <a:lnTo>
+                    <a:pt x="6331004" y="606327"/>
+                  </a:lnTo>
+                  <a:lnTo>
+                    <a:pt x="6401348" y="608615"/>
+                  </a:lnTo>
+                  <a:lnTo>
+                    <a:pt x="6471693" y="610856"/>
+                  </a:lnTo>
+                  <a:lnTo>
+                    <a:pt x="6542037" y="613050"/>
+                  </a:lnTo>
+                  <a:lnTo>
+                    <a:pt x="6612382" y="615200"/>
+                  </a:lnTo>
+                  <a:lnTo>
+                    <a:pt x="6682726" y="617306"/>
+                  </a:lnTo>
+                  <a:lnTo>
+                    <a:pt x="6753071" y="619369"/>
+                  </a:lnTo>
+                  <a:lnTo>
+                    <a:pt x="6823415" y="621390"/>
+                  </a:lnTo>
+                  <a:lnTo>
+                    <a:pt x="6893760" y="623370"/>
+                  </a:lnTo>
+                  <a:lnTo>
+                    <a:pt x="6964104" y="625309"/>
                   </a:lnTo>
                 </a:path>
               </a:pathLst>
@@ -4630,27 +4665,27 @@
         </p:sp>
         <p:sp>
           <p:nvSpPr>
-            <p:cNvPr id="26" name="pl26"/>
+            <p:cNvPr id="27" name="pl27"/>
             <p:cNvSpPr/>
             <p:nvPr/>
           </p:nvSpPr>
           <p:spPr>
             <a:xfrm>
-              <a:off x="817517" y="4727786"/>
-              <a:ext cx="7799693" cy="0"/>
+              <a:off x="887106" y="3100960"/>
+              <a:ext cx="7660515" cy="0"/>
             </a:xfrm>
             <a:custGeom>
               <a:avLst/>
               <a:pathLst>
-                <a:path w="7799693" h="0">
+                <a:path w="7660515" h="0">
                   <a:moveTo>
                     <a:pt x="0" y="0"/>
                   </a:moveTo>
                   <a:lnTo>
-                    <a:pt x="7799693" y="0"/>
-                  </a:lnTo>
-                  <a:lnTo>
-                    <a:pt x="7799693" y="0"/>
+                    <a:pt x="7660515" y="0"/>
+                  </a:lnTo>
+                  <a:lnTo>
+                    <a:pt x="7660515" y="0"/>
                   </a:lnTo>
                 </a:path>
               </a:pathLst>
@@ -4673,21 +4708,21 @@
         </p:sp>
         <p:sp>
           <p:nvSpPr>
-            <p:cNvPr id="27" name="pl27"/>
+            <p:cNvPr id="28" name="pl28"/>
             <p:cNvSpPr/>
             <p:nvPr/>
           </p:nvSpPr>
           <p:spPr>
             <a:xfrm>
-              <a:off x="4205975" y="2073503"/>
-              <a:ext cx="0" cy="3649639"/>
+              <a:off x="4215100" y="2143092"/>
+              <a:ext cx="0" cy="1317069"/>
             </a:xfrm>
             <a:custGeom>
               <a:avLst/>
               <a:pathLst>
-                <a:path w="0" h="3649639">
+                <a:path w="0" h="1317069">
                   <a:moveTo>
-                    <a:pt x="0" y="3649639"/>
+                    <a:pt x="0" y="1317069"/>
                   </a:moveTo>
                   <a:lnTo>
                     <a:pt x="0" y="0"/>
@@ -4716,21 +4751,21 @@
         </p:sp>
         <p:sp>
           <p:nvSpPr>
-            <p:cNvPr id="28" name="pl28"/>
+            <p:cNvPr id="29" name="pl29"/>
             <p:cNvSpPr/>
             <p:nvPr/>
           </p:nvSpPr>
           <p:spPr>
             <a:xfrm>
-              <a:off x="3016442" y="2073503"/>
-              <a:ext cx="0" cy="3649639"/>
+              <a:off x="3046793" y="2143092"/>
+              <a:ext cx="0" cy="1317069"/>
             </a:xfrm>
             <a:custGeom>
               <a:avLst/>
               <a:pathLst>
-                <a:path w="0" h="3649639">
+                <a:path w="0" h="1317069">
                   <a:moveTo>
-                    <a:pt x="0" y="3649639"/>
+                    <a:pt x="0" y="1317069"/>
                   </a:moveTo>
                   <a:lnTo>
                     <a:pt x="0" y="0"/>
@@ -4759,21 +4794,21 @@
         </p:sp>
         <p:sp>
           <p:nvSpPr>
-            <p:cNvPr id="29" name="pl29"/>
+            <p:cNvPr id="30" name="pl30"/>
             <p:cNvSpPr/>
             <p:nvPr/>
           </p:nvSpPr>
           <p:spPr>
             <a:xfrm>
-              <a:off x="5421760" y="2073503"/>
-              <a:ext cx="0" cy="3649639"/>
+              <a:off x="5409191" y="2143092"/>
+              <a:ext cx="0" cy="1317069"/>
             </a:xfrm>
             <a:custGeom>
               <a:avLst/>
               <a:pathLst>
-                <a:path w="0" h="3649639">
+                <a:path w="0" h="1317069">
                   <a:moveTo>
-                    <a:pt x="0" y="3649639"/>
+                    <a:pt x="0" y="1317069"/>
                   </a:moveTo>
                   <a:lnTo>
                     <a:pt x="0" y="0"/>
@@ -4802,13 +4837,13 @@
         </p:sp>
         <p:sp>
           <p:nvSpPr>
-            <p:cNvPr id="30" name="tx30"/>
+            <p:cNvPr id="31" name="tx31"/>
             <p:cNvSpPr/>
             <p:nvPr/>
           </p:nvSpPr>
           <p:spPr>
             <a:xfrm>
-              <a:off x="692708" y="5517199"/>
+              <a:off x="762297" y="3360243"/>
               <a:ext cx="62179" cy="80101"/>
             </a:xfrm>
             <a:prstGeom prst="rect">
@@ -4848,13 +4883,13 @@
         </p:sp>
         <p:sp>
           <p:nvSpPr>
-            <p:cNvPr id="31" name="tx31"/>
+            <p:cNvPr id="32" name="tx32"/>
             <p:cNvSpPr/>
             <p:nvPr/>
           </p:nvSpPr>
           <p:spPr>
             <a:xfrm>
-              <a:off x="692708" y="4687735"/>
+              <a:off x="762297" y="3060909"/>
               <a:ext cx="62179" cy="80101"/>
             </a:xfrm>
             <a:prstGeom prst="rect">
@@ -4894,13 +4929,13 @@
         </p:sp>
         <p:sp>
           <p:nvSpPr>
-            <p:cNvPr id="32" name="tx32"/>
+            <p:cNvPr id="33" name="tx33"/>
             <p:cNvSpPr/>
             <p:nvPr/>
           </p:nvSpPr>
           <p:spPr>
             <a:xfrm>
-              <a:off x="692708" y="3858272"/>
+              <a:off x="762297" y="2761575"/>
               <a:ext cx="62179" cy="80101"/>
             </a:xfrm>
             <a:prstGeom prst="rect">
@@ -4940,13 +4975,13 @@
         </p:sp>
         <p:sp>
           <p:nvSpPr>
-            <p:cNvPr id="33" name="tx33"/>
+            <p:cNvPr id="34" name="tx34"/>
             <p:cNvSpPr/>
             <p:nvPr/>
           </p:nvSpPr>
           <p:spPr>
             <a:xfrm>
-              <a:off x="692708" y="3028808"/>
+              <a:off x="762297" y="2462242"/>
               <a:ext cx="62179" cy="80101"/>
             </a:xfrm>
             <a:prstGeom prst="rect">
@@ -4986,13 +5021,13 @@
         </p:sp>
         <p:sp>
           <p:nvSpPr>
-            <p:cNvPr id="34" name="tx34"/>
+            <p:cNvPr id="35" name="tx35"/>
             <p:cNvSpPr/>
             <p:nvPr/>
           </p:nvSpPr>
           <p:spPr>
             <a:xfrm>
-              <a:off x="692708" y="2199345"/>
+              <a:off x="762297" y="2162908"/>
               <a:ext cx="62179" cy="80101"/>
             </a:xfrm>
             <a:prstGeom prst="rect">
@@ -5032,13 +5067,13 @@
         </p:sp>
         <p:sp>
           <p:nvSpPr>
-            <p:cNvPr id="35" name="tx35"/>
+            <p:cNvPr id="36" name="tx36"/>
             <p:cNvSpPr/>
             <p:nvPr/>
           </p:nvSpPr>
           <p:spPr>
             <a:xfrm>
-              <a:off x="1977028" y="5785772"/>
+              <a:off x="2024485" y="3522791"/>
               <a:ext cx="161574" cy="80101"/>
             </a:xfrm>
             <a:prstGeom prst="rect">
@@ -5078,13 +5113,13 @@
         </p:sp>
         <p:sp>
           <p:nvSpPr>
-            <p:cNvPr id="36" name="tx36"/>
+            <p:cNvPr id="37" name="tx37"/>
             <p:cNvSpPr/>
             <p:nvPr/>
           </p:nvSpPr>
           <p:spPr>
             <a:xfrm>
-              <a:off x="3728813" y="5785772"/>
+              <a:off x="3745012" y="3522791"/>
               <a:ext cx="161574" cy="80101"/>
             </a:xfrm>
             <a:prstGeom prst="rect">
@@ -5124,13 +5159,13 @@
         </p:sp>
         <p:sp>
           <p:nvSpPr>
-            <p:cNvPr id="37" name="tx37"/>
+            <p:cNvPr id="38" name="tx38"/>
             <p:cNvSpPr/>
             <p:nvPr/>
           </p:nvSpPr>
           <p:spPr>
             <a:xfrm>
-              <a:off x="5530296" y="5785772"/>
+              <a:off x="5515235" y="3522791"/>
               <a:ext cx="62179" cy="80101"/>
             </a:xfrm>
             <a:prstGeom prst="rect">
@@ -5170,13 +5205,13 @@
         </p:sp>
         <p:sp>
           <p:nvSpPr>
-            <p:cNvPr id="38" name="tx38"/>
+            <p:cNvPr id="39" name="tx39"/>
             <p:cNvSpPr/>
             <p:nvPr/>
           </p:nvSpPr>
           <p:spPr>
             <a:xfrm>
-              <a:off x="7250992" y="5785772"/>
+              <a:off x="7204672" y="3522791"/>
               <a:ext cx="124358" cy="80101"/>
             </a:xfrm>
             <a:prstGeom prst="rect">
@@ -5216,13 +5251,13 @@
         </p:sp>
         <p:sp>
           <p:nvSpPr>
-            <p:cNvPr id="39" name="tx39"/>
+            <p:cNvPr id="40" name="tx40"/>
             <p:cNvSpPr/>
             <p:nvPr/>
           </p:nvSpPr>
           <p:spPr>
             <a:xfrm>
-              <a:off x="1561815" y="5925448"/>
+              <a:off x="1561815" y="3662467"/>
               <a:ext cx="6311097" cy="100218"/>
             </a:xfrm>
             <a:prstGeom prst="rect">
@@ -5262,13 +5297,13 @@
         </p:sp>
         <p:sp>
           <p:nvSpPr>
-            <p:cNvPr id="40" name="tx40"/>
+            <p:cNvPr id="41" name="tx41"/>
             <p:cNvSpPr/>
             <p:nvPr/>
           </p:nvSpPr>
           <p:spPr>
             <a:xfrm rot="-5400000">
-              <a:off x="68446" y="3848213"/>
+              <a:off x="138035" y="2751517"/>
               <a:ext cx="1016904" cy="100218"/>
             </a:xfrm>
             <a:prstGeom prst="rect">
@@ -5308,13 +5343,13 @@
         </p:sp>
         <p:sp>
           <p:nvSpPr>
-            <p:cNvPr id="41" name="tx41"/>
+            <p:cNvPr id="42" name="tx42"/>
             <p:cNvSpPr/>
             <p:nvPr/>
           </p:nvSpPr>
           <p:spPr>
             <a:xfrm>
-              <a:off x="817517" y="1896563"/>
+              <a:off x="887106" y="1966152"/>
               <a:ext cx="6959864" cy="82021"/>
             </a:xfrm>
             <a:prstGeom prst="rect">
@@ -5354,13 +5389,3722 @@
         </p:sp>
         <p:sp>
           <p:nvSpPr>
-            <p:cNvPr id="42" name="tx42"/>
+            <p:cNvPr id="43" name="tx43"/>
             <p:cNvSpPr/>
             <p:nvPr/>
           </p:nvSpPr>
           <p:spPr>
             <a:xfrm>
-              <a:off x="817517" y="1669789"/>
+              <a:off x="887106" y="1739378"/>
+              <a:ext cx="2951591" cy="120152"/>
+            </a:xfrm>
+            <a:prstGeom prst="rect">
+              <a:avLst/>
+            </a:prstGeom>
+            <a:noFill/>
+          </p:spPr>
+          <p:txBody>
+            <a:bodyPr lIns="0" rIns="0" tIns="0" bIns="0" anchorCtr="1" anchor="ctr" wrap="none"/>
+            <a:lstStyle/>
+            <a:p>
+              <a:pPr algn="l" marL="0" marR="0" indent="0">
+                <a:lnSpc>
+                  <a:spcPts val="1320"/>
+                </a:lnSpc>
+                <a:spcBef>
+                  <a:spcPts val="0"/>
+                </a:spcBef>
+                <a:spcAft>
+                  <a:spcPts val="0"/>
+                </a:spcAft>
+              </a:pPr>
+              <a:r>
+                <a:rPr sz="1320">
+                  <a:solidFill>
+                    <a:srgbClr val="000000">
+                      <a:alpha val="100000"/>
+                    </a:srgbClr>
+                  </a:solidFill>
+                  <a:latin typeface="Helvetica"/>
+                  <a:cs typeface="Helvetica"/>
+                </a:rPr>
+                <a:t>Thrombocytopenia Grade 3 (Sensitivity)</a:t>
+              </a:r>
+            </a:p>
+          </p:txBody>
+        </p:sp>
+        <p:sp>
+          <p:nvSpPr>
+            <p:cNvPr id="44" name="pl44"/>
+            <p:cNvSpPr/>
+            <p:nvPr/>
+          </p:nvSpPr>
+          <p:spPr>
+            <a:xfrm>
+              <a:off x="887106" y="5444019"/>
+              <a:ext cx="7660515" cy="0"/>
+            </a:xfrm>
+            <a:custGeom>
+              <a:avLst/>
+              <a:pathLst>
+                <a:path w="7660515" h="0">
+                  <a:moveTo>
+                    <a:pt x="0" y="0"/>
+                  </a:moveTo>
+                  <a:lnTo>
+                    <a:pt x="7660515" y="0"/>
+                  </a:lnTo>
+                  <a:lnTo>
+                    <a:pt x="7660515" y="0"/>
+                  </a:lnTo>
+                </a:path>
+              </a:pathLst>
+            </a:custGeom>
+            <a:ln w="6775" cap="flat">
+              <a:solidFill>
+                <a:srgbClr val="EBEBEB">
+                  <a:alpha val="100000"/>
+                </a:srgbClr>
+              </a:solidFill>
+              <a:prstDash val="solid"/>
+              <a:round/>
+            </a:ln>
+          </p:spPr>
+          <p:txBody>
+            <a:bodyPr/>
+            <a:lstStyle/>
+            <a:p/>
+          </p:txBody>
+        </p:sp>
+        <p:sp>
+          <p:nvSpPr>
+            <p:cNvPr id="45" name="pl45"/>
+            <p:cNvSpPr/>
+            <p:nvPr/>
+          </p:nvSpPr>
+          <p:spPr>
+            <a:xfrm>
+              <a:off x="887106" y="5144686"/>
+              <a:ext cx="7660515" cy="0"/>
+            </a:xfrm>
+            <a:custGeom>
+              <a:avLst/>
+              <a:pathLst>
+                <a:path w="7660515" h="0">
+                  <a:moveTo>
+                    <a:pt x="0" y="0"/>
+                  </a:moveTo>
+                  <a:lnTo>
+                    <a:pt x="7660515" y="0"/>
+                  </a:lnTo>
+                  <a:lnTo>
+                    <a:pt x="7660515" y="0"/>
+                  </a:lnTo>
+                </a:path>
+              </a:pathLst>
+            </a:custGeom>
+            <a:ln w="6775" cap="flat">
+              <a:solidFill>
+                <a:srgbClr val="EBEBEB">
+                  <a:alpha val="100000"/>
+                </a:srgbClr>
+              </a:solidFill>
+              <a:prstDash val="solid"/>
+              <a:round/>
+            </a:ln>
+          </p:spPr>
+          <p:txBody>
+            <a:bodyPr/>
+            <a:lstStyle/>
+            <a:p/>
+          </p:txBody>
+        </p:sp>
+        <p:sp>
+          <p:nvSpPr>
+            <p:cNvPr id="46" name="pl46"/>
+            <p:cNvSpPr/>
+            <p:nvPr/>
+          </p:nvSpPr>
+          <p:spPr>
+            <a:xfrm>
+              <a:off x="887106" y="4845352"/>
+              <a:ext cx="7660515" cy="0"/>
+            </a:xfrm>
+            <a:custGeom>
+              <a:avLst/>
+              <a:pathLst>
+                <a:path w="7660515" h="0">
+                  <a:moveTo>
+                    <a:pt x="0" y="0"/>
+                  </a:moveTo>
+                  <a:lnTo>
+                    <a:pt x="7660515" y="0"/>
+                  </a:lnTo>
+                  <a:lnTo>
+                    <a:pt x="7660515" y="0"/>
+                  </a:lnTo>
+                </a:path>
+              </a:pathLst>
+            </a:custGeom>
+            <a:ln w="6775" cap="flat">
+              <a:solidFill>
+                <a:srgbClr val="EBEBEB">
+                  <a:alpha val="100000"/>
+                </a:srgbClr>
+              </a:solidFill>
+              <a:prstDash val="solid"/>
+              <a:round/>
+            </a:ln>
+          </p:spPr>
+          <p:txBody>
+            <a:bodyPr/>
+            <a:lstStyle/>
+            <a:p/>
+          </p:txBody>
+        </p:sp>
+        <p:sp>
+          <p:nvSpPr>
+            <p:cNvPr id="47" name="pl47"/>
+            <p:cNvSpPr/>
+            <p:nvPr/>
+          </p:nvSpPr>
+          <p:spPr>
+            <a:xfrm>
+              <a:off x="887106" y="4546018"/>
+              <a:ext cx="7660515" cy="0"/>
+            </a:xfrm>
+            <a:custGeom>
+              <a:avLst/>
+              <a:pathLst>
+                <a:path w="7660515" h="0">
+                  <a:moveTo>
+                    <a:pt x="0" y="0"/>
+                  </a:moveTo>
+                  <a:lnTo>
+                    <a:pt x="7660515" y="0"/>
+                  </a:lnTo>
+                  <a:lnTo>
+                    <a:pt x="7660515" y="0"/>
+                  </a:lnTo>
+                </a:path>
+              </a:pathLst>
+            </a:custGeom>
+            <a:ln w="6775" cap="flat">
+              <a:solidFill>
+                <a:srgbClr val="EBEBEB">
+                  <a:alpha val="100000"/>
+                </a:srgbClr>
+              </a:solidFill>
+              <a:prstDash val="solid"/>
+              <a:round/>
+            </a:ln>
+          </p:spPr>
+          <p:txBody>
+            <a:bodyPr/>
+            <a:lstStyle/>
+            <a:p/>
+          </p:txBody>
+        </p:sp>
+        <p:sp>
+          <p:nvSpPr>
+            <p:cNvPr id="48" name="pl48"/>
+            <p:cNvSpPr/>
+            <p:nvPr/>
+          </p:nvSpPr>
+          <p:spPr>
+            <a:xfrm>
+              <a:off x="1675141" y="4336484"/>
+              <a:ext cx="0" cy="1317069"/>
+            </a:xfrm>
+            <a:custGeom>
+              <a:avLst/>
+              <a:pathLst>
+                <a:path w="0" h="1317069">
+                  <a:moveTo>
+                    <a:pt x="0" y="1317069"/>
+                  </a:moveTo>
+                  <a:lnTo>
+                    <a:pt x="0" y="0"/>
+                  </a:lnTo>
+                  <a:lnTo>
+                    <a:pt x="0" y="0"/>
+                  </a:lnTo>
+                </a:path>
+              </a:pathLst>
+            </a:custGeom>
+            <a:ln w="6775" cap="flat">
+              <a:solidFill>
+                <a:srgbClr val="EBEBEB">
+                  <a:alpha val="100000"/>
+                </a:srgbClr>
+              </a:solidFill>
+              <a:prstDash val="solid"/>
+              <a:round/>
+            </a:ln>
+          </p:spPr>
+          <p:txBody>
+            <a:bodyPr/>
+            <a:lstStyle/>
+            <a:p/>
+          </p:txBody>
+        </p:sp>
+        <p:sp>
+          <p:nvSpPr>
+            <p:cNvPr id="49" name="pl49"/>
+            <p:cNvSpPr/>
+            <p:nvPr/>
+          </p:nvSpPr>
+          <p:spPr>
+            <a:xfrm>
+              <a:off x="2535404" y="4336484"/>
+              <a:ext cx="0" cy="1317069"/>
+            </a:xfrm>
+            <a:custGeom>
+              <a:avLst/>
+              <a:pathLst>
+                <a:path w="0" h="1317069">
+                  <a:moveTo>
+                    <a:pt x="0" y="1317069"/>
+                  </a:moveTo>
+                  <a:lnTo>
+                    <a:pt x="0" y="0"/>
+                  </a:lnTo>
+                  <a:lnTo>
+                    <a:pt x="0" y="0"/>
+                  </a:lnTo>
+                </a:path>
+              </a:pathLst>
+            </a:custGeom>
+            <a:ln w="6775" cap="flat">
+              <a:solidFill>
+                <a:srgbClr val="EBEBEB">
+                  <a:alpha val="100000"/>
+                </a:srgbClr>
+              </a:solidFill>
+              <a:prstDash val="solid"/>
+              <a:round/>
+            </a:ln>
+          </p:spPr>
+          <p:txBody>
+            <a:bodyPr/>
+            <a:lstStyle/>
+            <a:p/>
+          </p:txBody>
+        </p:sp>
+        <p:sp>
+          <p:nvSpPr>
+            <p:cNvPr id="50" name="pl50"/>
+            <p:cNvSpPr/>
+            <p:nvPr/>
+          </p:nvSpPr>
+          <p:spPr>
+            <a:xfrm>
+              <a:off x="3395667" y="4336484"/>
+              <a:ext cx="0" cy="1317069"/>
+            </a:xfrm>
+            <a:custGeom>
+              <a:avLst/>
+              <a:pathLst>
+                <a:path w="0" h="1317069">
+                  <a:moveTo>
+                    <a:pt x="0" y="1317069"/>
+                  </a:moveTo>
+                  <a:lnTo>
+                    <a:pt x="0" y="0"/>
+                  </a:lnTo>
+                  <a:lnTo>
+                    <a:pt x="0" y="0"/>
+                  </a:lnTo>
+                </a:path>
+              </a:pathLst>
+            </a:custGeom>
+            <a:ln w="6775" cap="flat">
+              <a:solidFill>
+                <a:srgbClr val="EBEBEB">
+                  <a:alpha val="100000"/>
+                </a:srgbClr>
+              </a:solidFill>
+              <a:prstDash val="solid"/>
+              <a:round/>
+            </a:ln>
+          </p:spPr>
+          <p:txBody>
+            <a:bodyPr/>
+            <a:lstStyle/>
+            <a:p/>
+          </p:txBody>
+        </p:sp>
+        <p:sp>
+          <p:nvSpPr>
+            <p:cNvPr id="51" name="pl51"/>
+            <p:cNvSpPr/>
+            <p:nvPr/>
+          </p:nvSpPr>
+          <p:spPr>
+            <a:xfrm>
+              <a:off x="4255930" y="4336484"/>
+              <a:ext cx="0" cy="1317069"/>
+            </a:xfrm>
+            <a:custGeom>
+              <a:avLst/>
+              <a:pathLst>
+                <a:path w="0" h="1317069">
+                  <a:moveTo>
+                    <a:pt x="0" y="1317069"/>
+                  </a:moveTo>
+                  <a:lnTo>
+                    <a:pt x="0" y="0"/>
+                  </a:lnTo>
+                  <a:lnTo>
+                    <a:pt x="0" y="0"/>
+                  </a:lnTo>
+                </a:path>
+              </a:pathLst>
+            </a:custGeom>
+            <a:ln w="6775" cap="flat">
+              <a:solidFill>
+                <a:srgbClr val="EBEBEB">
+                  <a:alpha val="100000"/>
+                </a:srgbClr>
+              </a:solidFill>
+              <a:prstDash val="solid"/>
+              <a:round/>
+            </a:ln>
+          </p:spPr>
+          <p:txBody>
+            <a:bodyPr/>
+            <a:lstStyle/>
+            <a:p/>
+          </p:txBody>
+        </p:sp>
+        <p:sp>
+          <p:nvSpPr>
+            <p:cNvPr id="52" name="pl52"/>
+            <p:cNvSpPr/>
+            <p:nvPr/>
+          </p:nvSpPr>
+          <p:spPr>
+            <a:xfrm>
+              <a:off x="5116193" y="4336484"/>
+              <a:ext cx="0" cy="1317069"/>
+            </a:xfrm>
+            <a:custGeom>
+              <a:avLst/>
+              <a:pathLst>
+                <a:path w="0" h="1317069">
+                  <a:moveTo>
+                    <a:pt x="0" y="1317069"/>
+                  </a:moveTo>
+                  <a:lnTo>
+                    <a:pt x="0" y="0"/>
+                  </a:lnTo>
+                  <a:lnTo>
+                    <a:pt x="0" y="0"/>
+                  </a:lnTo>
+                </a:path>
+              </a:pathLst>
+            </a:custGeom>
+            <a:ln w="6775" cap="flat">
+              <a:solidFill>
+                <a:srgbClr val="EBEBEB">
+                  <a:alpha val="100000"/>
+                </a:srgbClr>
+              </a:solidFill>
+              <a:prstDash val="solid"/>
+              <a:round/>
+            </a:ln>
+          </p:spPr>
+          <p:txBody>
+            <a:bodyPr/>
+            <a:lstStyle/>
+            <a:p/>
+          </p:txBody>
+        </p:sp>
+        <p:sp>
+          <p:nvSpPr>
+            <p:cNvPr id="53" name="pl53"/>
+            <p:cNvSpPr/>
+            <p:nvPr/>
+          </p:nvSpPr>
+          <p:spPr>
+            <a:xfrm>
+              <a:off x="5976457" y="4336484"/>
+              <a:ext cx="0" cy="1317069"/>
+            </a:xfrm>
+            <a:custGeom>
+              <a:avLst/>
+              <a:pathLst>
+                <a:path w="0" h="1317069">
+                  <a:moveTo>
+                    <a:pt x="0" y="1317069"/>
+                  </a:moveTo>
+                  <a:lnTo>
+                    <a:pt x="0" y="0"/>
+                  </a:lnTo>
+                  <a:lnTo>
+                    <a:pt x="0" y="0"/>
+                  </a:lnTo>
+                </a:path>
+              </a:pathLst>
+            </a:custGeom>
+            <a:ln w="6775" cap="flat">
+              <a:solidFill>
+                <a:srgbClr val="EBEBEB">
+                  <a:alpha val="100000"/>
+                </a:srgbClr>
+              </a:solidFill>
+              <a:prstDash val="solid"/>
+              <a:round/>
+            </a:ln>
+          </p:spPr>
+          <p:txBody>
+            <a:bodyPr/>
+            <a:lstStyle/>
+            <a:p/>
+          </p:txBody>
+        </p:sp>
+        <p:sp>
+          <p:nvSpPr>
+            <p:cNvPr id="54" name="pl54"/>
+            <p:cNvSpPr/>
+            <p:nvPr/>
+          </p:nvSpPr>
+          <p:spPr>
+            <a:xfrm>
+              <a:off x="6836720" y="4336484"/>
+              <a:ext cx="0" cy="1317069"/>
+            </a:xfrm>
+            <a:custGeom>
+              <a:avLst/>
+              <a:pathLst>
+                <a:path w="0" h="1317069">
+                  <a:moveTo>
+                    <a:pt x="0" y="1317069"/>
+                  </a:moveTo>
+                  <a:lnTo>
+                    <a:pt x="0" y="0"/>
+                  </a:lnTo>
+                  <a:lnTo>
+                    <a:pt x="0" y="0"/>
+                  </a:lnTo>
+                </a:path>
+              </a:pathLst>
+            </a:custGeom>
+            <a:ln w="6775" cap="flat">
+              <a:solidFill>
+                <a:srgbClr val="EBEBEB">
+                  <a:alpha val="100000"/>
+                </a:srgbClr>
+              </a:solidFill>
+              <a:prstDash val="solid"/>
+              <a:round/>
+            </a:ln>
+          </p:spPr>
+          <p:txBody>
+            <a:bodyPr/>
+            <a:lstStyle/>
+            <a:p/>
+          </p:txBody>
+        </p:sp>
+        <p:sp>
+          <p:nvSpPr>
+            <p:cNvPr id="55" name="pl55"/>
+            <p:cNvSpPr/>
+            <p:nvPr/>
+          </p:nvSpPr>
+          <p:spPr>
+            <a:xfrm>
+              <a:off x="7696983" y="4336484"/>
+              <a:ext cx="0" cy="1317069"/>
+            </a:xfrm>
+            <a:custGeom>
+              <a:avLst/>
+              <a:pathLst>
+                <a:path w="0" h="1317069">
+                  <a:moveTo>
+                    <a:pt x="0" y="1317069"/>
+                  </a:moveTo>
+                  <a:lnTo>
+                    <a:pt x="0" y="0"/>
+                  </a:lnTo>
+                  <a:lnTo>
+                    <a:pt x="0" y="0"/>
+                  </a:lnTo>
+                </a:path>
+              </a:pathLst>
+            </a:custGeom>
+            <a:ln w="6775" cap="flat">
+              <a:solidFill>
+                <a:srgbClr val="EBEBEB">
+                  <a:alpha val="100000"/>
+                </a:srgbClr>
+              </a:solidFill>
+              <a:prstDash val="solid"/>
+              <a:round/>
+            </a:ln>
+          </p:spPr>
+          <p:txBody>
+            <a:bodyPr/>
+            <a:lstStyle/>
+            <a:p/>
+          </p:txBody>
+        </p:sp>
+        <p:sp>
+          <p:nvSpPr>
+            <p:cNvPr id="56" name="pl56"/>
+            <p:cNvSpPr/>
+            <p:nvPr/>
+          </p:nvSpPr>
+          <p:spPr>
+            <a:xfrm>
+              <a:off x="887106" y="5593686"/>
+              <a:ext cx="7660515" cy="0"/>
+            </a:xfrm>
+            <a:custGeom>
+              <a:avLst/>
+              <a:pathLst>
+                <a:path w="7660515" h="0">
+                  <a:moveTo>
+                    <a:pt x="0" y="0"/>
+                  </a:moveTo>
+                  <a:lnTo>
+                    <a:pt x="7660515" y="0"/>
+                  </a:lnTo>
+                  <a:lnTo>
+                    <a:pt x="7660515" y="0"/>
+                  </a:lnTo>
+                </a:path>
+              </a:pathLst>
+            </a:custGeom>
+            <a:ln w="13550" cap="flat">
+              <a:solidFill>
+                <a:srgbClr val="EBEBEB">
+                  <a:alpha val="100000"/>
+                </a:srgbClr>
+              </a:solidFill>
+              <a:prstDash val="solid"/>
+              <a:round/>
+            </a:ln>
+          </p:spPr>
+          <p:txBody>
+            <a:bodyPr/>
+            <a:lstStyle/>
+            <a:p/>
+          </p:txBody>
+        </p:sp>
+        <p:sp>
+          <p:nvSpPr>
+            <p:cNvPr id="57" name="pl57"/>
+            <p:cNvSpPr/>
+            <p:nvPr/>
+          </p:nvSpPr>
+          <p:spPr>
+            <a:xfrm>
+              <a:off x="887106" y="5294352"/>
+              <a:ext cx="7660515" cy="0"/>
+            </a:xfrm>
+            <a:custGeom>
+              <a:avLst/>
+              <a:pathLst>
+                <a:path w="7660515" h="0">
+                  <a:moveTo>
+                    <a:pt x="0" y="0"/>
+                  </a:moveTo>
+                  <a:lnTo>
+                    <a:pt x="7660515" y="0"/>
+                  </a:lnTo>
+                  <a:lnTo>
+                    <a:pt x="7660515" y="0"/>
+                  </a:lnTo>
+                </a:path>
+              </a:pathLst>
+            </a:custGeom>
+            <a:ln w="13550" cap="flat">
+              <a:solidFill>
+                <a:srgbClr val="EBEBEB">
+                  <a:alpha val="100000"/>
+                </a:srgbClr>
+              </a:solidFill>
+              <a:prstDash val="solid"/>
+              <a:round/>
+            </a:ln>
+          </p:spPr>
+          <p:txBody>
+            <a:bodyPr/>
+            <a:lstStyle/>
+            <a:p/>
+          </p:txBody>
+        </p:sp>
+        <p:sp>
+          <p:nvSpPr>
+            <p:cNvPr id="58" name="pl58"/>
+            <p:cNvSpPr/>
+            <p:nvPr/>
+          </p:nvSpPr>
+          <p:spPr>
+            <a:xfrm>
+              <a:off x="887106" y="4995019"/>
+              <a:ext cx="7660515" cy="0"/>
+            </a:xfrm>
+            <a:custGeom>
+              <a:avLst/>
+              <a:pathLst>
+                <a:path w="7660515" h="0">
+                  <a:moveTo>
+                    <a:pt x="0" y="0"/>
+                  </a:moveTo>
+                  <a:lnTo>
+                    <a:pt x="7660515" y="0"/>
+                  </a:lnTo>
+                  <a:lnTo>
+                    <a:pt x="7660515" y="0"/>
+                  </a:lnTo>
+                </a:path>
+              </a:pathLst>
+            </a:custGeom>
+            <a:ln w="13550" cap="flat">
+              <a:solidFill>
+                <a:srgbClr val="EBEBEB">
+                  <a:alpha val="100000"/>
+                </a:srgbClr>
+              </a:solidFill>
+              <a:prstDash val="solid"/>
+              <a:round/>
+            </a:ln>
+          </p:spPr>
+          <p:txBody>
+            <a:bodyPr/>
+            <a:lstStyle/>
+            <a:p/>
+          </p:txBody>
+        </p:sp>
+        <p:sp>
+          <p:nvSpPr>
+            <p:cNvPr id="59" name="pl59"/>
+            <p:cNvSpPr/>
+            <p:nvPr/>
+          </p:nvSpPr>
+          <p:spPr>
+            <a:xfrm>
+              <a:off x="887106" y="4695685"/>
+              <a:ext cx="7660515" cy="0"/>
+            </a:xfrm>
+            <a:custGeom>
+              <a:avLst/>
+              <a:pathLst>
+                <a:path w="7660515" h="0">
+                  <a:moveTo>
+                    <a:pt x="0" y="0"/>
+                  </a:moveTo>
+                  <a:lnTo>
+                    <a:pt x="7660515" y="0"/>
+                  </a:lnTo>
+                  <a:lnTo>
+                    <a:pt x="7660515" y="0"/>
+                  </a:lnTo>
+                </a:path>
+              </a:pathLst>
+            </a:custGeom>
+            <a:ln w="13550" cap="flat">
+              <a:solidFill>
+                <a:srgbClr val="EBEBEB">
+                  <a:alpha val="100000"/>
+                </a:srgbClr>
+              </a:solidFill>
+              <a:prstDash val="solid"/>
+              <a:round/>
+            </a:ln>
+          </p:spPr>
+          <p:txBody>
+            <a:bodyPr/>
+            <a:lstStyle/>
+            <a:p/>
+          </p:txBody>
+        </p:sp>
+        <p:sp>
+          <p:nvSpPr>
+            <p:cNvPr id="60" name="pl60"/>
+            <p:cNvSpPr/>
+            <p:nvPr/>
+          </p:nvSpPr>
+          <p:spPr>
+            <a:xfrm>
+              <a:off x="887106" y="4396351"/>
+              <a:ext cx="7660515" cy="0"/>
+            </a:xfrm>
+            <a:custGeom>
+              <a:avLst/>
+              <a:pathLst>
+                <a:path w="7660515" h="0">
+                  <a:moveTo>
+                    <a:pt x="0" y="0"/>
+                  </a:moveTo>
+                  <a:lnTo>
+                    <a:pt x="7660515" y="0"/>
+                  </a:lnTo>
+                  <a:lnTo>
+                    <a:pt x="7660515" y="0"/>
+                  </a:lnTo>
+                </a:path>
+              </a:pathLst>
+            </a:custGeom>
+            <a:ln w="13550" cap="flat">
+              <a:solidFill>
+                <a:srgbClr val="EBEBEB">
+                  <a:alpha val="100000"/>
+                </a:srgbClr>
+              </a:solidFill>
+              <a:prstDash val="solid"/>
+              <a:round/>
+            </a:ln>
+          </p:spPr>
+          <p:txBody>
+            <a:bodyPr/>
+            <a:lstStyle/>
+            <a:p/>
+          </p:txBody>
+        </p:sp>
+        <p:sp>
+          <p:nvSpPr>
+            <p:cNvPr id="61" name="pl61"/>
+            <p:cNvSpPr/>
+            <p:nvPr/>
+          </p:nvSpPr>
+          <p:spPr>
+            <a:xfrm>
+              <a:off x="1245010" y="4336484"/>
+              <a:ext cx="0" cy="1317069"/>
+            </a:xfrm>
+            <a:custGeom>
+              <a:avLst/>
+              <a:pathLst>
+                <a:path w="0" h="1317069">
+                  <a:moveTo>
+                    <a:pt x="0" y="1317069"/>
+                  </a:moveTo>
+                  <a:lnTo>
+                    <a:pt x="0" y="0"/>
+                  </a:lnTo>
+                  <a:lnTo>
+                    <a:pt x="0" y="0"/>
+                  </a:lnTo>
+                </a:path>
+              </a:pathLst>
+            </a:custGeom>
+            <a:ln w="13550" cap="flat">
+              <a:solidFill>
+                <a:srgbClr val="EBEBEB">
+                  <a:alpha val="100000"/>
+                </a:srgbClr>
+              </a:solidFill>
+              <a:prstDash val="solid"/>
+              <a:round/>
+            </a:ln>
+          </p:spPr>
+          <p:txBody>
+            <a:bodyPr/>
+            <a:lstStyle/>
+            <a:p/>
+          </p:txBody>
+        </p:sp>
+        <p:sp>
+          <p:nvSpPr>
+            <p:cNvPr id="62" name="pl62"/>
+            <p:cNvSpPr/>
+            <p:nvPr/>
+          </p:nvSpPr>
+          <p:spPr>
+            <a:xfrm>
+              <a:off x="2105273" y="4336484"/>
+              <a:ext cx="0" cy="1317069"/>
+            </a:xfrm>
+            <a:custGeom>
+              <a:avLst/>
+              <a:pathLst>
+                <a:path w="0" h="1317069">
+                  <a:moveTo>
+                    <a:pt x="0" y="1317069"/>
+                  </a:moveTo>
+                  <a:lnTo>
+                    <a:pt x="0" y="0"/>
+                  </a:lnTo>
+                  <a:lnTo>
+                    <a:pt x="0" y="0"/>
+                  </a:lnTo>
+                </a:path>
+              </a:pathLst>
+            </a:custGeom>
+            <a:ln w="13550" cap="flat">
+              <a:solidFill>
+                <a:srgbClr val="EBEBEB">
+                  <a:alpha val="100000"/>
+                </a:srgbClr>
+              </a:solidFill>
+              <a:prstDash val="solid"/>
+              <a:round/>
+            </a:ln>
+          </p:spPr>
+          <p:txBody>
+            <a:bodyPr/>
+            <a:lstStyle/>
+            <a:p/>
+          </p:txBody>
+        </p:sp>
+        <p:sp>
+          <p:nvSpPr>
+            <p:cNvPr id="63" name="pl63"/>
+            <p:cNvSpPr/>
+            <p:nvPr/>
+          </p:nvSpPr>
+          <p:spPr>
+            <a:xfrm>
+              <a:off x="2965536" y="4336484"/>
+              <a:ext cx="0" cy="1317069"/>
+            </a:xfrm>
+            <a:custGeom>
+              <a:avLst/>
+              <a:pathLst>
+                <a:path w="0" h="1317069">
+                  <a:moveTo>
+                    <a:pt x="0" y="1317069"/>
+                  </a:moveTo>
+                  <a:lnTo>
+                    <a:pt x="0" y="0"/>
+                  </a:lnTo>
+                  <a:lnTo>
+                    <a:pt x="0" y="0"/>
+                  </a:lnTo>
+                </a:path>
+              </a:pathLst>
+            </a:custGeom>
+            <a:ln w="13550" cap="flat">
+              <a:solidFill>
+                <a:srgbClr val="EBEBEB">
+                  <a:alpha val="100000"/>
+                </a:srgbClr>
+              </a:solidFill>
+              <a:prstDash val="solid"/>
+              <a:round/>
+            </a:ln>
+          </p:spPr>
+          <p:txBody>
+            <a:bodyPr/>
+            <a:lstStyle/>
+            <a:p/>
+          </p:txBody>
+        </p:sp>
+        <p:sp>
+          <p:nvSpPr>
+            <p:cNvPr id="64" name="pl64"/>
+            <p:cNvSpPr/>
+            <p:nvPr/>
+          </p:nvSpPr>
+          <p:spPr>
+            <a:xfrm>
+              <a:off x="3825799" y="4336484"/>
+              <a:ext cx="0" cy="1317069"/>
+            </a:xfrm>
+            <a:custGeom>
+              <a:avLst/>
+              <a:pathLst>
+                <a:path w="0" h="1317069">
+                  <a:moveTo>
+                    <a:pt x="0" y="1317069"/>
+                  </a:moveTo>
+                  <a:lnTo>
+                    <a:pt x="0" y="0"/>
+                  </a:lnTo>
+                  <a:lnTo>
+                    <a:pt x="0" y="0"/>
+                  </a:lnTo>
+                </a:path>
+              </a:pathLst>
+            </a:custGeom>
+            <a:ln w="13550" cap="flat">
+              <a:solidFill>
+                <a:srgbClr val="EBEBEB">
+                  <a:alpha val="100000"/>
+                </a:srgbClr>
+              </a:solidFill>
+              <a:prstDash val="solid"/>
+              <a:round/>
+            </a:ln>
+          </p:spPr>
+          <p:txBody>
+            <a:bodyPr/>
+            <a:lstStyle/>
+            <a:p/>
+          </p:txBody>
+        </p:sp>
+        <p:sp>
+          <p:nvSpPr>
+            <p:cNvPr id="65" name="pl65"/>
+            <p:cNvSpPr/>
+            <p:nvPr/>
+          </p:nvSpPr>
+          <p:spPr>
+            <a:xfrm>
+              <a:off x="4686062" y="4336484"/>
+              <a:ext cx="0" cy="1317069"/>
+            </a:xfrm>
+            <a:custGeom>
+              <a:avLst/>
+              <a:pathLst>
+                <a:path w="0" h="1317069">
+                  <a:moveTo>
+                    <a:pt x="0" y="1317069"/>
+                  </a:moveTo>
+                  <a:lnTo>
+                    <a:pt x="0" y="0"/>
+                  </a:lnTo>
+                  <a:lnTo>
+                    <a:pt x="0" y="0"/>
+                  </a:lnTo>
+                </a:path>
+              </a:pathLst>
+            </a:custGeom>
+            <a:ln w="13550" cap="flat">
+              <a:solidFill>
+                <a:srgbClr val="EBEBEB">
+                  <a:alpha val="100000"/>
+                </a:srgbClr>
+              </a:solidFill>
+              <a:prstDash val="solid"/>
+              <a:round/>
+            </a:ln>
+          </p:spPr>
+          <p:txBody>
+            <a:bodyPr/>
+            <a:lstStyle/>
+            <a:p/>
+          </p:txBody>
+        </p:sp>
+        <p:sp>
+          <p:nvSpPr>
+            <p:cNvPr id="66" name="pl66"/>
+            <p:cNvSpPr/>
+            <p:nvPr/>
+          </p:nvSpPr>
+          <p:spPr>
+            <a:xfrm>
+              <a:off x="5546325" y="4336484"/>
+              <a:ext cx="0" cy="1317069"/>
+            </a:xfrm>
+            <a:custGeom>
+              <a:avLst/>
+              <a:pathLst>
+                <a:path w="0" h="1317069">
+                  <a:moveTo>
+                    <a:pt x="0" y="1317069"/>
+                  </a:moveTo>
+                  <a:lnTo>
+                    <a:pt x="0" y="0"/>
+                  </a:lnTo>
+                  <a:lnTo>
+                    <a:pt x="0" y="0"/>
+                  </a:lnTo>
+                </a:path>
+              </a:pathLst>
+            </a:custGeom>
+            <a:ln w="13550" cap="flat">
+              <a:solidFill>
+                <a:srgbClr val="EBEBEB">
+                  <a:alpha val="100000"/>
+                </a:srgbClr>
+              </a:solidFill>
+              <a:prstDash val="solid"/>
+              <a:round/>
+            </a:ln>
+          </p:spPr>
+          <p:txBody>
+            <a:bodyPr/>
+            <a:lstStyle/>
+            <a:p/>
+          </p:txBody>
+        </p:sp>
+        <p:sp>
+          <p:nvSpPr>
+            <p:cNvPr id="67" name="pl67"/>
+            <p:cNvSpPr/>
+            <p:nvPr/>
+          </p:nvSpPr>
+          <p:spPr>
+            <a:xfrm>
+              <a:off x="6406588" y="4336484"/>
+              <a:ext cx="0" cy="1317069"/>
+            </a:xfrm>
+            <a:custGeom>
+              <a:avLst/>
+              <a:pathLst>
+                <a:path w="0" h="1317069">
+                  <a:moveTo>
+                    <a:pt x="0" y="1317069"/>
+                  </a:moveTo>
+                  <a:lnTo>
+                    <a:pt x="0" y="0"/>
+                  </a:lnTo>
+                  <a:lnTo>
+                    <a:pt x="0" y="0"/>
+                  </a:lnTo>
+                </a:path>
+              </a:pathLst>
+            </a:custGeom>
+            <a:ln w="13550" cap="flat">
+              <a:solidFill>
+                <a:srgbClr val="EBEBEB">
+                  <a:alpha val="100000"/>
+                </a:srgbClr>
+              </a:solidFill>
+              <a:prstDash val="solid"/>
+              <a:round/>
+            </a:ln>
+          </p:spPr>
+          <p:txBody>
+            <a:bodyPr/>
+            <a:lstStyle/>
+            <a:p/>
+          </p:txBody>
+        </p:sp>
+        <p:sp>
+          <p:nvSpPr>
+            <p:cNvPr id="68" name="pl68"/>
+            <p:cNvSpPr/>
+            <p:nvPr/>
+          </p:nvSpPr>
+          <p:spPr>
+            <a:xfrm>
+              <a:off x="7266851" y="4336484"/>
+              <a:ext cx="0" cy="1317069"/>
+            </a:xfrm>
+            <a:custGeom>
+              <a:avLst/>
+              <a:pathLst>
+                <a:path w="0" h="1317069">
+                  <a:moveTo>
+                    <a:pt x="0" y="1317069"/>
+                  </a:moveTo>
+                  <a:lnTo>
+                    <a:pt x="0" y="0"/>
+                  </a:lnTo>
+                  <a:lnTo>
+                    <a:pt x="0" y="0"/>
+                  </a:lnTo>
+                </a:path>
+              </a:pathLst>
+            </a:custGeom>
+            <a:ln w="13550" cap="flat">
+              <a:solidFill>
+                <a:srgbClr val="EBEBEB">
+                  <a:alpha val="100000"/>
+                </a:srgbClr>
+              </a:solidFill>
+              <a:prstDash val="solid"/>
+              <a:round/>
+            </a:ln>
+          </p:spPr>
+          <p:txBody>
+            <a:bodyPr/>
+            <a:lstStyle/>
+            <a:p/>
+          </p:txBody>
+        </p:sp>
+        <p:sp>
+          <p:nvSpPr>
+            <p:cNvPr id="69" name="pl69"/>
+            <p:cNvSpPr/>
+            <p:nvPr/>
+          </p:nvSpPr>
+          <p:spPr>
+            <a:xfrm>
+              <a:off x="8127114" y="4336484"/>
+              <a:ext cx="0" cy="1317069"/>
+            </a:xfrm>
+            <a:custGeom>
+              <a:avLst/>
+              <a:pathLst>
+                <a:path w="0" h="1317069">
+                  <a:moveTo>
+                    <a:pt x="0" y="1317069"/>
+                  </a:moveTo>
+                  <a:lnTo>
+                    <a:pt x="0" y="0"/>
+                  </a:lnTo>
+                  <a:lnTo>
+                    <a:pt x="0" y="0"/>
+                  </a:lnTo>
+                </a:path>
+              </a:pathLst>
+            </a:custGeom>
+            <a:ln w="13550" cap="flat">
+              <a:solidFill>
+                <a:srgbClr val="EBEBEB">
+                  <a:alpha val="100000"/>
+                </a:srgbClr>
+              </a:solidFill>
+              <a:prstDash val="solid"/>
+              <a:round/>
+            </a:ln>
+          </p:spPr>
+          <p:txBody>
+            <a:bodyPr/>
+            <a:lstStyle/>
+            <a:p/>
+          </p:txBody>
+        </p:sp>
+        <p:sp>
+          <p:nvSpPr>
+            <p:cNvPr id="70" name="pg70"/>
+            <p:cNvSpPr/>
+            <p:nvPr/>
+          </p:nvSpPr>
+          <p:spPr>
+            <a:xfrm>
+              <a:off x="1235312" y="4336484"/>
+              <a:ext cx="6964104" cy="1222444"/>
+            </a:xfrm>
+            <a:custGeom>
+              <a:avLst/>
+              <a:pathLst>
+                <a:path w="6964104" h="1222444">
+                  <a:moveTo>
+                    <a:pt x="324554" y="0"/>
+                  </a:moveTo>
+                  <a:lnTo>
+                    <a:pt x="351722" y="18535"/>
+                  </a:lnTo>
+                  <a:lnTo>
+                    <a:pt x="422066" y="64739"/>
+                  </a:lnTo>
+                  <a:lnTo>
+                    <a:pt x="492411" y="109220"/>
+                  </a:lnTo>
+                  <a:lnTo>
+                    <a:pt x="562755" y="152041"/>
+                  </a:lnTo>
+                  <a:lnTo>
+                    <a:pt x="633100" y="193265"/>
+                  </a:lnTo>
+                  <a:lnTo>
+                    <a:pt x="703444" y="232951"/>
+                  </a:lnTo>
+                  <a:lnTo>
+                    <a:pt x="773789" y="271157"/>
+                  </a:lnTo>
+                  <a:lnTo>
+                    <a:pt x="844133" y="307938"/>
+                  </a:lnTo>
+                  <a:lnTo>
+                    <a:pt x="914478" y="343347"/>
+                  </a:lnTo>
+                  <a:lnTo>
+                    <a:pt x="984822" y="377435"/>
+                  </a:lnTo>
+                  <a:lnTo>
+                    <a:pt x="1055167" y="410251"/>
+                  </a:lnTo>
+                  <a:lnTo>
+                    <a:pt x="1125511" y="441843"/>
+                  </a:lnTo>
+                  <a:lnTo>
+                    <a:pt x="1195856" y="472257"/>
+                  </a:lnTo>
+                  <a:lnTo>
+                    <a:pt x="1266200" y="501537"/>
+                  </a:lnTo>
+                  <a:lnTo>
+                    <a:pt x="1336545" y="529724"/>
+                  </a:lnTo>
+                  <a:lnTo>
+                    <a:pt x="1406889" y="556860"/>
+                  </a:lnTo>
+                  <a:lnTo>
+                    <a:pt x="1477234" y="582984"/>
+                  </a:lnTo>
+                  <a:lnTo>
+                    <a:pt x="1547578" y="608133"/>
+                  </a:lnTo>
+                  <a:lnTo>
+                    <a:pt x="1617923" y="632344"/>
+                  </a:lnTo>
+                  <a:lnTo>
+                    <a:pt x="1688267" y="655652"/>
+                  </a:lnTo>
+                  <a:lnTo>
+                    <a:pt x="1758612" y="678091"/>
+                  </a:lnTo>
+                  <a:lnTo>
+                    <a:pt x="1828956" y="699692"/>
+                  </a:lnTo>
+                  <a:lnTo>
+                    <a:pt x="1899301" y="720488"/>
+                  </a:lnTo>
+                  <a:lnTo>
+                    <a:pt x="1969645" y="740508"/>
+                  </a:lnTo>
+                  <a:lnTo>
+                    <a:pt x="2039990" y="759782"/>
+                  </a:lnTo>
+                  <a:lnTo>
+                    <a:pt x="2110334" y="778336"/>
+                  </a:lnTo>
+                  <a:lnTo>
+                    <a:pt x="2180679" y="796198"/>
+                  </a:lnTo>
+                  <a:lnTo>
+                    <a:pt x="2251023" y="813394"/>
+                  </a:lnTo>
+                  <a:lnTo>
+                    <a:pt x="2321368" y="829949"/>
+                  </a:lnTo>
+                  <a:lnTo>
+                    <a:pt x="2391712" y="845886"/>
+                  </a:lnTo>
+                  <a:lnTo>
+                    <a:pt x="2462057" y="861229"/>
+                  </a:lnTo>
+                  <a:lnTo>
+                    <a:pt x="2532401" y="875999"/>
+                  </a:lnTo>
+                  <a:lnTo>
+                    <a:pt x="2602746" y="890218"/>
+                  </a:lnTo>
+                  <a:lnTo>
+                    <a:pt x="2673090" y="903907"/>
+                  </a:lnTo>
+                  <a:lnTo>
+                    <a:pt x="2743435" y="917086"/>
+                  </a:lnTo>
+                  <a:lnTo>
+                    <a:pt x="2813779" y="929772"/>
+                  </a:lnTo>
+                  <a:lnTo>
+                    <a:pt x="2884124" y="941986"/>
+                  </a:lnTo>
+                  <a:lnTo>
+                    <a:pt x="2954468" y="953744"/>
+                  </a:lnTo>
+                  <a:lnTo>
+                    <a:pt x="3024813" y="958501"/>
+                  </a:lnTo>
+                  <a:lnTo>
+                    <a:pt x="3095157" y="959487"/>
+                  </a:lnTo>
+                  <a:lnTo>
+                    <a:pt x="3165502" y="960469"/>
+                  </a:lnTo>
+                  <a:lnTo>
+                    <a:pt x="3235846" y="961449"/>
+                  </a:lnTo>
+                  <a:lnTo>
+                    <a:pt x="3306191" y="962425"/>
+                  </a:lnTo>
+                  <a:lnTo>
+                    <a:pt x="3376535" y="963398"/>
+                  </a:lnTo>
+                  <a:lnTo>
+                    <a:pt x="3446880" y="964368"/>
+                  </a:lnTo>
+                  <a:lnTo>
+                    <a:pt x="3517224" y="965334"/>
+                  </a:lnTo>
+                  <a:lnTo>
+                    <a:pt x="3587569" y="966298"/>
+                  </a:lnTo>
+                  <a:lnTo>
+                    <a:pt x="3657913" y="967258"/>
+                  </a:lnTo>
+                  <a:lnTo>
+                    <a:pt x="3728257" y="968215"/>
+                  </a:lnTo>
+                  <a:lnTo>
+                    <a:pt x="3798602" y="969169"/>
+                  </a:lnTo>
+                  <a:lnTo>
+                    <a:pt x="3868946" y="970120"/>
+                  </a:lnTo>
+                  <a:lnTo>
+                    <a:pt x="3939291" y="971067"/>
+                  </a:lnTo>
+                  <a:lnTo>
+                    <a:pt x="4009635" y="972012"/>
+                  </a:lnTo>
+                  <a:lnTo>
+                    <a:pt x="4079980" y="972953"/>
+                  </a:lnTo>
+                  <a:lnTo>
+                    <a:pt x="4150324" y="973891"/>
+                  </a:lnTo>
+                  <a:lnTo>
+                    <a:pt x="4220669" y="974826"/>
+                  </a:lnTo>
+                  <a:lnTo>
+                    <a:pt x="4291013" y="975758"/>
+                  </a:lnTo>
+                  <a:lnTo>
+                    <a:pt x="4361358" y="976687"/>
+                  </a:lnTo>
+                  <a:lnTo>
+                    <a:pt x="4431702" y="977613"/>
+                  </a:lnTo>
+                  <a:lnTo>
+                    <a:pt x="4502047" y="978536"/>
+                  </a:lnTo>
+                  <a:lnTo>
+                    <a:pt x="4572391" y="979456"/>
+                  </a:lnTo>
+                  <a:lnTo>
+                    <a:pt x="4642736" y="980373"/>
+                  </a:lnTo>
+                  <a:lnTo>
+                    <a:pt x="4713080" y="981286"/>
+                  </a:lnTo>
+                  <a:lnTo>
+                    <a:pt x="4783425" y="982197"/>
+                  </a:lnTo>
+                  <a:lnTo>
+                    <a:pt x="4853769" y="983105"/>
+                  </a:lnTo>
+                  <a:lnTo>
+                    <a:pt x="4924114" y="984010"/>
+                  </a:lnTo>
+                  <a:lnTo>
+                    <a:pt x="4994458" y="984911"/>
+                  </a:lnTo>
+                  <a:lnTo>
+                    <a:pt x="5064803" y="985810"/>
+                  </a:lnTo>
+                  <a:lnTo>
+                    <a:pt x="5135147" y="986706"/>
+                  </a:lnTo>
+                  <a:lnTo>
+                    <a:pt x="5205492" y="987599"/>
+                  </a:lnTo>
+                  <a:lnTo>
+                    <a:pt x="5275836" y="988489"/>
+                  </a:lnTo>
+                  <a:lnTo>
+                    <a:pt x="5346181" y="989376"/>
+                  </a:lnTo>
+                  <a:lnTo>
+                    <a:pt x="5416525" y="990260"/>
+                  </a:lnTo>
+                  <a:lnTo>
+                    <a:pt x="5486870" y="991141"/>
+                  </a:lnTo>
+                  <a:lnTo>
+                    <a:pt x="5557214" y="992019"/>
+                  </a:lnTo>
+                  <a:lnTo>
+                    <a:pt x="5627559" y="992894"/>
+                  </a:lnTo>
+                  <a:lnTo>
+                    <a:pt x="5697903" y="993767"/>
+                  </a:lnTo>
+                  <a:lnTo>
+                    <a:pt x="5768248" y="994636"/>
+                  </a:lnTo>
+                  <a:lnTo>
+                    <a:pt x="5838592" y="995503"/>
+                  </a:lnTo>
+                  <a:lnTo>
+                    <a:pt x="5908937" y="996367"/>
+                  </a:lnTo>
+                  <a:lnTo>
+                    <a:pt x="5979281" y="997228"/>
+                  </a:lnTo>
+                  <a:lnTo>
+                    <a:pt x="6049626" y="998086"/>
+                  </a:lnTo>
+                  <a:lnTo>
+                    <a:pt x="6119970" y="998941"/>
+                  </a:lnTo>
+                  <a:lnTo>
+                    <a:pt x="6190315" y="999794"/>
+                  </a:lnTo>
+                  <a:lnTo>
+                    <a:pt x="6260659" y="1000643"/>
+                  </a:lnTo>
+                  <a:lnTo>
+                    <a:pt x="6331004" y="1001490"/>
+                  </a:lnTo>
+                  <a:lnTo>
+                    <a:pt x="6401348" y="1002334"/>
+                  </a:lnTo>
+                  <a:lnTo>
+                    <a:pt x="6471693" y="1003175"/>
+                  </a:lnTo>
+                  <a:lnTo>
+                    <a:pt x="6542037" y="1004014"/>
+                  </a:lnTo>
+                  <a:lnTo>
+                    <a:pt x="6612382" y="1004850"/>
+                  </a:lnTo>
+                  <a:lnTo>
+                    <a:pt x="6682726" y="1005683"/>
+                  </a:lnTo>
+                  <a:lnTo>
+                    <a:pt x="6753071" y="1006513"/>
+                  </a:lnTo>
+                  <a:lnTo>
+                    <a:pt x="6823415" y="1007340"/>
+                  </a:lnTo>
+                  <a:lnTo>
+                    <a:pt x="6893760" y="1008165"/>
+                  </a:lnTo>
+                  <a:lnTo>
+                    <a:pt x="6964104" y="1008987"/>
+                  </a:lnTo>
+                  <a:lnTo>
+                    <a:pt x="6964104" y="1222444"/>
+                  </a:lnTo>
+                  <a:lnTo>
+                    <a:pt x="6893760" y="1221097"/>
+                  </a:lnTo>
+                  <a:lnTo>
+                    <a:pt x="6823415" y="1219699"/>
+                  </a:lnTo>
+                  <a:lnTo>
+                    <a:pt x="6753071" y="1218245"/>
+                  </a:lnTo>
+                  <a:lnTo>
+                    <a:pt x="6682726" y="1216736"/>
+                  </a:lnTo>
+                  <a:lnTo>
+                    <a:pt x="6612382" y="1215168"/>
+                  </a:lnTo>
+                  <a:lnTo>
+                    <a:pt x="6542037" y="1213539"/>
+                  </a:lnTo>
+                  <a:lnTo>
+                    <a:pt x="6471693" y="1211848"/>
+                  </a:lnTo>
+                  <a:lnTo>
+                    <a:pt x="6401348" y="1210090"/>
+                  </a:lnTo>
+                  <a:lnTo>
+                    <a:pt x="6331004" y="1208265"/>
+                  </a:lnTo>
+                  <a:lnTo>
+                    <a:pt x="6260659" y="1206369"/>
+                  </a:lnTo>
+                  <a:lnTo>
+                    <a:pt x="6190315" y="1204399"/>
+                  </a:lnTo>
+                  <a:lnTo>
+                    <a:pt x="6119970" y="1202353"/>
+                  </a:lnTo>
+                  <a:lnTo>
+                    <a:pt x="6049626" y="1200228"/>
+                  </a:lnTo>
+                  <a:lnTo>
+                    <a:pt x="5979281" y="1198020"/>
+                  </a:lnTo>
+                  <a:lnTo>
+                    <a:pt x="5908937" y="1195727"/>
+                  </a:lnTo>
+                  <a:lnTo>
+                    <a:pt x="5838592" y="1193345"/>
+                  </a:lnTo>
+                  <a:lnTo>
+                    <a:pt x="5768248" y="1190871"/>
+                  </a:lnTo>
+                  <a:lnTo>
+                    <a:pt x="5697903" y="1188301"/>
+                  </a:lnTo>
+                  <a:lnTo>
+                    <a:pt x="5627559" y="1185632"/>
+                  </a:lnTo>
+                  <a:lnTo>
+                    <a:pt x="5557214" y="1182858"/>
+                  </a:lnTo>
+                  <a:lnTo>
+                    <a:pt x="5486870" y="1179978"/>
+                  </a:lnTo>
+                  <a:lnTo>
+                    <a:pt x="5416525" y="1176986"/>
+                  </a:lnTo>
+                  <a:lnTo>
+                    <a:pt x="5346181" y="1173878"/>
+                  </a:lnTo>
+                  <a:lnTo>
+                    <a:pt x="5275836" y="1170649"/>
+                  </a:lnTo>
+                  <a:lnTo>
+                    <a:pt x="5205492" y="1167295"/>
+                  </a:lnTo>
+                  <a:lnTo>
+                    <a:pt x="5135147" y="1163812"/>
+                  </a:lnTo>
+                  <a:lnTo>
+                    <a:pt x="5064803" y="1160193"/>
+                  </a:lnTo>
+                  <a:lnTo>
+                    <a:pt x="4994458" y="1156435"/>
+                  </a:lnTo>
+                  <a:lnTo>
+                    <a:pt x="4924114" y="1152530"/>
+                  </a:lnTo>
+                  <a:lnTo>
+                    <a:pt x="4853769" y="1148475"/>
+                  </a:lnTo>
+                  <a:lnTo>
+                    <a:pt x="4783425" y="1144262"/>
+                  </a:lnTo>
+                  <a:lnTo>
+                    <a:pt x="4713080" y="1139886"/>
+                  </a:lnTo>
+                  <a:lnTo>
+                    <a:pt x="4642736" y="1135340"/>
+                  </a:lnTo>
+                  <a:lnTo>
+                    <a:pt x="4572391" y="1130618"/>
+                  </a:lnTo>
+                  <a:lnTo>
+                    <a:pt x="4502047" y="1125714"/>
+                  </a:lnTo>
+                  <a:lnTo>
+                    <a:pt x="4431702" y="1120619"/>
+                  </a:lnTo>
+                  <a:lnTo>
+                    <a:pt x="4361358" y="1115327"/>
+                  </a:lnTo>
+                  <a:lnTo>
+                    <a:pt x="4291013" y="1109830"/>
+                  </a:lnTo>
+                  <a:lnTo>
+                    <a:pt x="4220669" y="1104119"/>
+                  </a:lnTo>
+                  <a:lnTo>
+                    <a:pt x="4150324" y="1098188"/>
+                  </a:lnTo>
+                  <a:lnTo>
+                    <a:pt x="4079980" y="1092027"/>
+                  </a:lnTo>
+                  <a:lnTo>
+                    <a:pt x="4009635" y="1085627"/>
+                  </a:lnTo>
+                  <a:lnTo>
+                    <a:pt x="3939291" y="1078979"/>
+                  </a:lnTo>
+                  <a:lnTo>
+                    <a:pt x="3868946" y="1072073"/>
+                  </a:lnTo>
+                  <a:lnTo>
+                    <a:pt x="3798602" y="1064900"/>
+                  </a:lnTo>
+                  <a:lnTo>
+                    <a:pt x="3728257" y="1057449"/>
+                  </a:lnTo>
+                  <a:lnTo>
+                    <a:pt x="3657913" y="1049709"/>
+                  </a:lnTo>
+                  <a:lnTo>
+                    <a:pt x="3587569" y="1041670"/>
+                  </a:lnTo>
+                  <a:lnTo>
+                    <a:pt x="3517224" y="1033319"/>
+                  </a:lnTo>
+                  <a:lnTo>
+                    <a:pt x="3446880" y="1024644"/>
+                  </a:lnTo>
+                  <a:lnTo>
+                    <a:pt x="3376535" y="1015633"/>
+                  </a:lnTo>
+                  <a:lnTo>
+                    <a:pt x="3306191" y="1006273"/>
+                  </a:lnTo>
+                  <a:lnTo>
+                    <a:pt x="3235846" y="996551"/>
+                  </a:lnTo>
+                  <a:lnTo>
+                    <a:pt x="3165502" y="986451"/>
+                  </a:lnTo>
+                  <a:lnTo>
+                    <a:pt x="3095157" y="975960"/>
+                  </a:lnTo>
+                  <a:lnTo>
+                    <a:pt x="3024813" y="965063"/>
+                  </a:lnTo>
+                  <a:lnTo>
+                    <a:pt x="2954468" y="957511"/>
+                  </a:lnTo>
+                  <a:lnTo>
+                    <a:pt x="2884124" y="956519"/>
+                  </a:lnTo>
+                  <a:lnTo>
+                    <a:pt x="2813779" y="955523"/>
+                  </a:lnTo>
+                  <a:lnTo>
+                    <a:pt x="2743435" y="954524"/>
+                  </a:lnTo>
+                  <a:lnTo>
+                    <a:pt x="2673090" y="953522"/>
+                  </a:lnTo>
+                  <a:lnTo>
+                    <a:pt x="2602746" y="952516"/>
+                  </a:lnTo>
+                  <a:lnTo>
+                    <a:pt x="2532401" y="951507"/>
+                  </a:lnTo>
+                  <a:lnTo>
+                    <a:pt x="2462057" y="950495"/>
+                  </a:lnTo>
+                  <a:lnTo>
+                    <a:pt x="2391712" y="949479"/>
+                  </a:lnTo>
+                  <a:lnTo>
+                    <a:pt x="2321368" y="948460"/>
+                  </a:lnTo>
+                  <a:lnTo>
+                    <a:pt x="2251023" y="947437"/>
+                  </a:lnTo>
+                  <a:lnTo>
+                    <a:pt x="2180679" y="946412"/>
+                  </a:lnTo>
+                  <a:lnTo>
+                    <a:pt x="2110334" y="945382"/>
+                  </a:lnTo>
+                  <a:lnTo>
+                    <a:pt x="2039990" y="944350"/>
+                  </a:lnTo>
+                  <a:lnTo>
+                    <a:pt x="1969645" y="943314"/>
+                  </a:lnTo>
+                  <a:lnTo>
+                    <a:pt x="1899301" y="942274"/>
+                  </a:lnTo>
+                  <a:lnTo>
+                    <a:pt x="1828956" y="941231"/>
+                  </a:lnTo>
+                  <a:lnTo>
+                    <a:pt x="1758612" y="940185"/>
+                  </a:lnTo>
+                  <a:lnTo>
+                    <a:pt x="1688267" y="939135"/>
+                  </a:lnTo>
+                  <a:lnTo>
+                    <a:pt x="1617923" y="938082"/>
+                  </a:lnTo>
+                  <a:lnTo>
+                    <a:pt x="1547578" y="937025"/>
+                  </a:lnTo>
+                  <a:lnTo>
+                    <a:pt x="1477234" y="935964"/>
+                  </a:lnTo>
+                  <a:lnTo>
+                    <a:pt x="1406889" y="934901"/>
+                  </a:lnTo>
+                  <a:lnTo>
+                    <a:pt x="1336545" y="933833"/>
+                  </a:lnTo>
+                  <a:lnTo>
+                    <a:pt x="1266200" y="932762"/>
+                  </a:lnTo>
+                  <a:lnTo>
+                    <a:pt x="1195856" y="931688"/>
+                  </a:lnTo>
+                  <a:lnTo>
+                    <a:pt x="1125511" y="930610"/>
+                  </a:lnTo>
+                  <a:lnTo>
+                    <a:pt x="1055167" y="929528"/>
+                  </a:lnTo>
+                  <a:lnTo>
+                    <a:pt x="984822" y="928443"/>
+                  </a:lnTo>
+                  <a:lnTo>
+                    <a:pt x="914478" y="927354"/>
+                  </a:lnTo>
+                  <a:lnTo>
+                    <a:pt x="844133" y="926262"/>
+                  </a:lnTo>
+                  <a:lnTo>
+                    <a:pt x="773789" y="925166"/>
+                  </a:lnTo>
+                  <a:lnTo>
+                    <a:pt x="703444" y="924066"/>
+                  </a:lnTo>
+                  <a:lnTo>
+                    <a:pt x="633100" y="922963"/>
+                  </a:lnTo>
+                  <a:lnTo>
+                    <a:pt x="562755" y="921856"/>
+                  </a:lnTo>
+                  <a:lnTo>
+                    <a:pt x="492411" y="920746"/>
+                  </a:lnTo>
+                  <a:lnTo>
+                    <a:pt x="422066" y="919631"/>
+                  </a:lnTo>
+                  <a:lnTo>
+                    <a:pt x="351722" y="918514"/>
+                  </a:lnTo>
+                  <a:lnTo>
+                    <a:pt x="281377" y="917392"/>
+                  </a:lnTo>
+                  <a:lnTo>
+                    <a:pt x="211033" y="916267"/>
+                  </a:lnTo>
+                  <a:lnTo>
+                    <a:pt x="140688" y="915137"/>
+                  </a:lnTo>
+                  <a:lnTo>
+                    <a:pt x="70344" y="914005"/>
+                  </a:lnTo>
+                  <a:lnTo>
+                    <a:pt x="0" y="912868"/>
+                  </a:lnTo>
+                  <a:close/>
+                </a:path>
+              </a:pathLst>
+            </a:custGeom>
+            <a:solidFill>
+              <a:srgbClr val="FF8C00">
+                <a:alpha val="20000"/>
+              </a:srgbClr>
+            </a:solidFill>
+          </p:spPr>
+          <p:txBody>
+            <a:bodyPr/>
+            <a:lstStyle/>
+            <a:p/>
+          </p:txBody>
+        </p:sp>
+        <p:sp>
+          <p:nvSpPr>
+            <p:cNvPr id="71" name="pl71"/>
+            <p:cNvSpPr/>
+            <p:nvPr/>
+          </p:nvSpPr>
+          <p:spPr>
+            <a:xfrm>
+              <a:off x="1559866" y="4336484"/>
+              <a:ext cx="6639550" cy="1008987"/>
+            </a:xfrm>
+            <a:custGeom>
+              <a:avLst/>
+              <a:pathLst>
+                <a:path w="6639550" h="1008987">
+                  <a:moveTo>
+                    <a:pt x="0" y="0"/>
+                  </a:moveTo>
+                  <a:lnTo>
+                    <a:pt x="27167" y="18535"/>
+                  </a:lnTo>
+                  <a:lnTo>
+                    <a:pt x="97512" y="64739"/>
+                  </a:lnTo>
+                  <a:lnTo>
+                    <a:pt x="167856" y="109220"/>
+                  </a:lnTo>
+                  <a:lnTo>
+                    <a:pt x="238201" y="152041"/>
+                  </a:lnTo>
+                  <a:lnTo>
+                    <a:pt x="308545" y="193265"/>
+                  </a:lnTo>
+                  <a:lnTo>
+                    <a:pt x="378890" y="232951"/>
+                  </a:lnTo>
+                  <a:lnTo>
+                    <a:pt x="449234" y="271157"/>
+                  </a:lnTo>
+                  <a:lnTo>
+                    <a:pt x="519579" y="307938"/>
+                  </a:lnTo>
+                  <a:lnTo>
+                    <a:pt x="589923" y="343347"/>
+                  </a:lnTo>
+                  <a:lnTo>
+                    <a:pt x="660268" y="377435"/>
+                  </a:lnTo>
+                  <a:lnTo>
+                    <a:pt x="730612" y="410251"/>
+                  </a:lnTo>
+                  <a:lnTo>
+                    <a:pt x="800957" y="441843"/>
+                  </a:lnTo>
+                  <a:lnTo>
+                    <a:pt x="871301" y="472257"/>
+                  </a:lnTo>
+                  <a:lnTo>
+                    <a:pt x="941646" y="501537"/>
+                  </a:lnTo>
+                  <a:lnTo>
+                    <a:pt x="1011990" y="529724"/>
+                  </a:lnTo>
+                  <a:lnTo>
+                    <a:pt x="1082335" y="556860"/>
+                  </a:lnTo>
+                  <a:lnTo>
+                    <a:pt x="1152679" y="582984"/>
+                  </a:lnTo>
+                  <a:lnTo>
+                    <a:pt x="1223024" y="608133"/>
+                  </a:lnTo>
+                  <a:lnTo>
+                    <a:pt x="1293368" y="632344"/>
+                  </a:lnTo>
+                  <a:lnTo>
+                    <a:pt x="1363713" y="655652"/>
+                  </a:lnTo>
+                  <a:lnTo>
+                    <a:pt x="1434057" y="678091"/>
+                  </a:lnTo>
+                  <a:lnTo>
+                    <a:pt x="1504402" y="699692"/>
+                  </a:lnTo>
+                  <a:lnTo>
+                    <a:pt x="1574746" y="720488"/>
+                  </a:lnTo>
+                  <a:lnTo>
+                    <a:pt x="1645091" y="740508"/>
+                  </a:lnTo>
+                  <a:lnTo>
+                    <a:pt x="1715435" y="759782"/>
+                  </a:lnTo>
+                  <a:lnTo>
+                    <a:pt x="1785780" y="778336"/>
+                  </a:lnTo>
+                  <a:lnTo>
+                    <a:pt x="1856124" y="796198"/>
+                  </a:lnTo>
+                  <a:lnTo>
+                    <a:pt x="1926469" y="813394"/>
+                  </a:lnTo>
+                  <a:lnTo>
+                    <a:pt x="1996813" y="829949"/>
+                  </a:lnTo>
+                  <a:lnTo>
+                    <a:pt x="2067158" y="845886"/>
+                  </a:lnTo>
+                  <a:lnTo>
+                    <a:pt x="2137502" y="861229"/>
+                  </a:lnTo>
+                  <a:lnTo>
+                    <a:pt x="2207847" y="875999"/>
+                  </a:lnTo>
+                  <a:lnTo>
+                    <a:pt x="2278191" y="890218"/>
+                  </a:lnTo>
+                  <a:lnTo>
+                    <a:pt x="2348536" y="903907"/>
+                  </a:lnTo>
+                  <a:lnTo>
+                    <a:pt x="2418880" y="917086"/>
+                  </a:lnTo>
+                  <a:lnTo>
+                    <a:pt x="2489225" y="929772"/>
+                  </a:lnTo>
+                  <a:lnTo>
+                    <a:pt x="2559569" y="941986"/>
+                  </a:lnTo>
+                  <a:lnTo>
+                    <a:pt x="2629914" y="953744"/>
+                  </a:lnTo>
+                  <a:lnTo>
+                    <a:pt x="2700258" y="958501"/>
+                  </a:lnTo>
+                  <a:lnTo>
+                    <a:pt x="2770603" y="959487"/>
+                  </a:lnTo>
+                  <a:lnTo>
+                    <a:pt x="2840947" y="960469"/>
+                  </a:lnTo>
+                  <a:lnTo>
+                    <a:pt x="2911292" y="961449"/>
+                  </a:lnTo>
+                  <a:lnTo>
+                    <a:pt x="2981636" y="962425"/>
+                  </a:lnTo>
+                  <a:lnTo>
+                    <a:pt x="3051981" y="963398"/>
+                  </a:lnTo>
+                  <a:lnTo>
+                    <a:pt x="3122325" y="964368"/>
+                  </a:lnTo>
+                  <a:lnTo>
+                    <a:pt x="3192670" y="965334"/>
+                  </a:lnTo>
+                  <a:lnTo>
+                    <a:pt x="3263014" y="966298"/>
+                  </a:lnTo>
+                  <a:lnTo>
+                    <a:pt x="3333359" y="967258"/>
+                  </a:lnTo>
+                  <a:lnTo>
+                    <a:pt x="3403703" y="968215"/>
+                  </a:lnTo>
+                  <a:lnTo>
+                    <a:pt x="3474048" y="969169"/>
+                  </a:lnTo>
+                  <a:lnTo>
+                    <a:pt x="3544392" y="970120"/>
+                  </a:lnTo>
+                  <a:lnTo>
+                    <a:pt x="3614737" y="971067"/>
+                  </a:lnTo>
+                  <a:lnTo>
+                    <a:pt x="3685081" y="972012"/>
+                  </a:lnTo>
+                  <a:lnTo>
+                    <a:pt x="3755425" y="972953"/>
+                  </a:lnTo>
+                  <a:lnTo>
+                    <a:pt x="3825770" y="973891"/>
+                  </a:lnTo>
+                  <a:lnTo>
+                    <a:pt x="3896114" y="974826"/>
+                  </a:lnTo>
+                  <a:lnTo>
+                    <a:pt x="3966459" y="975758"/>
+                  </a:lnTo>
+                  <a:lnTo>
+                    <a:pt x="4036803" y="976687"/>
+                  </a:lnTo>
+                  <a:lnTo>
+                    <a:pt x="4107148" y="977613"/>
+                  </a:lnTo>
+                  <a:lnTo>
+                    <a:pt x="4177492" y="978536"/>
+                  </a:lnTo>
+                  <a:lnTo>
+                    <a:pt x="4247837" y="979456"/>
+                  </a:lnTo>
+                  <a:lnTo>
+                    <a:pt x="4318181" y="980373"/>
+                  </a:lnTo>
+                  <a:lnTo>
+                    <a:pt x="4388526" y="981286"/>
+                  </a:lnTo>
+                  <a:lnTo>
+                    <a:pt x="4458870" y="982197"/>
+                  </a:lnTo>
+                  <a:lnTo>
+                    <a:pt x="4529215" y="983105"/>
+                  </a:lnTo>
+                  <a:lnTo>
+                    <a:pt x="4599559" y="984010"/>
+                  </a:lnTo>
+                  <a:lnTo>
+                    <a:pt x="4669904" y="984911"/>
+                  </a:lnTo>
+                  <a:lnTo>
+                    <a:pt x="4740248" y="985810"/>
+                  </a:lnTo>
+                  <a:lnTo>
+                    <a:pt x="4810593" y="986706"/>
+                  </a:lnTo>
+                  <a:lnTo>
+                    <a:pt x="4880937" y="987599"/>
+                  </a:lnTo>
+                  <a:lnTo>
+                    <a:pt x="4951282" y="988489"/>
+                  </a:lnTo>
+                  <a:lnTo>
+                    <a:pt x="5021626" y="989376"/>
+                  </a:lnTo>
+                  <a:lnTo>
+                    <a:pt x="5091971" y="990260"/>
+                  </a:lnTo>
+                  <a:lnTo>
+                    <a:pt x="5162315" y="991141"/>
+                  </a:lnTo>
+                  <a:lnTo>
+                    <a:pt x="5232660" y="992019"/>
+                  </a:lnTo>
+                  <a:lnTo>
+                    <a:pt x="5303004" y="992894"/>
+                  </a:lnTo>
+                  <a:lnTo>
+                    <a:pt x="5373349" y="993767"/>
+                  </a:lnTo>
+                  <a:lnTo>
+                    <a:pt x="5443693" y="994636"/>
+                  </a:lnTo>
+                  <a:lnTo>
+                    <a:pt x="5514038" y="995503"/>
+                  </a:lnTo>
+                  <a:lnTo>
+                    <a:pt x="5584382" y="996367"/>
+                  </a:lnTo>
+                  <a:lnTo>
+                    <a:pt x="5654727" y="997228"/>
+                  </a:lnTo>
+                  <a:lnTo>
+                    <a:pt x="5725071" y="998086"/>
+                  </a:lnTo>
+                  <a:lnTo>
+                    <a:pt x="5795416" y="998941"/>
+                  </a:lnTo>
+                  <a:lnTo>
+                    <a:pt x="5865760" y="999794"/>
+                  </a:lnTo>
+                  <a:lnTo>
+                    <a:pt x="5936105" y="1000643"/>
+                  </a:lnTo>
+                  <a:lnTo>
+                    <a:pt x="6006449" y="1001490"/>
+                  </a:lnTo>
+                  <a:lnTo>
+                    <a:pt x="6076794" y="1002334"/>
+                  </a:lnTo>
+                  <a:lnTo>
+                    <a:pt x="6147138" y="1003175"/>
+                  </a:lnTo>
+                  <a:lnTo>
+                    <a:pt x="6217483" y="1004014"/>
+                  </a:lnTo>
+                  <a:lnTo>
+                    <a:pt x="6287827" y="1004850"/>
+                  </a:lnTo>
+                  <a:lnTo>
+                    <a:pt x="6358172" y="1005683"/>
+                  </a:lnTo>
+                  <a:lnTo>
+                    <a:pt x="6428516" y="1006513"/>
+                  </a:lnTo>
+                  <a:lnTo>
+                    <a:pt x="6498861" y="1007340"/>
+                  </a:lnTo>
+                  <a:lnTo>
+                    <a:pt x="6569205" y="1008165"/>
+                  </a:lnTo>
+                  <a:lnTo>
+                    <a:pt x="6639550" y="1008987"/>
+                  </a:lnTo>
+                </a:path>
+              </a:pathLst>
+            </a:custGeom>
+          </p:spPr>
+          <p:txBody>
+            <a:bodyPr/>
+            <a:lstStyle/>
+            <a:p/>
+          </p:txBody>
+        </p:sp>
+        <p:sp>
+          <p:nvSpPr>
+            <p:cNvPr id="72" name="pl72"/>
+            <p:cNvSpPr/>
+            <p:nvPr/>
+          </p:nvSpPr>
+          <p:spPr>
+            <a:xfrm>
+              <a:off x="1235312" y="5249353"/>
+              <a:ext cx="6964104" cy="309576"/>
+            </a:xfrm>
+            <a:custGeom>
+              <a:avLst/>
+              <a:pathLst>
+                <a:path w="6964104" h="309576">
+                  <a:moveTo>
+                    <a:pt x="6964104" y="309576"/>
+                  </a:moveTo>
+                  <a:lnTo>
+                    <a:pt x="6893760" y="308229"/>
+                  </a:lnTo>
+                  <a:lnTo>
+                    <a:pt x="6823415" y="306830"/>
+                  </a:lnTo>
+                  <a:lnTo>
+                    <a:pt x="6753071" y="305377"/>
+                  </a:lnTo>
+                  <a:lnTo>
+                    <a:pt x="6682726" y="303867"/>
+                  </a:lnTo>
+                  <a:lnTo>
+                    <a:pt x="6612382" y="302299"/>
+                  </a:lnTo>
+                  <a:lnTo>
+                    <a:pt x="6542037" y="300671"/>
+                  </a:lnTo>
+                  <a:lnTo>
+                    <a:pt x="6471693" y="298979"/>
+                  </a:lnTo>
+                  <a:lnTo>
+                    <a:pt x="6401348" y="297222"/>
+                  </a:lnTo>
+                  <a:lnTo>
+                    <a:pt x="6331004" y="295396"/>
+                  </a:lnTo>
+                  <a:lnTo>
+                    <a:pt x="6260659" y="293500"/>
+                  </a:lnTo>
+                  <a:lnTo>
+                    <a:pt x="6190315" y="291531"/>
+                  </a:lnTo>
+                  <a:lnTo>
+                    <a:pt x="6119970" y="289485"/>
+                  </a:lnTo>
+                  <a:lnTo>
+                    <a:pt x="6049626" y="287359"/>
+                  </a:lnTo>
+                  <a:lnTo>
+                    <a:pt x="5979281" y="285152"/>
+                  </a:lnTo>
+                  <a:lnTo>
+                    <a:pt x="5908937" y="282859"/>
+                  </a:lnTo>
+                  <a:lnTo>
+                    <a:pt x="5838592" y="280477"/>
+                  </a:lnTo>
+                  <a:lnTo>
+                    <a:pt x="5768248" y="278003"/>
+                  </a:lnTo>
+                  <a:lnTo>
+                    <a:pt x="5697903" y="275433"/>
+                  </a:lnTo>
+                  <a:lnTo>
+                    <a:pt x="5627559" y="272763"/>
+                  </a:lnTo>
+                  <a:lnTo>
+                    <a:pt x="5557214" y="269990"/>
+                  </a:lnTo>
+                  <a:lnTo>
+                    <a:pt x="5486870" y="267109"/>
+                  </a:lnTo>
+                  <a:lnTo>
+                    <a:pt x="5416525" y="264117"/>
+                  </a:lnTo>
+                  <a:lnTo>
+                    <a:pt x="5346181" y="261009"/>
+                  </a:lnTo>
+                  <a:lnTo>
+                    <a:pt x="5275836" y="257780"/>
+                  </a:lnTo>
+                  <a:lnTo>
+                    <a:pt x="5205492" y="254427"/>
+                  </a:lnTo>
+                  <a:lnTo>
+                    <a:pt x="5135147" y="250943"/>
+                  </a:lnTo>
+                  <a:lnTo>
+                    <a:pt x="5064803" y="247325"/>
+                  </a:lnTo>
+                  <a:lnTo>
+                    <a:pt x="4994458" y="243566"/>
+                  </a:lnTo>
+                  <a:lnTo>
+                    <a:pt x="4924114" y="239662"/>
+                  </a:lnTo>
+                  <a:lnTo>
+                    <a:pt x="4853769" y="235606"/>
+                  </a:lnTo>
+                  <a:lnTo>
+                    <a:pt x="4783425" y="231393"/>
+                  </a:lnTo>
+                  <a:lnTo>
+                    <a:pt x="4713080" y="227017"/>
+                  </a:lnTo>
+                  <a:lnTo>
+                    <a:pt x="4642736" y="222471"/>
+                  </a:lnTo>
+                  <a:lnTo>
+                    <a:pt x="4572391" y="217750"/>
+                  </a:lnTo>
+                  <a:lnTo>
+                    <a:pt x="4502047" y="212845"/>
+                  </a:lnTo>
+                  <a:lnTo>
+                    <a:pt x="4431702" y="207750"/>
+                  </a:lnTo>
+                  <a:lnTo>
+                    <a:pt x="4361358" y="202458"/>
+                  </a:lnTo>
+                  <a:lnTo>
+                    <a:pt x="4291013" y="196961"/>
+                  </a:lnTo>
+                  <a:lnTo>
+                    <a:pt x="4220669" y="191251"/>
+                  </a:lnTo>
+                  <a:lnTo>
+                    <a:pt x="4150324" y="185319"/>
+                  </a:lnTo>
+                  <a:lnTo>
+                    <a:pt x="4079980" y="179158"/>
+                  </a:lnTo>
+                  <a:lnTo>
+                    <a:pt x="4009635" y="172758"/>
+                  </a:lnTo>
+                  <a:lnTo>
+                    <a:pt x="3939291" y="166110"/>
+                  </a:lnTo>
+                  <a:lnTo>
+                    <a:pt x="3868946" y="159205"/>
+                  </a:lnTo>
+                  <a:lnTo>
+                    <a:pt x="3798602" y="152032"/>
+                  </a:lnTo>
+                  <a:lnTo>
+                    <a:pt x="3728257" y="144581"/>
+                  </a:lnTo>
+                  <a:lnTo>
+                    <a:pt x="3657913" y="136841"/>
+                  </a:lnTo>
+                  <a:lnTo>
+                    <a:pt x="3587569" y="128801"/>
+                  </a:lnTo>
+                  <a:lnTo>
+                    <a:pt x="3517224" y="120450"/>
+                  </a:lnTo>
+                  <a:lnTo>
+                    <a:pt x="3446880" y="111775"/>
+                  </a:lnTo>
+                  <a:lnTo>
+                    <a:pt x="3376535" y="102765"/>
+                  </a:lnTo>
+                  <a:lnTo>
+                    <a:pt x="3306191" y="93405"/>
+                  </a:lnTo>
+                  <a:lnTo>
+                    <a:pt x="3235846" y="83682"/>
+                  </a:lnTo>
+                  <a:lnTo>
+                    <a:pt x="3165502" y="73583"/>
+                  </a:lnTo>
+                  <a:lnTo>
+                    <a:pt x="3095157" y="63092"/>
+                  </a:lnTo>
+                  <a:lnTo>
+                    <a:pt x="3024813" y="52195"/>
+                  </a:lnTo>
+                  <a:lnTo>
+                    <a:pt x="2954468" y="44643"/>
+                  </a:lnTo>
+                  <a:lnTo>
+                    <a:pt x="2884124" y="43650"/>
+                  </a:lnTo>
+                  <a:lnTo>
+                    <a:pt x="2813779" y="42655"/>
+                  </a:lnTo>
+                  <a:lnTo>
+                    <a:pt x="2743435" y="41656"/>
+                  </a:lnTo>
+                  <a:lnTo>
+                    <a:pt x="2673090" y="40653"/>
+                  </a:lnTo>
+                  <a:lnTo>
+                    <a:pt x="2602746" y="39647"/>
+                  </a:lnTo>
+                  <a:lnTo>
+                    <a:pt x="2532401" y="38638"/>
+                  </a:lnTo>
+                  <a:lnTo>
+                    <a:pt x="2462057" y="37626"/>
+                  </a:lnTo>
+                  <a:lnTo>
+                    <a:pt x="2391712" y="36610"/>
+                  </a:lnTo>
+                  <a:lnTo>
+                    <a:pt x="2321368" y="35591"/>
+                  </a:lnTo>
+                  <a:lnTo>
+                    <a:pt x="2251023" y="34569"/>
+                  </a:lnTo>
+                  <a:lnTo>
+                    <a:pt x="2180679" y="33543"/>
+                  </a:lnTo>
+                  <a:lnTo>
+                    <a:pt x="2110334" y="32514"/>
+                  </a:lnTo>
+                  <a:lnTo>
+                    <a:pt x="2039990" y="31481"/>
+                  </a:lnTo>
+                  <a:lnTo>
+                    <a:pt x="1969645" y="30445"/>
+                  </a:lnTo>
+                  <a:lnTo>
+                    <a:pt x="1899301" y="29405"/>
+                  </a:lnTo>
+                  <a:lnTo>
+                    <a:pt x="1828956" y="28363"/>
+                  </a:lnTo>
+                  <a:lnTo>
+                    <a:pt x="1758612" y="27316"/>
+                  </a:lnTo>
+                  <a:lnTo>
+                    <a:pt x="1688267" y="26266"/>
+                  </a:lnTo>
+                  <a:lnTo>
+                    <a:pt x="1617923" y="25213"/>
+                  </a:lnTo>
+                  <a:lnTo>
+                    <a:pt x="1547578" y="24156"/>
+                  </a:lnTo>
+                  <a:lnTo>
+                    <a:pt x="1477234" y="23096"/>
+                  </a:lnTo>
+                  <a:lnTo>
+                    <a:pt x="1406889" y="22032"/>
+                  </a:lnTo>
+                  <a:lnTo>
+                    <a:pt x="1336545" y="20965"/>
+                  </a:lnTo>
+                  <a:lnTo>
+                    <a:pt x="1266200" y="19894"/>
+                  </a:lnTo>
+                  <a:lnTo>
+                    <a:pt x="1195856" y="18819"/>
+                  </a:lnTo>
+                  <a:lnTo>
+                    <a:pt x="1125511" y="17741"/>
+                  </a:lnTo>
+                  <a:lnTo>
+                    <a:pt x="1055167" y="16660"/>
+                  </a:lnTo>
+                  <a:lnTo>
+                    <a:pt x="984822" y="15574"/>
+                  </a:lnTo>
+                  <a:lnTo>
+                    <a:pt x="914478" y="14486"/>
+                  </a:lnTo>
+                  <a:lnTo>
+                    <a:pt x="844133" y="13393"/>
+                  </a:lnTo>
+                  <a:lnTo>
+                    <a:pt x="773789" y="12297"/>
+                  </a:lnTo>
+                  <a:lnTo>
+                    <a:pt x="703444" y="11198"/>
+                  </a:lnTo>
+                  <a:lnTo>
+                    <a:pt x="633100" y="10095"/>
+                  </a:lnTo>
+                  <a:lnTo>
+                    <a:pt x="562755" y="8988"/>
+                  </a:lnTo>
+                  <a:lnTo>
+                    <a:pt x="492411" y="7877"/>
+                  </a:lnTo>
+                  <a:lnTo>
+                    <a:pt x="422066" y="6763"/>
+                  </a:lnTo>
+                  <a:lnTo>
+                    <a:pt x="351722" y="5645"/>
+                  </a:lnTo>
+                  <a:lnTo>
+                    <a:pt x="281377" y="4523"/>
+                  </a:lnTo>
+                  <a:lnTo>
+                    <a:pt x="211033" y="3398"/>
+                  </a:lnTo>
+                  <a:lnTo>
+                    <a:pt x="140688" y="2269"/>
+                  </a:lnTo>
+                  <a:lnTo>
+                    <a:pt x="70344" y="1136"/>
+                  </a:lnTo>
+                  <a:lnTo>
+                    <a:pt x="0" y="0"/>
+                  </a:lnTo>
+                </a:path>
+              </a:pathLst>
+            </a:custGeom>
+          </p:spPr>
+          <p:txBody>
+            <a:bodyPr/>
+            <a:lstStyle/>
+            <a:p/>
+          </p:txBody>
+        </p:sp>
+        <p:sp>
+          <p:nvSpPr>
+            <p:cNvPr id="73" name="pl73"/>
+            <p:cNvSpPr/>
+            <p:nvPr/>
+          </p:nvSpPr>
+          <p:spPr>
+            <a:xfrm>
+              <a:off x="1235312" y="4875494"/>
+              <a:ext cx="6964104" cy="625309"/>
+            </a:xfrm>
+            <a:custGeom>
+              <a:avLst/>
+              <a:pathLst>
+                <a:path w="6964104" h="625309">
+                  <a:moveTo>
+                    <a:pt x="0" y="0"/>
+                  </a:moveTo>
+                  <a:lnTo>
+                    <a:pt x="70344" y="14685"/>
+                  </a:lnTo>
+                  <a:lnTo>
+                    <a:pt x="140688" y="29071"/>
+                  </a:lnTo>
+                  <a:lnTo>
+                    <a:pt x="211033" y="43163"/>
+                  </a:lnTo>
+                  <a:lnTo>
+                    <a:pt x="281377" y="56966"/>
+                  </a:lnTo>
+                  <a:lnTo>
+                    <a:pt x="351722" y="70487"/>
+                  </a:lnTo>
+                  <a:lnTo>
+                    <a:pt x="422066" y="83732"/>
+                  </a:lnTo>
+                  <a:lnTo>
+                    <a:pt x="492411" y="96706"/>
+                  </a:lnTo>
+                  <a:lnTo>
+                    <a:pt x="562755" y="109414"/>
+                  </a:lnTo>
+                  <a:lnTo>
+                    <a:pt x="633100" y="121863"/>
+                  </a:lnTo>
+                  <a:lnTo>
+                    <a:pt x="703444" y="134057"/>
+                  </a:lnTo>
+                  <a:lnTo>
+                    <a:pt x="773789" y="146002"/>
+                  </a:lnTo>
+                  <a:lnTo>
+                    <a:pt x="844133" y="157702"/>
+                  </a:lnTo>
+                  <a:lnTo>
+                    <a:pt x="914478" y="169163"/>
+                  </a:lnTo>
+                  <a:lnTo>
+                    <a:pt x="984822" y="180390"/>
+                  </a:lnTo>
+                  <a:lnTo>
+                    <a:pt x="1055167" y="191387"/>
+                  </a:lnTo>
+                  <a:lnTo>
+                    <a:pt x="1125511" y="202160"/>
+                  </a:lnTo>
+                  <a:lnTo>
+                    <a:pt x="1195856" y="212712"/>
+                  </a:lnTo>
+                  <a:lnTo>
+                    <a:pt x="1266200" y="223048"/>
+                  </a:lnTo>
+                  <a:lnTo>
+                    <a:pt x="1336545" y="233173"/>
+                  </a:lnTo>
+                  <a:lnTo>
+                    <a:pt x="1406889" y="243091"/>
+                  </a:lnTo>
+                  <a:lnTo>
+                    <a:pt x="1477234" y="252806"/>
+                  </a:lnTo>
+                  <a:lnTo>
+                    <a:pt x="1547578" y="262323"/>
+                  </a:lnTo>
+                  <a:lnTo>
+                    <a:pt x="1617923" y="271645"/>
+                  </a:lnTo>
+                  <a:lnTo>
+                    <a:pt x="1688267" y="280776"/>
+                  </a:lnTo>
+                  <a:lnTo>
+                    <a:pt x="1758612" y="289720"/>
+                  </a:lnTo>
+                  <a:lnTo>
+                    <a:pt x="1828956" y="298482"/>
+                  </a:lnTo>
+                  <a:lnTo>
+                    <a:pt x="1899301" y="307064"/>
+                  </a:lnTo>
+                  <a:lnTo>
+                    <a:pt x="1969645" y="315471"/>
+                  </a:lnTo>
+                  <a:lnTo>
+                    <a:pt x="2039990" y="323706"/>
+                  </a:lnTo>
+                  <a:lnTo>
+                    <a:pt x="2110334" y="331773"/>
+                  </a:lnTo>
+                  <a:lnTo>
+                    <a:pt x="2180679" y="339675"/>
+                  </a:lnTo>
+                  <a:lnTo>
+                    <a:pt x="2251023" y="347415"/>
+                  </a:lnTo>
+                  <a:lnTo>
+                    <a:pt x="2321368" y="354997"/>
+                  </a:lnTo>
+                  <a:lnTo>
+                    <a:pt x="2391712" y="362424"/>
+                  </a:lnTo>
+                  <a:lnTo>
+                    <a:pt x="2462057" y="369699"/>
+                  </a:lnTo>
+                  <a:lnTo>
+                    <a:pt x="2532401" y="376825"/>
+                  </a:lnTo>
+                  <a:lnTo>
+                    <a:pt x="2602746" y="383805"/>
+                  </a:lnTo>
+                  <a:lnTo>
+                    <a:pt x="2673090" y="390643"/>
+                  </a:lnTo>
+                  <a:lnTo>
+                    <a:pt x="2743435" y="397341"/>
+                  </a:lnTo>
+                  <a:lnTo>
+                    <a:pt x="2813779" y="403902"/>
+                  </a:lnTo>
+                  <a:lnTo>
+                    <a:pt x="2884124" y="410329"/>
+                  </a:lnTo>
+                  <a:lnTo>
+                    <a:pt x="2954468" y="416624"/>
+                  </a:lnTo>
+                  <a:lnTo>
+                    <a:pt x="3024813" y="422791"/>
+                  </a:lnTo>
+                  <a:lnTo>
+                    <a:pt x="3095157" y="428831"/>
+                  </a:lnTo>
+                  <a:lnTo>
+                    <a:pt x="3165502" y="434748"/>
+                  </a:lnTo>
+                  <a:lnTo>
+                    <a:pt x="3235846" y="440544"/>
+                  </a:lnTo>
+                  <a:lnTo>
+                    <a:pt x="3306191" y="446222"/>
+                  </a:lnTo>
+                  <a:lnTo>
+                    <a:pt x="3376535" y="451783"/>
+                  </a:lnTo>
+                  <a:lnTo>
+                    <a:pt x="3446880" y="457231"/>
+                  </a:lnTo>
+                  <a:lnTo>
+                    <a:pt x="3517224" y="462567"/>
+                  </a:lnTo>
+                  <a:lnTo>
+                    <a:pt x="3587569" y="467794"/>
+                  </a:lnTo>
+                  <a:lnTo>
+                    <a:pt x="3657913" y="472914"/>
+                  </a:lnTo>
+                  <a:lnTo>
+                    <a:pt x="3728257" y="477930"/>
+                  </a:lnTo>
+                  <a:lnTo>
+                    <a:pt x="3798602" y="482843"/>
+                  </a:lnTo>
+                  <a:lnTo>
+                    <a:pt x="3868946" y="487656"/>
+                  </a:lnTo>
+                  <a:lnTo>
+                    <a:pt x="3939291" y="492370"/>
+                  </a:lnTo>
+                  <a:lnTo>
+                    <a:pt x="4009635" y="496988"/>
+                  </a:lnTo>
+                  <a:lnTo>
+                    <a:pt x="4079980" y="501511"/>
+                  </a:lnTo>
+                  <a:lnTo>
+                    <a:pt x="4150324" y="505942"/>
+                  </a:lnTo>
+                  <a:lnTo>
+                    <a:pt x="4220669" y="510282"/>
+                  </a:lnTo>
+                  <a:lnTo>
+                    <a:pt x="4291013" y="514533"/>
+                  </a:lnTo>
+                  <a:lnTo>
+                    <a:pt x="4361358" y="518698"/>
+                  </a:lnTo>
+                  <a:lnTo>
+                    <a:pt x="4431702" y="522777"/>
+                  </a:lnTo>
+                  <a:lnTo>
+                    <a:pt x="4502047" y="526773"/>
+                  </a:lnTo>
+                  <a:lnTo>
+                    <a:pt x="4572391" y="530687"/>
+                  </a:lnTo>
+                  <a:lnTo>
+                    <a:pt x="4642736" y="534522"/>
+                  </a:lnTo>
+                  <a:lnTo>
+                    <a:pt x="4713080" y="538277"/>
+                  </a:lnTo>
+                  <a:lnTo>
+                    <a:pt x="4783425" y="541956"/>
+                  </a:lnTo>
+                  <a:lnTo>
+                    <a:pt x="4853769" y="545560"/>
+                  </a:lnTo>
+                  <a:lnTo>
+                    <a:pt x="4924114" y="549090"/>
+                  </a:lnTo>
+                  <a:lnTo>
+                    <a:pt x="4994458" y="552548"/>
+                  </a:lnTo>
+                  <a:lnTo>
+                    <a:pt x="5064803" y="555935"/>
+                  </a:lnTo>
+                  <a:lnTo>
+                    <a:pt x="5135147" y="559253"/>
+                  </a:lnTo>
+                  <a:lnTo>
+                    <a:pt x="5205492" y="562503"/>
+                  </a:lnTo>
+                  <a:lnTo>
+                    <a:pt x="5275836" y="565687"/>
+                  </a:lnTo>
+                  <a:lnTo>
+                    <a:pt x="5346181" y="568805"/>
+                  </a:lnTo>
+                  <a:lnTo>
+                    <a:pt x="5416525" y="571860"/>
+                  </a:lnTo>
+                  <a:lnTo>
+                    <a:pt x="5486870" y="574852"/>
+                  </a:lnTo>
+                  <a:lnTo>
+                    <a:pt x="5557214" y="577784"/>
+                  </a:lnTo>
+                  <a:lnTo>
+                    <a:pt x="5627559" y="580655"/>
+                  </a:lnTo>
+                  <a:lnTo>
+                    <a:pt x="5697903" y="583467"/>
+                  </a:lnTo>
+                  <a:lnTo>
+                    <a:pt x="5768248" y="586222"/>
+                  </a:lnTo>
+                  <a:lnTo>
+                    <a:pt x="5838592" y="588921"/>
+                  </a:lnTo>
+                  <a:lnTo>
+                    <a:pt x="5908937" y="591564"/>
+                  </a:lnTo>
+                  <a:lnTo>
+                    <a:pt x="5979281" y="594153"/>
+                  </a:lnTo>
+                  <a:lnTo>
+                    <a:pt x="6049626" y="596690"/>
+                  </a:lnTo>
+                  <a:lnTo>
+                    <a:pt x="6119970" y="599174"/>
+                  </a:lnTo>
+                  <a:lnTo>
+                    <a:pt x="6190315" y="601608"/>
+                  </a:lnTo>
+                  <a:lnTo>
+                    <a:pt x="6260659" y="603992"/>
+                  </a:lnTo>
+                  <a:lnTo>
+                    <a:pt x="6331004" y="606327"/>
+                  </a:lnTo>
+                  <a:lnTo>
+                    <a:pt x="6401348" y="608615"/>
+                  </a:lnTo>
+                  <a:lnTo>
+                    <a:pt x="6471693" y="610856"/>
+                  </a:lnTo>
+                  <a:lnTo>
+                    <a:pt x="6542037" y="613050"/>
+                  </a:lnTo>
+                  <a:lnTo>
+                    <a:pt x="6612382" y="615200"/>
+                  </a:lnTo>
+                  <a:lnTo>
+                    <a:pt x="6682726" y="617306"/>
+                  </a:lnTo>
+                  <a:lnTo>
+                    <a:pt x="6753071" y="619369"/>
+                  </a:lnTo>
+                  <a:lnTo>
+                    <a:pt x="6823415" y="621390"/>
+                  </a:lnTo>
+                  <a:lnTo>
+                    <a:pt x="6893760" y="623370"/>
+                  </a:lnTo>
+                  <a:lnTo>
+                    <a:pt x="6964104" y="625309"/>
+                  </a:lnTo>
+                </a:path>
+              </a:pathLst>
+            </a:custGeom>
+            <a:ln w="27101" cap="flat">
+              <a:solidFill>
+                <a:srgbClr val="FF8C00">
+                  <a:alpha val="100000"/>
+                </a:srgbClr>
+              </a:solidFill>
+              <a:prstDash val="solid"/>
+              <a:round/>
+            </a:ln>
+          </p:spPr>
+          <p:txBody>
+            <a:bodyPr/>
+            <a:lstStyle/>
+            <a:p/>
+          </p:txBody>
+        </p:sp>
+        <p:sp>
+          <p:nvSpPr>
+            <p:cNvPr id="74" name="pl74"/>
+            <p:cNvSpPr/>
+            <p:nvPr/>
+          </p:nvSpPr>
+          <p:spPr>
+            <a:xfrm>
+              <a:off x="887106" y="5294352"/>
+              <a:ext cx="7660515" cy="0"/>
+            </a:xfrm>
+            <a:custGeom>
+              <a:avLst/>
+              <a:pathLst>
+                <a:path w="7660515" h="0">
+                  <a:moveTo>
+                    <a:pt x="0" y="0"/>
+                  </a:moveTo>
+                  <a:lnTo>
+                    <a:pt x="7660515" y="0"/>
+                  </a:lnTo>
+                  <a:lnTo>
+                    <a:pt x="7660515" y="0"/>
+                  </a:lnTo>
+                </a:path>
+              </a:pathLst>
+            </a:custGeom>
+            <a:ln w="13550" cap="flat">
+              <a:solidFill>
+                <a:srgbClr val="7F7F7F">
+                  <a:alpha val="100000"/>
+                </a:srgbClr>
+              </a:solidFill>
+              <a:prstDash val="dash"/>
+              <a:round/>
+            </a:ln>
+          </p:spPr>
+          <p:txBody>
+            <a:bodyPr/>
+            <a:lstStyle/>
+            <a:p/>
+          </p:txBody>
+        </p:sp>
+        <p:sp>
+          <p:nvSpPr>
+            <p:cNvPr id="75" name="pl75"/>
+            <p:cNvSpPr/>
+            <p:nvPr/>
+          </p:nvSpPr>
+          <p:spPr>
+            <a:xfrm>
+              <a:off x="4215100" y="4336484"/>
+              <a:ext cx="0" cy="1317069"/>
+            </a:xfrm>
+            <a:custGeom>
+              <a:avLst/>
+              <a:pathLst>
+                <a:path w="0" h="1317069">
+                  <a:moveTo>
+                    <a:pt x="0" y="1317069"/>
+                  </a:moveTo>
+                  <a:lnTo>
+                    <a:pt x="0" y="0"/>
+                  </a:lnTo>
+                  <a:lnTo>
+                    <a:pt x="0" y="0"/>
+                  </a:lnTo>
+                </a:path>
+              </a:pathLst>
+            </a:custGeom>
+            <a:ln w="13550" cap="flat">
+              <a:solidFill>
+                <a:srgbClr val="666666">
+                  <a:alpha val="100000"/>
+                </a:srgbClr>
+              </a:solidFill>
+              <a:prstDash val="dot"/>
+              <a:round/>
+            </a:ln>
+          </p:spPr>
+          <p:txBody>
+            <a:bodyPr/>
+            <a:lstStyle/>
+            <a:p/>
+          </p:txBody>
+        </p:sp>
+        <p:sp>
+          <p:nvSpPr>
+            <p:cNvPr id="76" name="pl76"/>
+            <p:cNvSpPr/>
+            <p:nvPr/>
+          </p:nvSpPr>
+          <p:spPr>
+            <a:xfrm>
+              <a:off x="3046793" y="4336484"/>
+              <a:ext cx="0" cy="1317069"/>
+            </a:xfrm>
+            <a:custGeom>
+              <a:avLst/>
+              <a:pathLst>
+                <a:path w="0" h="1317069">
+                  <a:moveTo>
+                    <a:pt x="0" y="1317069"/>
+                  </a:moveTo>
+                  <a:lnTo>
+                    <a:pt x="0" y="0"/>
+                  </a:lnTo>
+                  <a:lnTo>
+                    <a:pt x="0" y="0"/>
+                  </a:lnTo>
+                </a:path>
+              </a:pathLst>
+            </a:custGeom>
+            <a:ln w="13550" cap="flat">
+              <a:solidFill>
+                <a:srgbClr val="4682B4">
+                  <a:alpha val="69803"/>
+                </a:srgbClr>
+              </a:solidFill>
+              <a:prstDash val="dash"/>
+              <a:round/>
+            </a:ln>
+          </p:spPr>
+          <p:txBody>
+            <a:bodyPr/>
+            <a:lstStyle/>
+            <a:p/>
+          </p:txBody>
+        </p:sp>
+        <p:sp>
+          <p:nvSpPr>
+            <p:cNvPr id="77" name="pl77"/>
+            <p:cNvSpPr/>
+            <p:nvPr/>
+          </p:nvSpPr>
+          <p:spPr>
+            <a:xfrm>
+              <a:off x="5409191" y="4336484"/>
+              <a:ext cx="0" cy="1317069"/>
+            </a:xfrm>
+            <a:custGeom>
+              <a:avLst/>
+              <a:pathLst>
+                <a:path w="0" h="1317069">
+                  <a:moveTo>
+                    <a:pt x="0" y="1317069"/>
+                  </a:moveTo>
+                  <a:lnTo>
+                    <a:pt x="0" y="0"/>
+                  </a:lnTo>
+                  <a:lnTo>
+                    <a:pt x="0" y="0"/>
+                  </a:lnTo>
+                </a:path>
+              </a:pathLst>
+            </a:custGeom>
+            <a:ln w="13550" cap="flat">
+              <a:solidFill>
+                <a:srgbClr val="4682B4">
+                  <a:alpha val="69803"/>
+                </a:srgbClr>
+              </a:solidFill>
+              <a:prstDash val="dash"/>
+              <a:round/>
+            </a:ln>
+          </p:spPr>
+          <p:txBody>
+            <a:bodyPr/>
+            <a:lstStyle/>
+            <a:p/>
+          </p:txBody>
+        </p:sp>
+        <p:sp>
+          <p:nvSpPr>
+            <p:cNvPr id="78" name="tx78"/>
+            <p:cNvSpPr/>
+            <p:nvPr/>
+          </p:nvSpPr>
+          <p:spPr>
+            <a:xfrm>
+              <a:off x="762297" y="5553636"/>
+              <a:ext cx="62179" cy="80101"/>
+            </a:xfrm>
+            <a:prstGeom prst="rect">
+              <a:avLst/>
+            </a:prstGeom>
+            <a:noFill/>
+          </p:spPr>
+          <p:txBody>
+            <a:bodyPr lIns="0" rIns="0" tIns="0" bIns="0" anchorCtr="1" anchor="ctr" wrap="none"/>
+            <a:lstStyle/>
+            <a:p>
+              <a:pPr algn="l" marL="0" marR="0" indent="0">
+                <a:lnSpc>
+                  <a:spcPts val="880"/>
+                </a:lnSpc>
+                <a:spcBef>
+                  <a:spcPts val="0"/>
+                </a:spcBef>
+                <a:spcAft>
+                  <a:spcPts val="0"/>
+                </a:spcAft>
+              </a:pPr>
+              <a:r>
+                <a:rPr sz="880">
+                  <a:solidFill>
+                    <a:srgbClr val="4D4D4D">
+                      <a:alpha val="100000"/>
+                    </a:srgbClr>
+                  </a:solidFill>
+                  <a:latin typeface="Helvetica"/>
+                  <a:cs typeface="Helvetica"/>
+                </a:rPr>
+                <a:t>0</a:t>
+              </a:r>
+            </a:p>
+          </p:txBody>
+        </p:sp>
+        <p:sp>
+          <p:nvSpPr>
+            <p:cNvPr id="79" name="tx79"/>
+            <p:cNvSpPr/>
+            <p:nvPr/>
+          </p:nvSpPr>
+          <p:spPr>
+            <a:xfrm>
+              <a:off x="762297" y="5254302"/>
+              <a:ext cx="62179" cy="80101"/>
+            </a:xfrm>
+            <a:prstGeom prst="rect">
+              <a:avLst/>
+            </a:prstGeom>
+            <a:noFill/>
+          </p:spPr>
+          <p:txBody>
+            <a:bodyPr lIns="0" rIns="0" tIns="0" bIns="0" anchorCtr="1" anchor="ctr" wrap="none"/>
+            <a:lstStyle/>
+            <a:p>
+              <a:pPr algn="l" marL="0" marR="0" indent="0">
+                <a:lnSpc>
+                  <a:spcPts val="880"/>
+                </a:lnSpc>
+                <a:spcBef>
+                  <a:spcPts val="0"/>
+                </a:spcBef>
+                <a:spcAft>
+                  <a:spcPts val="0"/>
+                </a:spcAft>
+              </a:pPr>
+              <a:r>
+                <a:rPr sz="880">
+                  <a:solidFill>
+                    <a:srgbClr val="4D4D4D">
+                      <a:alpha val="100000"/>
+                    </a:srgbClr>
+                  </a:solidFill>
+                  <a:latin typeface="Helvetica"/>
+                  <a:cs typeface="Helvetica"/>
+                </a:rPr>
+                <a:t>1</a:t>
+              </a:r>
+            </a:p>
+          </p:txBody>
+        </p:sp>
+        <p:sp>
+          <p:nvSpPr>
+            <p:cNvPr id="80" name="tx80"/>
+            <p:cNvSpPr/>
+            <p:nvPr/>
+          </p:nvSpPr>
+          <p:spPr>
+            <a:xfrm>
+              <a:off x="762297" y="4954968"/>
+              <a:ext cx="62179" cy="80101"/>
+            </a:xfrm>
+            <a:prstGeom prst="rect">
+              <a:avLst/>
+            </a:prstGeom>
+            <a:noFill/>
+          </p:spPr>
+          <p:txBody>
+            <a:bodyPr lIns="0" rIns="0" tIns="0" bIns="0" anchorCtr="1" anchor="ctr" wrap="none"/>
+            <a:lstStyle/>
+            <a:p>
+              <a:pPr algn="l" marL="0" marR="0" indent="0">
+                <a:lnSpc>
+                  <a:spcPts val="880"/>
+                </a:lnSpc>
+                <a:spcBef>
+                  <a:spcPts val="0"/>
+                </a:spcBef>
+                <a:spcAft>
+                  <a:spcPts val="0"/>
+                </a:spcAft>
+              </a:pPr>
+              <a:r>
+                <a:rPr sz="880">
+                  <a:solidFill>
+                    <a:srgbClr val="4D4D4D">
+                      <a:alpha val="100000"/>
+                    </a:srgbClr>
+                  </a:solidFill>
+                  <a:latin typeface="Helvetica"/>
+                  <a:cs typeface="Helvetica"/>
+                </a:rPr>
+                <a:t>2</a:t>
+              </a:r>
+            </a:p>
+          </p:txBody>
+        </p:sp>
+        <p:sp>
+          <p:nvSpPr>
+            <p:cNvPr id="81" name="tx81"/>
+            <p:cNvSpPr/>
+            <p:nvPr/>
+          </p:nvSpPr>
+          <p:spPr>
+            <a:xfrm>
+              <a:off x="762297" y="4655634"/>
+              <a:ext cx="62179" cy="80101"/>
+            </a:xfrm>
+            <a:prstGeom prst="rect">
+              <a:avLst/>
+            </a:prstGeom>
+            <a:noFill/>
+          </p:spPr>
+          <p:txBody>
+            <a:bodyPr lIns="0" rIns="0" tIns="0" bIns="0" anchorCtr="1" anchor="ctr" wrap="none"/>
+            <a:lstStyle/>
+            <a:p>
+              <a:pPr algn="l" marL="0" marR="0" indent="0">
+                <a:lnSpc>
+                  <a:spcPts val="880"/>
+                </a:lnSpc>
+                <a:spcBef>
+                  <a:spcPts val="0"/>
+                </a:spcBef>
+                <a:spcAft>
+                  <a:spcPts val="0"/>
+                </a:spcAft>
+              </a:pPr>
+              <a:r>
+                <a:rPr sz="880">
+                  <a:solidFill>
+                    <a:srgbClr val="4D4D4D">
+                      <a:alpha val="100000"/>
+                    </a:srgbClr>
+                  </a:solidFill>
+                  <a:latin typeface="Helvetica"/>
+                  <a:cs typeface="Helvetica"/>
+                </a:rPr>
+                <a:t>3</a:t>
+              </a:r>
+            </a:p>
+          </p:txBody>
+        </p:sp>
+        <p:sp>
+          <p:nvSpPr>
+            <p:cNvPr id="82" name="tx82"/>
+            <p:cNvSpPr/>
+            <p:nvPr/>
+          </p:nvSpPr>
+          <p:spPr>
+            <a:xfrm>
+              <a:off x="762297" y="4356300"/>
+              <a:ext cx="62179" cy="80101"/>
+            </a:xfrm>
+            <a:prstGeom prst="rect">
+              <a:avLst/>
+            </a:prstGeom>
+            <a:noFill/>
+          </p:spPr>
+          <p:txBody>
+            <a:bodyPr lIns="0" rIns="0" tIns="0" bIns="0" anchorCtr="1" anchor="ctr" wrap="none"/>
+            <a:lstStyle/>
+            <a:p>
+              <a:pPr algn="l" marL="0" marR="0" indent="0">
+                <a:lnSpc>
+                  <a:spcPts val="880"/>
+                </a:lnSpc>
+                <a:spcBef>
+                  <a:spcPts val="0"/>
+                </a:spcBef>
+                <a:spcAft>
+                  <a:spcPts val="0"/>
+                </a:spcAft>
+              </a:pPr>
+              <a:r>
+                <a:rPr sz="880">
+                  <a:solidFill>
+                    <a:srgbClr val="4D4D4D">
+                      <a:alpha val="100000"/>
+                    </a:srgbClr>
+                  </a:solidFill>
+                  <a:latin typeface="Helvetica"/>
+                  <a:cs typeface="Helvetica"/>
+                </a:rPr>
+                <a:t>4</a:t>
+              </a:r>
+            </a:p>
+          </p:txBody>
+        </p:sp>
+        <p:sp>
+          <p:nvSpPr>
+            <p:cNvPr id="83" name="tx83"/>
+            <p:cNvSpPr/>
+            <p:nvPr/>
+          </p:nvSpPr>
+          <p:spPr>
+            <a:xfrm>
+              <a:off x="1164222" y="5716183"/>
+              <a:ext cx="161574" cy="80101"/>
+            </a:xfrm>
+            <a:prstGeom prst="rect">
+              <a:avLst/>
+            </a:prstGeom>
+            <a:noFill/>
+          </p:spPr>
+          <p:txBody>
+            <a:bodyPr lIns="0" rIns="0" tIns="0" bIns="0" anchorCtr="1" anchor="ctr" wrap="none"/>
+            <a:lstStyle/>
+            <a:p>
+              <a:pPr algn="l" marL="0" marR="0" indent="0">
+                <a:lnSpc>
+                  <a:spcPts val="880"/>
+                </a:lnSpc>
+                <a:spcBef>
+                  <a:spcPts val="0"/>
+                </a:spcBef>
+                <a:spcAft>
+                  <a:spcPts val="0"/>
+                </a:spcAft>
+              </a:pPr>
+              <a:r>
+                <a:rPr sz="880">
+                  <a:solidFill>
+                    <a:srgbClr val="4D4D4D">
+                      <a:alpha val="100000"/>
+                    </a:srgbClr>
+                  </a:solidFill>
+                  <a:latin typeface="Helvetica"/>
+                  <a:cs typeface="Helvetica"/>
+                </a:rPr>
+                <a:t>-50</a:t>
+              </a:r>
+            </a:p>
+          </p:txBody>
+        </p:sp>
+        <p:sp>
+          <p:nvSpPr>
+            <p:cNvPr id="84" name="tx84"/>
+            <p:cNvSpPr/>
+            <p:nvPr/>
+          </p:nvSpPr>
+          <p:spPr>
+            <a:xfrm>
+              <a:off x="2024485" y="5716183"/>
+              <a:ext cx="161574" cy="80101"/>
+            </a:xfrm>
+            <a:prstGeom prst="rect">
+              <a:avLst/>
+            </a:prstGeom>
+            <a:noFill/>
+          </p:spPr>
+          <p:txBody>
+            <a:bodyPr lIns="0" rIns="0" tIns="0" bIns="0" anchorCtr="1" anchor="ctr" wrap="none"/>
+            <a:lstStyle/>
+            <a:p>
+              <a:pPr algn="l" marL="0" marR="0" indent="0">
+                <a:lnSpc>
+                  <a:spcPts val="880"/>
+                </a:lnSpc>
+                <a:spcBef>
+                  <a:spcPts val="0"/>
+                </a:spcBef>
+                <a:spcAft>
+                  <a:spcPts val="0"/>
+                </a:spcAft>
+              </a:pPr>
+              <a:r>
+                <a:rPr sz="880">
+                  <a:solidFill>
+                    <a:srgbClr val="4D4D4D">
+                      <a:alpha val="100000"/>
+                    </a:srgbClr>
+                  </a:solidFill>
+                  <a:latin typeface="Helvetica"/>
+                  <a:cs typeface="Helvetica"/>
+                </a:rPr>
+                <a:t>-40</a:t>
+              </a:r>
+            </a:p>
+          </p:txBody>
+        </p:sp>
+        <p:sp>
+          <p:nvSpPr>
+            <p:cNvPr id="85" name="tx85"/>
+            <p:cNvSpPr/>
+            <p:nvPr/>
+          </p:nvSpPr>
+          <p:spPr>
+            <a:xfrm>
+              <a:off x="2884749" y="5716183"/>
+              <a:ext cx="161574" cy="80101"/>
+            </a:xfrm>
+            <a:prstGeom prst="rect">
+              <a:avLst/>
+            </a:prstGeom>
+            <a:noFill/>
+          </p:spPr>
+          <p:txBody>
+            <a:bodyPr lIns="0" rIns="0" tIns="0" bIns="0" anchorCtr="1" anchor="ctr" wrap="none"/>
+            <a:lstStyle/>
+            <a:p>
+              <a:pPr algn="l" marL="0" marR="0" indent="0">
+                <a:lnSpc>
+                  <a:spcPts val="880"/>
+                </a:lnSpc>
+                <a:spcBef>
+                  <a:spcPts val="0"/>
+                </a:spcBef>
+                <a:spcAft>
+                  <a:spcPts val="0"/>
+                </a:spcAft>
+              </a:pPr>
+              <a:r>
+                <a:rPr sz="880">
+                  <a:solidFill>
+                    <a:srgbClr val="4D4D4D">
+                      <a:alpha val="100000"/>
+                    </a:srgbClr>
+                  </a:solidFill>
+                  <a:latin typeface="Helvetica"/>
+                  <a:cs typeface="Helvetica"/>
+                </a:rPr>
+                <a:t>-30</a:t>
+              </a:r>
+            </a:p>
+          </p:txBody>
+        </p:sp>
+        <p:sp>
+          <p:nvSpPr>
+            <p:cNvPr id="86" name="tx86"/>
+            <p:cNvSpPr/>
+            <p:nvPr/>
+          </p:nvSpPr>
+          <p:spPr>
+            <a:xfrm>
+              <a:off x="3745012" y="5716183"/>
+              <a:ext cx="161574" cy="80101"/>
+            </a:xfrm>
+            <a:prstGeom prst="rect">
+              <a:avLst/>
+            </a:prstGeom>
+            <a:noFill/>
+          </p:spPr>
+          <p:txBody>
+            <a:bodyPr lIns="0" rIns="0" tIns="0" bIns="0" anchorCtr="1" anchor="ctr" wrap="none"/>
+            <a:lstStyle/>
+            <a:p>
+              <a:pPr algn="l" marL="0" marR="0" indent="0">
+                <a:lnSpc>
+                  <a:spcPts val="880"/>
+                </a:lnSpc>
+                <a:spcBef>
+                  <a:spcPts val="0"/>
+                </a:spcBef>
+                <a:spcAft>
+                  <a:spcPts val="0"/>
+                </a:spcAft>
+              </a:pPr>
+              <a:r>
+                <a:rPr sz="880">
+                  <a:solidFill>
+                    <a:srgbClr val="4D4D4D">
+                      <a:alpha val="100000"/>
+                    </a:srgbClr>
+                  </a:solidFill>
+                  <a:latin typeface="Helvetica"/>
+                  <a:cs typeface="Helvetica"/>
+                </a:rPr>
+                <a:t>-20</a:t>
+              </a:r>
+            </a:p>
+          </p:txBody>
+        </p:sp>
+        <p:sp>
+          <p:nvSpPr>
+            <p:cNvPr id="87" name="tx87"/>
+            <p:cNvSpPr/>
+            <p:nvPr/>
+          </p:nvSpPr>
+          <p:spPr>
+            <a:xfrm>
+              <a:off x="4605275" y="5716183"/>
+              <a:ext cx="161574" cy="80101"/>
+            </a:xfrm>
+            <a:prstGeom prst="rect">
+              <a:avLst/>
+            </a:prstGeom>
+            <a:noFill/>
+          </p:spPr>
+          <p:txBody>
+            <a:bodyPr lIns="0" rIns="0" tIns="0" bIns="0" anchorCtr="1" anchor="ctr" wrap="none"/>
+            <a:lstStyle/>
+            <a:p>
+              <a:pPr algn="l" marL="0" marR="0" indent="0">
+                <a:lnSpc>
+                  <a:spcPts val="880"/>
+                </a:lnSpc>
+                <a:spcBef>
+                  <a:spcPts val="0"/>
+                </a:spcBef>
+                <a:spcAft>
+                  <a:spcPts val="0"/>
+                </a:spcAft>
+              </a:pPr>
+              <a:r>
+                <a:rPr sz="880">
+                  <a:solidFill>
+                    <a:srgbClr val="4D4D4D">
+                      <a:alpha val="100000"/>
+                    </a:srgbClr>
+                  </a:solidFill>
+                  <a:latin typeface="Helvetica"/>
+                  <a:cs typeface="Helvetica"/>
+                </a:rPr>
+                <a:t>-10</a:t>
+              </a:r>
+            </a:p>
+          </p:txBody>
+        </p:sp>
+        <p:sp>
+          <p:nvSpPr>
+            <p:cNvPr id="88" name="tx88"/>
+            <p:cNvSpPr/>
+            <p:nvPr/>
+          </p:nvSpPr>
+          <p:spPr>
+            <a:xfrm>
+              <a:off x="5515235" y="5716183"/>
+              <a:ext cx="62179" cy="80101"/>
+            </a:xfrm>
+            <a:prstGeom prst="rect">
+              <a:avLst/>
+            </a:prstGeom>
+            <a:noFill/>
+          </p:spPr>
+          <p:txBody>
+            <a:bodyPr lIns="0" rIns="0" tIns="0" bIns="0" anchorCtr="1" anchor="ctr" wrap="none"/>
+            <a:lstStyle/>
+            <a:p>
+              <a:pPr algn="l" marL="0" marR="0" indent="0">
+                <a:lnSpc>
+                  <a:spcPts val="880"/>
+                </a:lnSpc>
+                <a:spcBef>
+                  <a:spcPts val="0"/>
+                </a:spcBef>
+                <a:spcAft>
+                  <a:spcPts val="0"/>
+                </a:spcAft>
+              </a:pPr>
+              <a:r>
+                <a:rPr sz="880">
+                  <a:solidFill>
+                    <a:srgbClr val="4D4D4D">
+                      <a:alpha val="100000"/>
+                    </a:srgbClr>
+                  </a:solidFill>
+                  <a:latin typeface="Helvetica"/>
+                  <a:cs typeface="Helvetica"/>
+                </a:rPr>
+                <a:t>0</a:t>
+              </a:r>
+            </a:p>
+          </p:txBody>
+        </p:sp>
+        <p:sp>
+          <p:nvSpPr>
+            <p:cNvPr id="89" name="tx89"/>
+            <p:cNvSpPr/>
+            <p:nvPr/>
+          </p:nvSpPr>
+          <p:spPr>
+            <a:xfrm>
+              <a:off x="6344409" y="5716183"/>
+              <a:ext cx="124358" cy="80101"/>
+            </a:xfrm>
+            <a:prstGeom prst="rect">
+              <a:avLst/>
+            </a:prstGeom>
+            <a:noFill/>
+          </p:spPr>
+          <p:txBody>
+            <a:bodyPr lIns="0" rIns="0" tIns="0" bIns="0" anchorCtr="1" anchor="ctr" wrap="none"/>
+            <a:lstStyle/>
+            <a:p>
+              <a:pPr algn="l" marL="0" marR="0" indent="0">
+                <a:lnSpc>
+                  <a:spcPts val="880"/>
+                </a:lnSpc>
+                <a:spcBef>
+                  <a:spcPts val="0"/>
+                </a:spcBef>
+                <a:spcAft>
+                  <a:spcPts val="0"/>
+                </a:spcAft>
+              </a:pPr>
+              <a:r>
+                <a:rPr sz="880">
+                  <a:solidFill>
+                    <a:srgbClr val="4D4D4D">
+                      <a:alpha val="100000"/>
+                    </a:srgbClr>
+                  </a:solidFill>
+                  <a:latin typeface="Helvetica"/>
+                  <a:cs typeface="Helvetica"/>
+                </a:rPr>
+                <a:t>10</a:t>
+              </a:r>
+            </a:p>
+          </p:txBody>
+        </p:sp>
+        <p:sp>
+          <p:nvSpPr>
+            <p:cNvPr id="90" name="tx90"/>
+            <p:cNvSpPr/>
+            <p:nvPr/>
+          </p:nvSpPr>
+          <p:spPr>
+            <a:xfrm>
+              <a:off x="7204672" y="5716183"/>
+              <a:ext cx="124358" cy="80101"/>
+            </a:xfrm>
+            <a:prstGeom prst="rect">
+              <a:avLst/>
+            </a:prstGeom>
+            <a:noFill/>
+          </p:spPr>
+          <p:txBody>
+            <a:bodyPr lIns="0" rIns="0" tIns="0" bIns="0" anchorCtr="1" anchor="ctr" wrap="none"/>
+            <a:lstStyle/>
+            <a:p>
+              <a:pPr algn="l" marL="0" marR="0" indent="0">
+                <a:lnSpc>
+                  <a:spcPts val="880"/>
+                </a:lnSpc>
+                <a:spcBef>
+                  <a:spcPts val="0"/>
+                </a:spcBef>
+                <a:spcAft>
+                  <a:spcPts val="0"/>
+                </a:spcAft>
+              </a:pPr>
+              <a:r>
+                <a:rPr sz="880">
+                  <a:solidFill>
+                    <a:srgbClr val="4D4D4D">
+                      <a:alpha val="100000"/>
+                    </a:srgbClr>
+                  </a:solidFill>
+                  <a:latin typeface="Helvetica"/>
+                  <a:cs typeface="Helvetica"/>
+                </a:rPr>
+                <a:t>20</a:t>
+              </a:r>
+            </a:p>
+          </p:txBody>
+        </p:sp>
+        <p:sp>
+          <p:nvSpPr>
+            <p:cNvPr id="91" name="tx91"/>
+            <p:cNvSpPr/>
+            <p:nvPr/>
+          </p:nvSpPr>
+          <p:spPr>
+            <a:xfrm>
+              <a:off x="8064935" y="5716183"/>
+              <a:ext cx="124358" cy="80101"/>
+            </a:xfrm>
+            <a:prstGeom prst="rect">
+              <a:avLst/>
+            </a:prstGeom>
+            <a:noFill/>
+          </p:spPr>
+          <p:txBody>
+            <a:bodyPr lIns="0" rIns="0" tIns="0" bIns="0" anchorCtr="1" anchor="ctr" wrap="none"/>
+            <a:lstStyle/>
+            <a:p>
+              <a:pPr algn="l" marL="0" marR="0" indent="0">
+                <a:lnSpc>
+                  <a:spcPts val="880"/>
+                </a:lnSpc>
+                <a:spcBef>
+                  <a:spcPts val="0"/>
+                </a:spcBef>
+                <a:spcAft>
+                  <a:spcPts val="0"/>
+                </a:spcAft>
+              </a:pPr>
+              <a:r>
+                <a:rPr sz="880">
+                  <a:solidFill>
+                    <a:srgbClr val="4D4D4D">
+                      <a:alpha val="100000"/>
+                    </a:srgbClr>
+                  </a:solidFill>
+                  <a:latin typeface="Helvetica"/>
+                  <a:cs typeface="Helvetica"/>
+                </a:rPr>
+                <a:t>30</a:t>
+              </a:r>
+            </a:p>
+          </p:txBody>
+        </p:sp>
+        <p:sp>
+          <p:nvSpPr>
+            <p:cNvPr id="92" name="tx92"/>
+            <p:cNvSpPr/>
+            <p:nvPr/>
+          </p:nvSpPr>
+          <p:spPr>
+            <a:xfrm>
+              <a:off x="1561815" y="5855859"/>
+              <a:ext cx="6311097" cy="100218"/>
+            </a:xfrm>
+            <a:prstGeom prst="rect">
+              <a:avLst/>
+            </a:prstGeom>
+            <a:noFill/>
+          </p:spPr>
+          <p:txBody>
+            <a:bodyPr lIns="0" rIns="0" tIns="0" bIns="0" anchorCtr="1" anchor="ctr" wrap="none"/>
+            <a:lstStyle/>
+            <a:p>
+              <a:pPr algn="l" marL="0" marR="0" indent="0">
+                <a:lnSpc>
+                  <a:spcPts val="1100"/>
+                </a:lnSpc>
+                <a:spcBef>
+                  <a:spcPts val="0"/>
+                </a:spcBef>
+                <a:spcAft>
+                  <a:spcPts val="0"/>
+                </a:spcAft>
+              </a:pPr>
+              <a:r>
+                <a:rPr sz="1100">
+                  <a:solidFill>
+                    <a:srgbClr val="000000">
+                      <a:alpha val="100000"/>
+                    </a:srgbClr>
+                  </a:solidFill>
+                  <a:latin typeface="Helvetica"/>
+                  <a:cs typeface="Helvetica"/>
+                </a:rPr>
+                <a:t>Sensitivity eGFR Difference (%): 100 × (CKD-EPI 2012 CysC − CKD-EPI 2021 Cr) / CKD-EPI 2021 Cr</a:t>
+              </a:r>
+            </a:p>
+          </p:txBody>
+        </p:sp>
+        <p:sp>
+          <p:nvSpPr>
+            <p:cNvPr id="93" name="tx93"/>
+            <p:cNvSpPr/>
+            <p:nvPr/>
+          </p:nvSpPr>
+          <p:spPr>
+            <a:xfrm rot="-5400000">
+              <a:off x="138035" y="4944909"/>
+              <a:ext cx="1016904" cy="100218"/>
+            </a:xfrm>
+            <a:prstGeom prst="rect">
+              <a:avLst/>
+            </a:prstGeom>
+            <a:noFill/>
+          </p:spPr>
+          <p:txBody>
+            <a:bodyPr lIns="0" rIns="0" tIns="0" bIns="0" anchorCtr="1" anchor="ctr" wrap="none"/>
+            <a:lstStyle/>
+            <a:p>
+              <a:pPr algn="l" marL="0" marR="0" indent="0">
+                <a:lnSpc>
+                  <a:spcPts val="1100"/>
+                </a:lnSpc>
+                <a:spcBef>
+                  <a:spcPts val="0"/>
+                </a:spcBef>
+                <a:spcAft>
+                  <a:spcPts val="0"/>
+                </a:spcAft>
+              </a:pPr>
+              <a:r>
+                <a:rPr sz="1100">
+                  <a:solidFill>
+                    <a:srgbClr val="000000">
+                      <a:alpha val="100000"/>
+                    </a:srgbClr>
+                  </a:solidFill>
+                  <a:latin typeface="Helvetica"/>
+                  <a:cs typeface="Helvetica"/>
+                </a:rPr>
+                <a:t>subHR (95% CI)</a:t>
+              </a:r>
+            </a:p>
+          </p:txBody>
+        </p:sp>
+        <p:sp>
+          <p:nvSpPr>
+            <p:cNvPr id="94" name="tx94"/>
+            <p:cNvSpPr/>
+            <p:nvPr/>
+          </p:nvSpPr>
+          <p:spPr>
+            <a:xfrm>
+              <a:off x="887106" y="4159544"/>
+              <a:ext cx="6959864" cy="82021"/>
+            </a:xfrm>
+            <a:prstGeom prst="rect">
+              <a:avLst/>
+            </a:prstGeom>
+            <a:noFill/>
+          </p:spPr>
+          <p:txBody>
+            <a:bodyPr lIns="0" rIns="0" tIns="0" bIns="0" anchorCtr="1" anchor="ctr" wrap="none"/>
+            <a:lstStyle/>
+            <a:p>
+              <a:pPr algn="l" marL="0" marR="0" indent="0">
+                <a:lnSpc>
+                  <a:spcPts val="900"/>
+                </a:lnSpc>
+                <a:spcBef>
+                  <a:spcPts val="0"/>
+                </a:spcBef>
+                <a:spcAft>
+                  <a:spcPts val="0"/>
+                </a:spcAft>
+              </a:pPr>
+              <a:r>
+                <a:rPr sz="900">
+                  <a:solidFill>
+                    <a:srgbClr val="404040">
+                      <a:alpha val="100000"/>
+                    </a:srgbClr>
+                  </a:solidFill>
+                  <a:latin typeface="Helvetica"/>
+                  <a:cs typeface="Helvetica"/>
+                </a:rPr>
+                <a:t>subHR per 10 % decline: 1.29 (1.04-1.59), p_Bonf = 0.118 (n = 6)  |  per IQR decline (Δ = 27.5 %): 2.00 (1.12-3.58)  |  IQR: [-29.1, -1.6] %</a:t>
+              </a:r>
+            </a:p>
+          </p:txBody>
+        </p:sp>
+        <p:sp>
+          <p:nvSpPr>
+            <p:cNvPr id="95" name="tx95"/>
+            <p:cNvSpPr/>
+            <p:nvPr/>
+          </p:nvSpPr>
+          <p:spPr>
+            <a:xfrm>
+              <a:off x="887106" y="3932770"/>
               <a:ext cx="2951591" cy="120152"/>
             </a:xfrm>
             <a:prstGeom prst="rect">
